--- a/si-portal/catalogues/TerraHive_Catalogue.pptx
+++ b/si-portal/catalogues/TerraHive_Catalogue.pptx
@@ -6,11 +6,12 @@
   </p:sldMasterIdLst>
   <p:sldIdLst>
     <p:sldId id="256" r:id="rId7"/>
-    <p:sldId id="257" r:id="rId8"/>
-    <p:sldId id="258" r:id="rId9"/>
-    <p:sldId id="259" r:id="rId10"/>
-    <p:sldId id="260" r:id="rId11"/>
-    <p:sldId id="261" r:id="rId12"/>
+    <p:sldId id="257" r:id="rId9"/>
+    <p:sldId id="258" r:id="rId10"/>
+    <p:sldId id="259" r:id="rId11"/>
+    <p:sldId id="260" r:id="rId12"/>
+    <p:sldId id="261" r:id="rId13"/>
+    <p:sldId id="262" r:id="rId14"/>
   </p:sldIdLst>
   <p:sldSz cx="12191695" cy="6858000" type="screen4x3"/>
   <p:notesSz cx="6858000" cy="9144000"/>
@@ -110,6 +111,1177 @@
     </a:lvl9pPr>
   </p:defaultTextStyle>
 </p:presentation>
+</file>
+
+<file path=ppt/notesMasters/notesMaster1.xml><?xml version="1.0" encoding="utf-8"?>
+<p:notesMaster xmlns:a="http://schemas.openxmlformats.org/drawingml/2006/main" xmlns:p="http://schemas.openxmlformats.org/presentationml/2006/main" xmlns:r="http://schemas.openxmlformats.org/officeDocument/2006/relationships">
+  <p:cSld>
+    <p:bg>
+      <p:bgRef idx="1001">
+        <a:schemeClr val="bg1"/>
+      </p:bgRef>
+    </p:bg>
+    <p:spTree>
+      <p:nvGrpSpPr>
+        <p:cNvPr id="1" name=""/>
+        <p:cNvGrpSpPr/>
+        <p:nvPr/>
+      </p:nvGrpSpPr>
+      <p:grpSpPr>
+        <a:xfrm>
+          <a:off x="0" y="0"/>
+          <a:ext cx="0" cy="0"/>
+          <a:chOff x="0" y="0"/>
+          <a:chExt cx="0" cy="0"/>
+        </a:xfrm>
+      </p:grpSpPr>
+      <p:sp>
+        <p:nvSpPr>
+          <p:cNvPr id="2" name="Header Placeholder 1"/>
+          <p:cNvSpPr>
+            <a:spLocks noGrp="1"/>
+          </p:cNvSpPr>
+          <p:nvPr>
+            <p:ph type="hdr" sz="quarter"/>
+          </p:nvPr>
+        </p:nvSpPr>
+        <p:spPr>
+          <a:xfrm>
+            <a:off x="0" y="0"/>
+            <a:ext cx="2971800" cy="457200"/>
+          </a:xfrm>
+          <a:prstGeom prst="rect">
+            <a:avLst/>
+          </a:prstGeom>
+        </p:spPr>
+        <p:txBody>
+          <a:bodyPr vert="horz" lIns="91440" tIns="45720" rIns="91440" bIns="45720" rtlCol="0"/>
+          <a:lstStyle>
+            <a:lvl1pPr algn="l">
+              <a:defRPr sz="1200"/>
+            </a:lvl1pPr>
+          </a:lstStyle>
+          <a:p>
+            <a:endParaRPr lang="en-US"/>
+          </a:p>
+        </p:txBody>
+      </p:sp>
+      <p:sp>
+        <p:nvSpPr>
+          <p:cNvPr id="3" name="Date Placeholder 2"/>
+          <p:cNvSpPr>
+            <a:spLocks noGrp="1"/>
+          </p:cNvSpPr>
+          <p:nvPr>
+            <p:ph type="dt" idx="1"/>
+          </p:nvPr>
+        </p:nvSpPr>
+        <p:spPr>
+          <a:xfrm>
+            <a:off x="3884613" y="0"/>
+            <a:ext cx="2971800" cy="457200"/>
+          </a:xfrm>
+          <a:prstGeom prst="rect">
+            <a:avLst/>
+          </a:prstGeom>
+        </p:spPr>
+        <p:txBody>
+          <a:bodyPr vert="horz" lIns="91440" tIns="45720" rIns="91440" bIns="45720" rtlCol="0"/>
+          <a:lstStyle>
+            <a:lvl1pPr algn="r">
+              <a:defRPr sz="1200"/>
+            </a:lvl1pPr>
+          </a:lstStyle>
+          <a:p>
+            <a:fld id="{0F89C1C7-3DCD-1040-A9CF-14679D8B5DDD}" type="datetimeFigureOut">
+              <a:rPr lang="en-US" smtClean="0"/>
+              <a:t>10/17/16</a:t>
+            </a:fld>
+            <a:endParaRPr lang="en-US"/>
+          </a:p>
+        </p:txBody>
+      </p:sp>
+      <p:sp>
+        <p:nvSpPr>
+          <p:cNvPr id="4" name="Slide Image Placeholder 3"/>
+          <p:cNvSpPr>
+            <a:spLocks noGrp="1" noRot="1" noChangeAspect="1"/>
+          </p:cNvSpPr>
+          <p:nvPr>
+            <p:ph type="sldImg" idx="2"/>
+          </p:nvPr>
+        </p:nvSpPr>
+        <p:spPr>
+          <a:xfrm>
+            <a:off x="1143000" y="685800"/>
+            <a:ext cx="4572000" cy="3429000"/>
+          </a:xfrm>
+          <a:prstGeom prst="rect">
+            <a:avLst/>
+          </a:prstGeom>
+          <a:noFill/>
+          <a:ln w="12700">
+            <a:solidFill>
+              <a:prstClr val="black"/>
+            </a:solidFill>
+          </a:ln>
+        </p:spPr>
+        <p:txBody>
+          <a:bodyPr vert="horz" lIns="91440" tIns="45720" rIns="91440" bIns="45720" rtlCol="0" anchor="ctr"/>
+          <a:lstStyle/>
+          <a:p>
+            <a:endParaRPr lang="en-US"/>
+          </a:p>
+        </p:txBody>
+      </p:sp>
+      <p:sp>
+        <p:nvSpPr>
+          <p:cNvPr id="5" name="Notes Placeholder 4"/>
+          <p:cNvSpPr>
+            <a:spLocks noGrp="1"/>
+          </p:cNvSpPr>
+          <p:nvPr>
+            <p:ph type="body" sz="quarter" idx="3"/>
+          </p:nvPr>
+        </p:nvSpPr>
+        <p:spPr>
+          <a:xfrm>
+            <a:off x="685800" y="4343400"/>
+            <a:ext cx="5486400" cy="4114800"/>
+          </a:xfrm>
+          <a:prstGeom prst="rect">
+            <a:avLst/>
+          </a:prstGeom>
+        </p:spPr>
+        <p:txBody>
+          <a:bodyPr vert="horz" lIns="91440" tIns="45720" rIns="91440" bIns="45720" rtlCol="0"/>
+          <a:lstStyle/>
+          <a:p>
+            <a:pPr lvl="0"/>
+            <a:r>
+              <a:rPr lang="en-US" smtClean="0"/>
+              <a:t>Click to edit Master text styles</a:t>
+            </a:r>
+          </a:p>
+          <a:p>
+            <a:pPr lvl="1"/>
+            <a:r>
+              <a:rPr lang="en-US" smtClean="0"/>
+              <a:t>Second level</a:t>
+            </a:r>
+          </a:p>
+          <a:p>
+            <a:pPr lvl="2"/>
+            <a:r>
+              <a:rPr lang="en-US" smtClean="0"/>
+              <a:t>Third level</a:t>
+            </a:r>
+          </a:p>
+          <a:p>
+            <a:pPr lvl="3"/>
+            <a:r>
+              <a:rPr lang="en-US" smtClean="0"/>
+              <a:t>Fourth level</a:t>
+            </a:r>
+          </a:p>
+          <a:p>
+            <a:pPr lvl="4"/>
+            <a:r>
+              <a:rPr lang="en-US" smtClean="0"/>
+              <a:t>Fifth level</a:t>
+            </a:r>
+            <a:endParaRPr lang="en-US"/>
+          </a:p>
+        </p:txBody>
+      </p:sp>
+      <p:sp>
+        <p:nvSpPr>
+          <p:cNvPr id="6" name="Footer Placeholder 5"/>
+          <p:cNvSpPr>
+            <a:spLocks noGrp="1"/>
+          </p:cNvSpPr>
+          <p:nvPr>
+            <p:ph type="ftr" sz="quarter" idx="4"/>
+          </p:nvPr>
+        </p:nvSpPr>
+        <p:spPr>
+          <a:xfrm>
+            <a:off x="0" y="8685213"/>
+            <a:ext cx="2971800" cy="457200"/>
+          </a:xfrm>
+          <a:prstGeom prst="rect">
+            <a:avLst/>
+          </a:prstGeom>
+        </p:spPr>
+        <p:txBody>
+          <a:bodyPr vert="horz" lIns="91440" tIns="45720" rIns="91440" bIns="45720" rtlCol="0" anchor="b"/>
+          <a:lstStyle>
+            <a:lvl1pPr algn="l">
+              <a:defRPr sz="1200"/>
+            </a:lvl1pPr>
+          </a:lstStyle>
+          <a:p>
+            <a:endParaRPr lang="en-US"/>
+          </a:p>
+        </p:txBody>
+      </p:sp>
+      <p:sp>
+        <p:nvSpPr>
+          <p:cNvPr id="7" name="Slide Number Placeholder 6"/>
+          <p:cNvSpPr>
+            <a:spLocks noGrp="1"/>
+          </p:cNvSpPr>
+          <p:nvPr>
+            <p:ph type="sldNum" sz="quarter" idx="5"/>
+          </p:nvPr>
+        </p:nvSpPr>
+        <p:spPr>
+          <a:xfrm>
+            <a:off x="3884613" y="8685213"/>
+            <a:ext cx="2971800" cy="457200"/>
+          </a:xfrm>
+          <a:prstGeom prst="rect">
+            <a:avLst/>
+          </a:prstGeom>
+        </p:spPr>
+        <p:txBody>
+          <a:bodyPr vert="horz" lIns="91440" tIns="45720" rIns="91440" bIns="45720" rtlCol="0" anchor="b"/>
+          <a:lstStyle>
+            <a:lvl1pPr algn="r">
+              <a:defRPr sz="1200"/>
+            </a:lvl1pPr>
+          </a:lstStyle>
+          <a:p>
+            <a:fld id="{BB5E49A5-4136-284D-997B-48E1D791AD67}" type="slidenum">
+              <a:rPr lang="en-US" smtClean="0"/>
+              <a:t>‹#›</a:t>
+            </a:fld>
+            <a:endParaRPr lang="en-US"/>
+          </a:p>
+        </p:txBody>
+      </p:sp>
+    </p:spTree>
+    <p:extLst>
+      <p:ext uri="{BB962C8B-B14F-4D97-AF65-F5344CB8AC3E}">
+        <p14:creationId xmlns:p14="http://schemas.microsoft.com/office/powerpoint/2010/main" val="2623252185"/>
+      </p:ext>
+    </p:extLst>
+  </p:cSld>
+  <p:clrMap bg1="lt1" tx1="dk1" bg2="lt2" tx2="dk2" accent1="accent1" accent2="accent2" accent3="accent3" accent4="accent4" accent5="accent5" accent6="accent6" hlink="hlink" folHlink="folHlink"/>
+  <p:notesStyle>
+    <a:lvl1pPr marL="0" algn="l" defTabSz="457200" rtl="0" eaLnBrk="1" latinLnBrk="0" hangingPunct="1">
+      <a:defRPr sz="1200" kern="1200">
+        <a:solidFill>
+          <a:schemeClr val="tx1"/>
+        </a:solidFill>
+        <a:latin typeface="+mn-lt"/>
+        <a:ea typeface="+mn-ea"/>
+        <a:cs typeface="+mn-cs"/>
+      </a:defRPr>
+    </a:lvl1pPr>
+    <a:lvl2pPr marL="457200" algn="l" defTabSz="457200" rtl="0" eaLnBrk="1" latinLnBrk="0" hangingPunct="1">
+      <a:defRPr sz="1200" kern="1200">
+        <a:solidFill>
+          <a:schemeClr val="tx1"/>
+        </a:solidFill>
+        <a:latin typeface="+mn-lt"/>
+        <a:ea typeface="+mn-ea"/>
+        <a:cs typeface="+mn-cs"/>
+      </a:defRPr>
+    </a:lvl2pPr>
+    <a:lvl3pPr marL="914400" algn="l" defTabSz="457200" rtl="0" eaLnBrk="1" latinLnBrk="0" hangingPunct="1">
+      <a:defRPr sz="1200" kern="1200">
+        <a:solidFill>
+          <a:schemeClr val="tx1"/>
+        </a:solidFill>
+        <a:latin typeface="+mn-lt"/>
+        <a:ea typeface="+mn-ea"/>
+        <a:cs typeface="+mn-cs"/>
+      </a:defRPr>
+    </a:lvl3pPr>
+    <a:lvl4pPr marL="1371600" algn="l" defTabSz="457200" rtl="0" eaLnBrk="1" latinLnBrk="0" hangingPunct="1">
+      <a:defRPr sz="1200" kern="1200">
+        <a:solidFill>
+          <a:schemeClr val="tx1"/>
+        </a:solidFill>
+        <a:latin typeface="+mn-lt"/>
+        <a:ea typeface="+mn-ea"/>
+        <a:cs typeface="+mn-cs"/>
+      </a:defRPr>
+    </a:lvl4pPr>
+    <a:lvl5pPr marL="1828800" algn="l" defTabSz="457200" rtl="0" eaLnBrk="1" latinLnBrk="0" hangingPunct="1">
+      <a:defRPr sz="1200" kern="1200">
+        <a:solidFill>
+          <a:schemeClr val="tx1"/>
+        </a:solidFill>
+        <a:latin typeface="+mn-lt"/>
+        <a:ea typeface="+mn-ea"/>
+        <a:cs typeface="+mn-cs"/>
+      </a:defRPr>
+    </a:lvl5pPr>
+    <a:lvl6pPr marL="2286000" algn="l" defTabSz="457200" rtl="0" eaLnBrk="1" latinLnBrk="0" hangingPunct="1">
+      <a:defRPr sz="1200" kern="1200">
+        <a:solidFill>
+          <a:schemeClr val="tx1"/>
+        </a:solidFill>
+        <a:latin typeface="+mn-lt"/>
+        <a:ea typeface="+mn-ea"/>
+        <a:cs typeface="+mn-cs"/>
+      </a:defRPr>
+    </a:lvl6pPr>
+    <a:lvl7pPr marL="2743200" algn="l" defTabSz="457200" rtl="0" eaLnBrk="1" latinLnBrk="0" hangingPunct="1">
+      <a:defRPr sz="1200" kern="1200">
+        <a:solidFill>
+          <a:schemeClr val="tx1"/>
+        </a:solidFill>
+        <a:latin typeface="+mn-lt"/>
+        <a:ea typeface="+mn-ea"/>
+        <a:cs typeface="+mn-cs"/>
+      </a:defRPr>
+    </a:lvl7pPr>
+    <a:lvl8pPr marL="3200400" algn="l" defTabSz="457200" rtl="0" eaLnBrk="1" latinLnBrk="0" hangingPunct="1">
+      <a:defRPr sz="1200" kern="1200">
+        <a:solidFill>
+          <a:schemeClr val="tx1"/>
+        </a:solidFill>
+        <a:latin typeface="+mn-lt"/>
+        <a:ea typeface="+mn-ea"/>
+        <a:cs typeface="+mn-cs"/>
+      </a:defRPr>
+    </a:lvl8pPr>
+    <a:lvl9pPr marL="3657600" algn="l" defTabSz="457200" rtl="0" eaLnBrk="1" latinLnBrk="0" hangingPunct="1">
+      <a:defRPr sz="1200" kern="1200">
+        <a:solidFill>
+          <a:schemeClr val="tx1"/>
+        </a:solidFill>
+        <a:latin typeface="+mn-lt"/>
+        <a:ea typeface="+mn-ea"/>
+        <a:cs typeface="+mn-cs"/>
+      </a:defRPr>
+    </a:lvl9pPr>
+  </p:notesStyle>
+</p:notesMaster>
+</file>
+
+<file path=ppt/notesSlides/notesSlide1.xml><?xml version="1.0" encoding="utf-8"?>
+<p:notes xmlns:a="http://schemas.openxmlformats.org/drawingml/2006/main" xmlns:p="http://schemas.openxmlformats.org/presentationml/2006/main" xmlns:r="http://schemas.openxmlformats.org/officeDocument/2006/relationships">
+  <p:cSld>
+    <p:spTree>
+      <p:nvGrpSpPr>
+        <p:cNvPr id="1" name=""/>
+        <p:cNvGrpSpPr/>
+        <p:nvPr/>
+      </p:nvGrpSpPr>
+      <p:grpSpPr>
+        <a:xfrm>
+          <a:off x="0" y="0"/>
+          <a:ext cx="0" cy="0"/>
+          <a:chOff x="0" y="0"/>
+          <a:chExt cx="0" cy="0"/>
+        </a:xfrm>
+      </p:grpSpPr>
+      <p:sp>
+        <p:nvSpPr>
+          <p:cNvPr id="2" name="Slide Image Placeholder 1"/>
+          <p:cNvSpPr>
+            <a:spLocks noGrp="1"/>
+          </p:cNvSpPr>
+          <p:nvPr>
+            <p:ph type="sldImg" idx="2"/>
+          </p:nvPr>
+        </p:nvSpPr>
+        <p:spPr/>
+      </p:sp>
+      <p:sp>
+        <p:nvSpPr>
+          <p:cNvPr id="3" name="Notes Placeholder 2"/>
+          <p:cNvSpPr>
+            <a:spLocks noGrp="1"/>
+          </p:cNvSpPr>
+          <p:nvPr>
+            <p:ph type="body" idx="3" sz="quarter"/>
+          </p:nvPr>
+        </p:nvSpPr>
+        <p:spPr/>
+        <p:txBody>
+          <a:bodyPr/>
+          <a:lstStyle/>
+          <a:p>
+            <a:r>
+              <a:t>TerraHive - Enterprise Product Specification</a:t>
+            </a:r>
+          </a:p>
+          <a:p>
+            <a:r>
+              <a:t>Tagline: Enterprise-Grade Multi-Agent Swarm Orchestration System</a:t>
+            </a:r>
+          </a:p>
+          <a:p/>
+          <a:p>
+            <a:r>
+              <a:t>Outcome Quote:</a:t>
+            </a:r>
+          </a:p>
+          <a:p>
+            <a:r>
+              <a:t>“Creating multi agent enterprise grade systems to run enterprise with AI — replacing departmental silos with autonomous collaborative swarms.” (— THE OUTCOME-BASED REVOLUTION)</a:t>
+            </a:r>
+          </a:p>
+          <a:p/>
+          <a:p>
+            <a:r>
+              <a:t>Executive Overview:</a:t>
+            </a:r>
+          </a:p>
+          <a:p>
+            <a:r>
+              <a:t>TerraHive establishes a coordinated ecosystem of autonomous software agents collaborating seamlessly to orchestrate production, asset health, and dispatch pipelines. Engineered with an autonomous agent orchestration engine and distributed state persistence, it conducts real-time consensus rounds to resolve cross-departmental bottlenecks.</a:t>
+            </a:r>
+          </a:p>
+          <a:p/>
+          <a:p>
+            <a:r>
+              <a:t>Key Telemetry Metrics:</a:t>
+            </a:r>
+          </a:p>
+          <a:p>
+            <a:r>
+              <a:t>- DECENTRALIZED MESH:: Zero Single-Point</a:t>
+            </a:r>
+          </a:p>
+          <a:p>
+            <a:r>
+              <a:t>- CONSENSUS PROTOCOL:: Raft / Industrial</a:t>
+            </a:r>
+          </a:p>
+          <a:p>
+            <a:r>
+              <a:t>- FAILOVER WINDOW:: &lt; 200 ms Edge</a:t>
+            </a:r>
+          </a:p>
+          <a:p>
+            <a:r>
+              <a:t>- ACTIVE NODES:: 256 Auto-Synced</a:t>
+            </a:r>
+          </a:p>
+        </p:txBody>
+      </p:sp>
+      <p:sp>
+        <p:nvSpPr>
+          <p:cNvPr id="4" name="Slide Number Placeholder 3"/>
+          <p:cNvSpPr>
+            <a:spLocks noGrp="1"/>
+          </p:cNvSpPr>
+          <p:nvPr>
+            <p:ph type="sldNum" idx="5" sz="quarter"/>
+          </p:nvPr>
+        </p:nvSpPr>
+        <p:spPr/>
+      </p:sp>
+    </p:spTree>
+  </p:cSld>
+  <p:clrMapOvr>
+    <a:masterClrMapping/>
+  </p:clrMapOvr>
+</p:notes>
+</file>
+
+<file path=ppt/notesSlides/notesSlide2.xml><?xml version="1.0" encoding="utf-8"?>
+<p:notes xmlns:a="http://schemas.openxmlformats.org/drawingml/2006/main" xmlns:p="http://schemas.openxmlformats.org/presentationml/2006/main" xmlns:r="http://schemas.openxmlformats.org/officeDocument/2006/relationships">
+  <p:cSld>
+    <p:spTree>
+      <p:nvGrpSpPr>
+        <p:cNvPr id="1" name=""/>
+        <p:cNvGrpSpPr/>
+        <p:nvPr/>
+      </p:nvGrpSpPr>
+      <p:grpSpPr>
+        <a:xfrm>
+          <a:off x="0" y="0"/>
+          <a:ext cx="0" cy="0"/>
+          <a:chOff x="0" y="0"/>
+          <a:chExt cx="0" cy="0"/>
+        </a:xfrm>
+      </p:grpSpPr>
+      <p:sp>
+        <p:nvSpPr>
+          <p:cNvPr id="2" name="Slide Image Placeholder 1"/>
+          <p:cNvSpPr>
+            <a:spLocks noGrp="1"/>
+          </p:cNvSpPr>
+          <p:nvPr>
+            <p:ph type="sldImg" idx="2"/>
+          </p:nvPr>
+        </p:nvSpPr>
+        <p:spPr/>
+      </p:sp>
+      <p:sp>
+        <p:nvSpPr>
+          <p:cNvPr id="3" name="Notes Placeholder 2"/>
+          <p:cNvSpPr>
+            <a:spLocks noGrp="1"/>
+          </p:cNvSpPr>
+          <p:nvPr>
+            <p:ph type="body" idx="3" sz="quarter"/>
+          </p:nvPr>
+        </p:nvSpPr>
+        <p:spPr/>
+        <p:txBody>
+          <a:bodyPr/>
+          <a:lstStyle/>
+          <a:p>
+            <a:r>
+              <a:t>TerraHive - ANSI/ISA-101 Verified Operational Interface</a:t>
+            </a:r>
+          </a:p>
+          <a:p>
+            <a:r>
+              <a:t>Representation: TerraHive ANSI/ISA-101 Operational Interface &amp; Real-Time System Representation</a:t>
+            </a:r>
+          </a:p>
+          <a:p>
+            <a:r>
+              <a:t>Compliance: ANSI/ISA-101 Verified HMI</a:t>
+            </a:r>
+          </a:p>
+          <a:p>
+            <a:r>
+              <a:t>Asset File: terra_hive_isa101_showcase.jpg</a:t>
+            </a:r>
+          </a:p>
+        </p:txBody>
+      </p:sp>
+      <p:sp>
+        <p:nvSpPr>
+          <p:cNvPr id="4" name="Slide Number Placeholder 3"/>
+          <p:cNvSpPr>
+            <a:spLocks noGrp="1"/>
+          </p:cNvSpPr>
+          <p:nvPr>
+            <p:ph type="sldNum" idx="5" sz="quarter"/>
+          </p:nvPr>
+        </p:nvSpPr>
+        <p:spPr/>
+      </p:sp>
+    </p:spTree>
+  </p:cSld>
+  <p:clrMapOvr>
+    <a:masterClrMapping/>
+  </p:clrMapOvr>
+</p:notes>
+</file>
+
+<file path=ppt/notesSlides/notesSlide3.xml><?xml version="1.0" encoding="utf-8"?>
+<p:notes xmlns:a="http://schemas.openxmlformats.org/drawingml/2006/main" xmlns:p="http://schemas.openxmlformats.org/presentationml/2006/main" xmlns:r="http://schemas.openxmlformats.org/officeDocument/2006/relationships">
+  <p:cSld>
+    <p:spTree>
+      <p:nvGrpSpPr>
+        <p:cNvPr id="1" name=""/>
+        <p:cNvGrpSpPr/>
+        <p:nvPr/>
+      </p:nvGrpSpPr>
+      <p:grpSpPr>
+        <a:xfrm>
+          <a:off x="0" y="0"/>
+          <a:ext cx="0" cy="0"/>
+          <a:chOff x="0" y="0"/>
+          <a:chExt cx="0" cy="0"/>
+        </a:xfrm>
+      </p:grpSpPr>
+      <p:sp>
+        <p:nvSpPr>
+          <p:cNvPr id="2" name="Slide Image Placeholder 1"/>
+          <p:cNvSpPr>
+            <a:spLocks noGrp="1"/>
+          </p:cNvSpPr>
+          <p:nvPr>
+            <p:ph type="sldImg" idx="2"/>
+          </p:nvPr>
+        </p:nvSpPr>
+        <p:spPr/>
+      </p:sp>
+      <p:sp>
+        <p:nvSpPr>
+          <p:cNvPr id="3" name="Notes Placeholder 2"/>
+          <p:cNvSpPr>
+            <a:spLocks noGrp="1"/>
+          </p:cNvSpPr>
+          <p:nvPr>
+            <p:ph type="body" idx="3" sz="quarter"/>
+          </p:nvPr>
+        </p:nvSpPr>
+        <p:spPr/>
+        <p:txBody>
+          <a:bodyPr/>
+          <a:lstStyle/>
+          <a:p>
+            <a:r>
+              <a:t>What TerraHive Will Do:</a:t>
+            </a:r>
+          </a:p>
+          <a:p>
+            <a:r>
+              <a:t>[1] Decentralized Swarm Architecture:</a:t>
+            </a:r>
+          </a:p>
+          <a:p>
+            <a:r>
+              <a:t>Specialized autonomous agents for diagnostics, maintenance coordination, and dispatch optimization.</a:t>
+            </a:r>
+          </a:p>
+          <a:p/>
+          <a:p>
+            <a:r>
+              <a:t>[2] Dynamic Consensus Engine:</a:t>
+            </a:r>
+          </a:p>
+          <a:p>
+            <a:r>
+              <a:t>AI-driven cross-departmental negotiation based on real-time operational constraints.</a:t>
+            </a:r>
+          </a:p>
+          <a:p/>
+          <a:p>
+            <a:r>
+              <a:t>[3] Audited Governance &amp; Traceability:</a:t>
+            </a:r>
+          </a:p>
+          <a:p>
+            <a:r>
+              <a:t>Comprehensive action logging, deterministic execution tracing, and human-in-the-loop permission gates.</a:t>
+            </a:r>
+          </a:p>
+          <a:p/>
+          <a:p>
+            <a:r>
+              <a:t>[4] Deterministic Swarm State Machine:</a:t>
+            </a:r>
+          </a:p>
+          <a:p>
+            <a:r>
+              <a:t>Autonomous state engine managing agent goals, collaborative sessions, tools, operational memories, and reflection loops.</a:t>
+            </a:r>
+          </a:p>
+        </p:txBody>
+      </p:sp>
+      <p:sp>
+        <p:nvSpPr>
+          <p:cNvPr id="4" name="Slide Number Placeholder 3"/>
+          <p:cNvSpPr>
+            <a:spLocks noGrp="1"/>
+          </p:cNvSpPr>
+          <p:nvPr>
+            <p:ph type="sldNum" idx="5" sz="quarter"/>
+          </p:nvPr>
+        </p:nvSpPr>
+        <p:spPr/>
+      </p:sp>
+    </p:spTree>
+  </p:cSld>
+  <p:clrMapOvr>
+    <a:masterClrMapping/>
+  </p:clrMapOvr>
+</p:notes>
+</file>
+
+<file path=ppt/notesSlides/notesSlide4.xml><?xml version="1.0" encoding="utf-8"?>
+<p:notes xmlns:a="http://schemas.openxmlformats.org/drawingml/2006/main" xmlns:p="http://schemas.openxmlformats.org/presentationml/2006/main" xmlns:r="http://schemas.openxmlformats.org/officeDocument/2006/relationships">
+  <p:cSld>
+    <p:spTree>
+      <p:nvGrpSpPr>
+        <p:cNvPr id="1" name=""/>
+        <p:cNvGrpSpPr/>
+        <p:nvPr/>
+      </p:nvGrpSpPr>
+      <p:grpSpPr>
+        <a:xfrm>
+          <a:off x="0" y="0"/>
+          <a:ext cx="0" cy="0"/>
+          <a:chOff x="0" y="0"/>
+          <a:chExt cx="0" cy="0"/>
+        </a:xfrm>
+      </p:grpSpPr>
+      <p:sp>
+        <p:nvSpPr>
+          <p:cNvPr id="2" name="Slide Image Placeholder 1"/>
+          <p:cNvSpPr>
+            <a:spLocks noGrp="1"/>
+          </p:cNvSpPr>
+          <p:nvPr>
+            <p:ph type="sldImg" idx="2"/>
+          </p:nvPr>
+        </p:nvSpPr>
+        <p:spPr/>
+      </p:sp>
+      <p:sp>
+        <p:nvSpPr>
+          <p:cNvPr id="3" name="Notes Placeholder 2"/>
+          <p:cNvSpPr>
+            <a:spLocks noGrp="1"/>
+          </p:cNvSpPr>
+          <p:nvPr>
+            <p:ph type="body" idx="3" sz="quarter"/>
+          </p:nvPr>
+        </p:nvSpPr>
+        <p:spPr/>
+        <p:txBody>
+          <a:bodyPr/>
+          <a:lstStyle/>
+          <a:p>
+            <a:r>
+              <a:t>TerraHive - Operational Use Cases &amp; Field Impact:</a:t>
+            </a:r>
+          </a:p>
+          <a:p>
+            <a:r>
+              <a:t>[Reduced Manpower] Reduced Manpower (Decentralized Swarm Coordination):</a:t>
+            </a:r>
+          </a:p>
+          <a:p>
+            <a:r>
+              <a:t>Specialized agents for diagnostics, maintenance coordination, and dispatch optimization collaborate automatically.</a:t>
+            </a:r>
+          </a:p>
+          <a:p/>
+          <a:p>
+            <a:r>
+              <a:t>[Efficiency] Efficiency (Dynamic Consensus Negotiation):</a:t>
+            </a:r>
+          </a:p>
+          <a:p>
+            <a:r>
+              <a:t>AI-driven cross-departmental negotiation resolves trade-offs between production throughput and power tariffs.</a:t>
+            </a:r>
+          </a:p>
+          <a:p/>
+          <a:p>
+            <a:r>
+              <a:t>[QA &amp; Compliance] QA &amp; Compliance (Audited Governance):</a:t>
+            </a:r>
+          </a:p>
+          <a:p>
+            <a:r>
+              <a:t>Comprehensive action logging and human-in-the-loop permission gates with complete state tracing.</a:t>
+            </a:r>
+          </a:p>
+          <a:p/>
+          <a:p>
+            <a:r>
+              <a:t>[Productivity] Productivity (Automated ERP Spare Parts Cycle):</a:t>
+            </a:r>
+          </a:p>
+          <a:p>
+            <a:r>
+              <a:t>When asset wear is detected, inventory agents check ERP stock, book procurement, and reserve maintenance downtime.</a:t>
+            </a:r>
+          </a:p>
+        </p:txBody>
+      </p:sp>
+      <p:sp>
+        <p:nvSpPr>
+          <p:cNvPr id="4" name="Slide Number Placeholder 3"/>
+          <p:cNvSpPr>
+            <a:spLocks noGrp="1"/>
+          </p:cNvSpPr>
+          <p:nvPr>
+            <p:ph type="sldNum" idx="5" sz="quarter"/>
+          </p:nvPr>
+        </p:nvSpPr>
+        <p:spPr/>
+      </p:sp>
+    </p:spTree>
+  </p:cSld>
+  <p:clrMapOvr>
+    <a:masterClrMapping/>
+  </p:clrMapOvr>
+</p:notes>
+</file>
+
+<file path=ppt/notesSlides/notesSlide5.xml><?xml version="1.0" encoding="utf-8"?>
+<p:notes xmlns:a="http://schemas.openxmlformats.org/drawingml/2006/main" xmlns:p="http://schemas.openxmlformats.org/presentationml/2006/main" xmlns:r="http://schemas.openxmlformats.org/officeDocument/2006/relationships">
+  <p:cSld>
+    <p:spTree>
+      <p:nvGrpSpPr>
+        <p:cNvPr id="1" name=""/>
+        <p:cNvGrpSpPr/>
+        <p:nvPr/>
+      </p:nvGrpSpPr>
+      <p:grpSpPr>
+        <a:xfrm>
+          <a:off x="0" y="0"/>
+          <a:ext cx="0" cy="0"/>
+          <a:chOff x="0" y="0"/>
+          <a:chExt cx="0" cy="0"/>
+        </a:xfrm>
+      </p:grpSpPr>
+      <p:sp>
+        <p:nvSpPr>
+          <p:cNvPr id="2" name="Slide Image Placeholder 1"/>
+          <p:cNvSpPr>
+            <a:spLocks noGrp="1"/>
+          </p:cNvSpPr>
+          <p:nvPr>
+            <p:ph type="sldImg" idx="2"/>
+          </p:nvPr>
+        </p:nvSpPr>
+        <p:spPr/>
+      </p:sp>
+      <p:sp>
+        <p:nvSpPr>
+          <p:cNvPr id="3" name="Notes Placeholder 2"/>
+          <p:cNvSpPr>
+            <a:spLocks noGrp="1"/>
+          </p:cNvSpPr>
+          <p:nvPr>
+            <p:ph type="body" idx="3" sz="quarter"/>
+          </p:nvPr>
+        </p:nvSpPr>
+        <p:spPr/>
+        <p:txBody>
+          <a:bodyPr/>
+          <a:lstStyle/>
+          <a:p>
+            <a:r>
+              <a:t>TerraHive - Architectural Contrast (Legacy SCADA vs Terrestrial Platform):</a:t>
+            </a:r>
+          </a:p>
+          <a:p>
+            <a:r>
+              <a:t>LEGACY:</a:t>
+            </a:r>
+          </a:p>
+          <a:p>
+            <a:r>
+              <a:t>Maintenance, operations, and procurement teams communicate via emails, spreadsheets, and delayed meetings.</a:t>
+            </a:r>
+          </a:p>
+          <a:p/>
+          <a:p>
+            <a:r>
+              <a:t>TERRESTRIAL ADVANTAGE:</a:t>
+            </a:r>
+          </a:p>
+          <a:p>
+            <a:r>
+              <a:t>Autonomous agents negotiate constraints instantly across departments in real-time consensus rounds.</a:t>
+            </a:r>
+          </a:p>
+          <a:p/>
+          <a:p>
+            <a:r>
+              <a:t>LEGACY:</a:t>
+            </a:r>
+          </a:p>
+          <a:p>
+            <a:r>
+              <a:t>Static maintenance schedules that either over-service assets or miss sudden accelerated wear.</a:t>
+            </a:r>
+          </a:p>
+          <a:p/>
+          <a:p>
+            <a:r>
+              <a:t>TERRESTRIAL ADVANTAGE:</a:t>
+            </a:r>
+          </a:p>
+          <a:p>
+            <a:r>
+              <a:t>Dynamic dispatch balancing asset wear, fuel costs, market prices, and inventory availability.</a:t>
+            </a:r>
+          </a:p>
+          <a:p/>
+          <a:p>
+            <a:r>
+              <a:t>LEGACY:</a:t>
+            </a:r>
+          </a:p>
+          <a:p>
+            <a:r>
+              <a:t>Black-box decisions with no traceability or compliance record.</a:t>
+            </a:r>
+          </a:p>
+          <a:p/>
+          <a:p>
+            <a:r>
+              <a:t>TERRESTRIAL ADVANTAGE:</a:t>
+            </a:r>
+          </a:p>
+          <a:p>
+            <a:r>
+              <a:t>Audited cryptographic consensus log with configurable human-in-the-loop authorization gates.</a:t>
+            </a:r>
+          </a:p>
+        </p:txBody>
+      </p:sp>
+      <p:sp>
+        <p:nvSpPr>
+          <p:cNvPr id="4" name="Slide Number Placeholder 3"/>
+          <p:cNvSpPr>
+            <a:spLocks noGrp="1"/>
+          </p:cNvSpPr>
+          <p:nvPr>
+            <p:ph type="sldNum" idx="5" sz="quarter"/>
+          </p:nvPr>
+        </p:nvSpPr>
+        <p:spPr/>
+      </p:sp>
+    </p:spTree>
+  </p:cSld>
+  <p:clrMapOvr>
+    <a:masterClrMapping/>
+  </p:clrMapOvr>
+</p:notes>
+</file>
+
+<file path=ppt/notesSlides/notesSlide6.xml><?xml version="1.0" encoding="utf-8"?>
+<p:notes xmlns:a="http://schemas.openxmlformats.org/drawingml/2006/main" xmlns:p="http://schemas.openxmlformats.org/presentationml/2006/main" xmlns:r="http://schemas.openxmlformats.org/officeDocument/2006/relationships">
+  <p:cSld>
+    <p:spTree>
+      <p:nvGrpSpPr>
+        <p:cNvPr id="1" name=""/>
+        <p:cNvGrpSpPr/>
+        <p:nvPr/>
+      </p:nvGrpSpPr>
+      <p:grpSpPr>
+        <a:xfrm>
+          <a:off x="0" y="0"/>
+          <a:ext cx="0" cy="0"/>
+          <a:chOff x="0" y="0"/>
+          <a:chExt cx="0" cy="0"/>
+        </a:xfrm>
+      </p:grpSpPr>
+      <p:sp>
+        <p:nvSpPr>
+          <p:cNvPr id="2" name="Slide Image Placeholder 1"/>
+          <p:cNvSpPr>
+            <a:spLocks noGrp="1"/>
+          </p:cNvSpPr>
+          <p:nvPr>
+            <p:ph type="sldImg" idx="2"/>
+          </p:nvPr>
+        </p:nvSpPr>
+        <p:spPr/>
+      </p:sp>
+      <p:sp>
+        <p:nvSpPr>
+          <p:cNvPr id="3" name="Notes Placeholder 2"/>
+          <p:cNvSpPr>
+            <a:spLocks noGrp="1"/>
+          </p:cNvSpPr>
+          <p:nvPr>
+            <p:ph type="body" idx="3" sz="quarter"/>
+          </p:nvPr>
+        </p:nvSpPr>
+        <p:spPr/>
+        <p:txBody>
+          <a:bodyPr/>
+          <a:lstStyle/>
+          <a:p>
+            <a:r>
+              <a:t>TerraHive - End-to-End System Diagram &amp; Data Pipeline:</a:t>
+            </a:r>
+          </a:p>
+          <a:p/>
+          <a:p>
+            <a:r>
+              <a:t>Layer 01: Distributed Agent Ingestion</a:t>
+            </a:r>
+          </a:p>
+          <a:p>
+            <a:r>
+              <a:t>High-throughput ingestion connecting autonomous departmental agent streams, ERP transactions, operational event queues, and SCADA state tags.</a:t>
+            </a:r>
+          </a:p>
+          <a:p>
+            <a:r>
+              <a:t>Protocols: Agent Swarm Protocol, Real-Time State Stream, Enterprise Messaging</a:t>
+            </a:r>
+          </a:p>
+          <a:p/>
+          <a:p>
+            <a:r>
+              <a:t>Layer 02: Swarm State Convergence Bus</a:t>
+            </a:r>
+          </a:p>
+          <a:p>
+            <a:r>
+              <a:t>Low-latency consensus broadcast fabric, distributed memory synchronization, and deterministic state-machine transaction sequencing.</a:t>
+            </a:r>
+          </a:p>
+          <a:p>
+            <a:r>
+              <a:t>Protocols: Consensus Broadcast Bus, Distributed Vector Memory, Sub-20ms State Sync</a:t>
+            </a:r>
+          </a:p>
+          <a:p/>
+          <a:p>
+            <a:r>
+              <a:t>Layer 03: Swarm Consensus Core</a:t>
+            </a:r>
+          </a:p>
+          <a:p>
+            <a:r>
+              <a:t>Game-theoretic multi-agent negotiation, cross-departmental constraint arbitration, dynamic goal decomposition, and autonomous policy synthesis.</a:t>
+            </a:r>
+          </a:p>
+          <a:p>
+            <a:r>
+              <a:t>Protocols: Game-Theoretic Arbitration, Constraint Resolver AI, Swarm Consensus Engine</a:t>
+            </a:r>
+          </a:p>
+          <a:p/>
+          <a:p>
+            <a:r>
+              <a:t>Layer 04: Autonomous Dispatch Cockpit</a:t>
+            </a:r>
+          </a:p>
+          <a:p>
+            <a:r>
+              <a:t>Automated cross-system work order dispatch, autonomous operational setpoint execution, and ANSI/ISA-101 human-in-the-loop supervisor consoles.</a:t>
+            </a:r>
+          </a:p>
+          <a:p>
+            <a:r>
+              <a:t>Protocols: Autonomous Work Orders, Cross-System Setpoints, ISA-101 Swarm HMI</a:t>
+            </a:r>
+          </a:p>
+          <a:p/>
+          <a:p>
+            <a:r>
+              <a:t>Pipeline Flow:</a:t>
+            </a:r>
+          </a:p>
+          <a:p>
+            <a:r>
+              <a:t>DATA PIPELINE FLOW: Enterprise Agent Event Ingestion ➔ Swarm Consensus Convergence Bus ➔ Multi-Agent Constraint Arbitration ➔ Autonomous Cross-System Execution</a:t>
+            </a:r>
+          </a:p>
+        </p:txBody>
+      </p:sp>
+      <p:sp>
+        <p:nvSpPr>
+          <p:cNvPr id="4" name="Slide Number Placeholder 3"/>
+          <p:cNvSpPr>
+            <a:spLocks noGrp="1"/>
+          </p:cNvSpPr>
+          <p:nvPr>
+            <p:ph type="sldNum" idx="5" sz="quarter"/>
+          </p:nvPr>
+        </p:nvSpPr>
+        <p:spPr/>
+      </p:sp>
+    </p:spTree>
+  </p:cSld>
+  <p:clrMapOvr>
+    <a:masterClrMapping/>
+  </p:clrMapOvr>
+</p:notes>
+</file>
+
+<file path=ppt/notesSlides/notesSlide7.xml><?xml version="1.0" encoding="utf-8"?>
+<p:notes xmlns:a="http://schemas.openxmlformats.org/drawingml/2006/main" xmlns:p="http://schemas.openxmlformats.org/presentationml/2006/main" xmlns:r="http://schemas.openxmlformats.org/officeDocument/2006/relationships">
+  <p:cSld>
+    <p:spTree>
+      <p:nvGrpSpPr>
+        <p:cNvPr id="1" name=""/>
+        <p:cNvGrpSpPr/>
+        <p:nvPr/>
+      </p:nvGrpSpPr>
+      <p:grpSpPr>
+        <a:xfrm>
+          <a:off x="0" y="0"/>
+          <a:ext cx="0" cy="0"/>
+          <a:chOff x="0" y="0"/>
+          <a:chExt cx="0" cy="0"/>
+        </a:xfrm>
+      </p:grpSpPr>
+      <p:sp>
+        <p:nvSpPr>
+          <p:cNvPr id="2" name="Slide Image Placeholder 1"/>
+          <p:cNvSpPr>
+            <a:spLocks noGrp="1"/>
+          </p:cNvSpPr>
+          <p:nvPr>
+            <p:ph type="sldImg" idx="2"/>
+          </p:nvPr>
+        </p:nvSpPr>
+        <p:spPr/>
+      </p:sp>
+      <p:sp>
+        <p:nvSpPr>
+          <p:cNvPr id="3" name="Notes Placeholder 2"/>
+          <p:cNvSpPr>
+            <a:spLocks noGrp="1"/>
+          </p:cNvSpPr>
+          <p:nvPr>
+            <p:ph type="body" idx="3" sz="quarter"/>
+          </p:nvPr>
+        </p:nvSpPr>
+        <p:spPr/>
+        <p:txBody>
+          <a:bodyPr/>
+          <a:lstStyle/>
+          <a:p>
+            <a:r>
+              <a:t>TerraHive - System Integrator Deployment Framework &amp; Commercial Model:</a:t>
+            </a:r>
+          </a:p>
+          <a:p/>
+          <a:p>
+            <a:r>
+              <a:t>Phase 1: Connectivity &amp; Audit</a:t>
+            </a:r>
+          </a:p>
+          <a:p>
+            <a:r>
+              <a:t>Phase 2: Twin Calibration</a:t>
+            </a:r>
+          </a:p>
+          <a:p>
+            <a:r>
+              <a:t>Phase 3: Autonomous Go-Live</a:t>
+            </a:r>
+          </a:p>
+          <a:p/>
+          <a:p>
+            <a:r>
+              <a:t>Commercial Enablement:</a:t>
+            </a:r>
+          </a:p>
+          <a:p>
+            <a:r>
+              <a:t>- 25%-35% recurring SaaS margins</a:t>
+            </a:r>
+          </a:p>
+          <a:p>
+            <a:r>
+              <a:t>- 7-14 day rapid commissioning</a:t>
+            </a:r>
+          </a:p>
+          <a:p>
+            <a:r>
+              <a:t>- Co-selling and enterprise enablement support</a:t>
+            </a:r>
+          </a:p>
+        </p:txBody>
+      </p:sp>
+      <p:sp>
+        <p:nvSpPr>
+          <p:cNvPr id="4" name="Slide Number Placeholder 3"/>
+          <p:cNvSpPr>
+            <a:spLocks noGrp="1"/>
+          </p:cNvSpPr>
+          <p:nvPr>
+            <p:ph type="sldNum" idx="5" sz="quarter"/>
+          </p:nvPr>
+        </p:nvSpPr>
+        <p:spPr/>
+      </p:sp>
+    </p:spTree>
+  </p:cSld>
+  <p:clrMapOvr>
+    <a:masterClrMapping/>
+  </p:clrMapOvr>
+</p:notes>
 </file>
 
 <file path=ppt/slideLayouts/slideLayout1.xml><?xml version="1.0" encoding="utf-8"?>
@@ -3108,7 +4280,7 @@
             <a:avLst/>
           </a:prstGeom>
           <a:solidFill>
-            <a:srgbClr val="0A0E1A"/>
+            <a:srgbClr val="0B0F17"/>
           </a:solidFill>
           <a:ln>
             <a:noFill/>
@@ -3144,17 +4316,19 @@
         </p:nvSpPr>
         <p:spPr>
           <a:xfrm>
-            <a:off x="0" y="0"/>
-            <a:ext cx="12191695" cy="54864"/>
+            <a:off x="731520" y="365760"/>
+            <a:ext cx="10728655" cy="18288"/>
           </a:xfrm>
           <a:prstGeom prst="rect">
             <a:avLst/>
           </a:prstGeom>
           <a:solidFill>
-            <a:srgbClr val="00D4FF"/>
+            <a:srgbClr val="38BDF8"/>
           </a:solidFill>
           <a:ln>
-            <a:noFill/>
+            <a:solidFill>
+              <a:srgbClr val="38BDF8"/>
+            </a:solidFill>
           </a:ln>
         </p:spPr>
         <p:style>
@@ -3187,8 +4361,8 @@
         </p:nvSpPr>
         <p:spPr>
           <a:xfrm>
-            <a:off x="731520" y="6446520"/>
-            <a:ext cx="10698480" cy="320040"/>
+            <a:off x="731520" y="438912"/>
+            <a:ext cx="8229600" cy="274320"/>
           </a:xfrm>
           <a:prstGeom prst="rect">
             <a:avLst/>
@@ -3196,20 +4370,20 @@
           <a:noFill/>
         </p:spPr>
         <p:txBody>
-          <a:bodyPr wrap="none">
+          <a:bodyPr wrap="square" lIns="0" rIns="0" tIns="0" bIns="0">
             <a:spAutoFit/>
           </a:bodyPr>
           <a:lstStyle/>
           <a:p>
             <a:pPr>
-              <a:defRPr sz="1000">
-                <a:solidFill>
-                  <a:srgbClr val="94A3B8"/>
-                </a:solidFill>
-              </a:defRPr>
-            </a:pPr>
-            <a:r>
-              <a:t>TERRESTRIAL PLATFORM  |  TERRAHIVE CATALOGUE  |  CONFIDENTIAL - AUTHORISED SYSTEM INTEGRATORS ONLY</a:t>
+              <a:defRPr sz="950" b="1">
+                <a:solidFill>
+                  <a:srgbClr val="38BDF8"/>
+                </a:solidFill>
+              </a:defRPr>
+            </a:pPr>
+            <a:r>
+              <a:t>TERRESTRIAL PLATFORM  |  TERRAHIVE  |  ENTERPRISE SPECIFICATION</a:t>
             </a:r>
           </a:p>
         </p:txBody>
@@ -3222,8 +4396,8 @@
         </p:nvSpPr>
         <p:spPr>
           <a:xfrm>
-            <a:off x="731520" y="777240"/>
-            <a:ext cx="10698480" cy="3474720"/>
+            <a:off x="731520" y="731520"/>
+            <a:ext cx="9601200" cy="777240"/>
           </a:xfrm>
           <a:prstGeom prst="rect">
             <a:avLst/>
@@ -3231,104 +4405,83 @@
           <a:noFill/>
         </p:spPr>
         <p:txBody>
-          <a:bodyPr wrap="square">
+          <a:bodyPr wrap="square" lIns="0" rIns="0" tIns="0" bIns="0">
             <a:spAutoFit/>
           </a:bodyPr>
           <a:lstStyle/>
           <a:p>
             <a:pPr>
-              <a:spcAft>
-                <a:spcPts val="800"/>
-              </a:spcAft>
-              <a:defRPr sz="1250" b="1">
-                <a:solidFill>
-                  <a:srgbClr val="00D4FF"/>
-                </a:solidFill>
-              </a:defRPr>
-            </a:pPr>
-            <a:r>
-              <a:t>ENTERPRISE PRODUCT SPECIFICATION  |  AUTONOMOUS AI &amp; SWARMS</a:t>
-            </a:r>
-          </a:p>
-          <a:p>
-            <a:pPr>
-              <a:spcAft>
-                <a:spcPts val="600"/>
-              </a:spcAft>
-              <a:defRPr sz="4600" b="1">
+              <a:defRPr sz="1900" b="1">
                 <a:solidFill>
                   <a:srgbClr val="FFFFFF"/>
                 </a:solidFill>
               </a:defRPr>
             </a:pPr>
             <a:r>
-              <a:t>TerraHive</a:t>
-            </a:r>
-          </a:p>
-          <a:p>
-            <a:pPr>
-              <a:spcAft>
-                <a:spcPts val="1200"/>
-              </a:spcAft>
-              <a:defRPr sz="1900" b="1">
-                <a:solidFill>
-                  <a:srgbClr val="F5C842"/>
-                </a:solidFill>
-              </a:defRPr>
-            </a:pPr>
-            <a:r>
-              <a:t>Enterprise-Grade Multi-Agent Swarm Orchestration System</a:t>
-            </a:r>
-          </a:p>
-          <a:p>
-            <a:pPr>
-              <a:spcAft>
-                <a:spcPts val="1200"/>
-              </a:spcAft>
-              <a:defRPr sz="1400">
-                <a:solidFill>
-                  <a:srgbClr val="C8D8F0"/>
-                </a:solidFill>
-              </a:defRPr>
-            </a:pPr>
-            <a:r>
-              <a:t>Industrial Protocol: Agent Swarm Protocol    |    Domain Architecture: Terrestrial Deterministic Edge Core</a:t>
-            </a:r>
-          </a:p>
-          <a:p>
-            <a:pPr>
-              <a:defRPr sz="1500">
+              <a:t>TerraHive: Enterprise-Grade Multi-Agent Swarm Orchestration System</a:t>
+            </a:r>
+          </a:p>
+          <a:p>
+            <a:pPr>
+              <a:spcBef>
+                <a:spcPts val="300"/>
+              </a:spcBef>
+              <a:defRPr sz="1050">
                 <a:solidFill>
                   <a:srgbClr val="94A3B8"/>
                 </a:solidFill>
               </a:defRPr>
             </a:pPr>
             <a:r>
-              <a:t>Enterprise-Grade Multi-Agent Swarm Orchestration System</a:t>
-            </a:r>
-          </a:p>
-        </p:txBody>
-      </p:sp>
-      <p:sp>
-        <p:nvSpPr>
-          <p:cNvPr id="6" name="Rounded Rectangle 5"/>
+              <a:t>Autonomous Industrial Intelligence Suite · Tier-1 Plant Architecture</a:t>
+            </a:r>
+          </a:p>
+        </p:txBody>
+      </p:sp>
+      <p:pic>
+        <p:nvPicPr>
+          <p:cNvPr id="6" name="Picture 5" descr="tp_logo_white.png"/>
+          <p:cNvPicPr>
+            <a:picLocks noChangeAspect="1"/>
+          </p:cNvPicPr>
+          <p:nvPr/>
+        </p:nvPicPr>
+        <p:blipFill>
+          <a:blip r:embed="rId2"/>
+          <a:stretch>
+            <a:fillRect/>
+          </a:stretch>
+        </p:blipFill>
+        <p:spPr>
+          <a:xfrm>
+            <a:off x="10469880" y="411480"/>
+            <a:ext cx="987552" cy="384048"/>
+          </a:xfrm>
+          <a:prstGeom prst="rect">
+            <a:avLst/>
+          </a:prstGeom>
+        </p:spPr>
+      </p:pic>
+      <p:sp>
+        <p:nvSpPr>
+          <p:cNvPr id="7" name="Rounded Rectangle 6"/>
           <p:cNvSpPr/>
           <p:nvPr/>
         </p:nvSpPr>
         <p:spPr>
           <a:xfrm>
-            <a:off x="731520" y="4663440"/>
-            <a:ext cx="2523744" cy="1280160"/>
+            <a:off x="731520" y="1691640"/>
+            <a:ext cx="6217920" cy="4663440"/>
           </a:xfrm>
           <a:prstGeom prst="roundRect">
             <a:avLst/>
           </a:prstGeom>
           <a:solidFill>
-            <a:srgbClr val="0F172A"/>
+            <a:srgbClr val="131926"/>
           </a:solidFill>
-          <a:ln>
+          <a:ln w="12700">
             <a:solidFill>
-              <a:srgbClr val="1E293B"/>
+              <a:srgbClr val="28344B"/>
             </a:solidFill>
           </a:ln>
         </p:spPr>
@@ -3347,57 +4500,113 @@
           </a:fontRef>
         </p:style>
         <p:txBody>
-          <a:bodyPr rtlCol="0" anchor="ctr" wrap="square"/>
-          <a:lstStyle/>
-          <a:p>
-            <a:pPr algn="ctr">
+          <a:bodyPr rtlCol="0" anchor="ctr"/>
+          <a:lstStyle/>
+          <a:p>
+            <a:pPr algn="ctr"/>
+          </a:p>
+        </p:txBody>
+      </p:sp>
+      <p:sp>
+        <p:nvSpPr>
+          <p:cNvPr id="8" name="TextBox 7"/>
+          <p:cNvSpPr txBox="1"/>
+          <p:nvPr/>
+        </p:nvSpPr>
+        <p:spPr>
+          <a:xfrm>
+            <a:off x="960120" y="1874519"/>
+            <a:ext cx="5760720" cy="4297680"/>
+          </a:xfrm>
+          <a:prstGeom prst="rect">
+            <a:avLst/>
+          </a:prstGeom>
+          <a:noFill/>
+        </p:spPr>
+        <p:txBody>
+          <a:bodyPr wrap="square" lIns="0" rIns="0" tIns="0" bIns="0">
+            <a:spAutoFit/>
+          </a:bodyPr>
+          <a:lstStyle/>
+          <a:p>
+            <a:pPr>
+              <a:defRPr sz="1200" i="1" b="1">
+                <a:solidFill>
+                  <a:srgbClr val="38BDF8"/>
+                </a:solidFill>
+              </a:defRPr>
+            </a:pPr>
+            <a:r>
+              <a:t>““Creating multi agent enterprise grade systems to run enterprise with AI — replacing departmental silos with autonomous collaborative swarms.””</a:t>
+            </a:r>
+          </a:p>
+          <a:p>
+            <a:pPr>
+              <a:spcBef>
+                <a:spcPts val="400"/>
+              </a:spcBef>
+              <a:spcAft>
+                <a:spcPts val="1200"/>
+              </a:spcAft>
+              <a:defRPr sz="950" b="1">
+                <a:solidFill>
+                  <a:srgbClr val="94A3B8"/>
+                </a:solidFill>
+              </a:defRPr>
+            </a:pPr>
+            <a:r>
+              <a:t>— — THE OUTCOME-BASED REVOLUTION</a:t>
+            </a:r>
+          </a:p>
+          <a:p>
+            <a:pPr>
               <a:spcAft>
                 <a:spcPts val="600"/>
               </a:spcAft>
-              <a:defRPr sz="1100" b="1">
-                <a:solidFill>
-                  <a:srgbClr val="94A3B8"/>
-                </a:solidFill>
-              </a:defRPr>
-            </a:pPr>
-            <a:r>
-              <a:t>DECENTRALIZED MESH</a:t>
-            </a:r>
-          </a:p>
-          <a:p>
-            <a:pPr algn="ctr">
-              <a:defRPr sz="1650" b="1">
-                <a:solidFill>
-                  <a:srgbClr val="00D4FF"/>
-                </a:solidFill>
-              </a:defRPr>
-            </a:pPr>
-            <a:r>
-              <a:t>Zero Single-Point</a:t>
-            </a:r>
-          </a:p>
-        </p:txBody>
-      </p:sp>
-      <p:sp>
-        <p:nvSpPr>
-          <p:cNvPr id="7" name="Rounded Rectangle 6"/>
+              <a:defRPr sz="1050" b="1">
+                <a:solidFill>
+                  <a:srgbClr val="FFFFFF"/>
+                </a:solidFill>
+              </a:defRPr>
+            </a:pPr>
+            <a:r>
+              <a:t>EXECUTIVE OPERATIONAL SYNOPSIS</a:t>
+            </a:r>
+          </a:p>
+          <a:p>
+            <a:pPr>
+              <a:defRPr sz="1050">
+                <a:solidFill>
+                  <a:srgbClr val="F1F5F9"/>
+                </a:solidFill>
+              </a:defRPr>
+            </a:pPr>
+            <a:r>
+              <a:t>TerraHive establishes a coordinated ecosystem of autonomous software agents collaborating seamlessly to orchestrate production, asset health, and dispatch pipelines. Engineered with an autonomous agent orchestration engine and distributed state persistence, it conducts real-time consensus rounds to resolve cross-departmental bottlenecks.</a:t>
+            </a:r>
+          </a:p>
+        </p:txBody>
+      </p:sp>
+      <p:sp>
+        <p:nvSpPr>
+          <p:cNvPr id="9" name="Rounded Rectangle 8"/>
           <p:cNvSpPr/>
           <p:nvPr/>
         </p:nvSpPr>
         <p:spPr>
           <a:xfrm>
-            <a:off x="3456432" y="4663440"/>
-            <a:ext cx="2523744" cy="1280160"/>
+            <a:off x="7132320" y="1691640"/>
+            <a:ext cx="2084831" cy="1188720"/>
           </a:xfrm>
           <a:prstGeom prst="roundRect">
             <a:avLst/>
           </a:prstGeom>
           <a:solidFill>
-            <a:srgbClr val="0F172A"/>
+            <a:srgbClr val="131926"/>
           </a:solidFill>
-          <a:ln>
+          <a:ln w="12700">
             <a:solidFill>
-              <a:srgbClr val="1E293B"/>
+              <a:srgbClr val="38BDF8"/>
             </a:solidFill>
           </a:ln>
         </p:spPr>
@@ -3416,57 +4625,83 @@
           </a:fontRef>
         </p:style>
         <p:txBody>
-          <a:bodyPr rtlCol="0" anchor="ctr" wrap="square"/>
-          <a:lstStyle/>
-          <a:p>
-            <a:pPr algn="ctr">
-              <a:spcAft>
-                <a:spcPts val="600"/>
-              </a:spcAft>
-              <a:defRPr sz="1100" b="1">
+          <a:bodyPr rtlCol="0" anchor="ctr"/>
+          <a:lstStyle/>
+          <a:p>
+            <a:pPr algn="ctr"/>
+          </a:p>
+        </p:txBody>
+      </p:sp>
+      <p:sp>
+        <p:nvSpPr>
+          <p:cNvPr id="10" name="TextBox 9"/>
+          <p:cNvSpPr txBox="1"/>
+          <p:nvPr/>
+        </p:nvSpPr>
+        <p:spPr>
+          <a:xfrm>
+            <a:off x="7269480" y="1828800"/>
+            <a:ext cx="1810511" cy="914400"/>
+          </a:xfrm>
+          <a:prstGeom prst="rect">
+            <a:avLst/>
+          </a:prstGeom>
+          <a:noFill/>
+        </p:spPr>
+        <p:txBody>
+          <a:bodyPr wrap="square" lIns="0" rIns="0" tIns="0" bIns="0">
+            <a:spAutoFit/>
+          </a:bodyPr>
+          <a:lstStyle/>
+          <a:p>
+            <a:pPr>
+              <a:defRPr sz="850" b="1">
                 <a:solidFill>
                   <a:srgbClr val="94A3B8"/>
                 </a:solidFill>
               </a:defRPr>
             </a:pPr>
             <a:r>
-              <a:t>CONSENSUS PROTOCOL</a:t>
-            </a:r>
-          </a:p>
-          <a:p>
-            <a:pPr algn="ctr">
-              <a:defRPr sz="1650" b="1">
-                <a:solidFill>
-                  <a:srgbClr val="00D4FF"/>
-                </a:solidFill>
-              </a:defRPr>
-            </a:pPr>
-            <a:r>
-              <a:t>Raft / Industrial</a:t>
-            </a:r>
-          </a:p>
-        </p:txBody>
-      </p:sp>
-      <p:sp>
-        <p:nvSpPr>
-          <p:cNvPr id="8" name="Rounded Rectangle 7"/>
+              <a:t>DECENTRALIZED MESH</a:t>
+            </a:r>
+          </a:p>
+          <a:p>
+            <a:pPr>
+              <a:spcBef>
+                <a:spcPts val="400"/>
+              </a:spcBef>
+              <a:defRPr sz="1400" b="1">
+                <a:solidFill>
+                  <a:srgbClr val="FFFFFF"/>
+                </a:solidFill>
+              </a:defRPr>
+            </a:pPr>
+            <a:r>
+              <a:t>Zero Single-Point</a:t>
+            </a:r>
+          </a:p>
+        </p:txBody>
+      </p:sp>
+      <p:sp>
+        <p:nvSpPr>
+          <p:cNvPr id="11" name="Rounded Rectangle 10"/>
           <p:cNvSpPr/>
           <p:nvPr/>
         </p:nvSpPr>
         <p:spPr>
           <a:xfrm>
-            <a:off x="6181344" y="4663440"/>
-            <a:ext cx="2523744" cy="1280160"/>
+            <a:off x="9381743" y="1691640"/>
+            <a:ext cx="2084831" cy="1188720"/>
           </a:xfrm>
           <a:prstGeom prst="roundRect">
             <a:avLst/>
           </a:prstGeom>
           <a:solidFill>
-            <a:srgbClr val="0F172A"/>
+            <a:srgbClr val="131926"/>
           </a:solidFill>
-          <a:ln>
+          <a:ln w="12700">
             <a:solidFill>
-              <a:srgbClr val="1E293B"/>
+              <a:srgbClr val="38BDF8"/>
             </a:solidFill>
           </a:ln>
         </p:spPr>
@@ -3485,57 +4720,83 @@
           </a:fontRef>
         </p:style>
         <p:txBody>
-          <a:bodyPr rtlCol="0" anchor="ctr" wrap="square"/>
-          <a:lstStyle/>
-          <a:p>
-            <a:pPr algn="ctr">
-              <a:spcAft>
-                <a:spcPts val="600"/>
-              </a:spcAft>
-              <a:defRPr sz="1100" b="1">
+          <a:bodyPr rtlCol="0" anchor="ctr"/>
+          <a:lstStyle/>
+          <a:p>
+            <a:pPr algn="ctr"/>
+          </a:p>
+        </p:txBody>
+      </p:sp>
+      <p:sp>
+        <p:nvSpPr>
+          <p:cNvPr id="12" name="TextBox 11"/>
+          <p:cNvSpPr txBox="1"/>
+          <p:nvPr/>
+        </p:nvSpPr>
+        <p:spPr>
+          <a:xfrm>
+            <a:off x="9518903" y="1828800"/>
+            <a:ext cx="1810511" cy="914400"/>
+          </a:xfrm>
+          <a:prstGeom prst="rect">
+            <a:avLst/>
+          </a:prstGeom>
+          <a:noFill/>
+        </p:spPr>
+        <p:txBody>
+          <a:bodyPr wrap="square" lIns="0" rIns="0" tIns="0" bIns="0">
+            <a:spAutoFit/>
+          </a:bodyPr>
+          <a:lstStyle/>
+          <a:p>
+            <a:pPr>
+              <a:defRPr sz="850" b="1">
                 <a:solidFill>
                   <a:srgbClr val="94A3B8"/>
                 </a:solidFill>
               </a:defRPr>
             </a:pPr>
             <a:r>
-              <a:t>FAILOVER WINDOW</a:t>
-            </a:r>
-          </a:p>
-          <a:p>
-            <a:pPr algn="ctr">
-              <a:defRPr sz="1650" b="1">
-                <a:solidFill>
-                  <a:srgbClr val="00D4FF"/>
-                </a:solidFill>
-              </a:defRPr>
-            </a:pPr>
-            <a:r>
-              <a:t>&lt; 200 ms Edge</a:t>
-            </a:r>
-          </a:p>
-        </p:txBody>
-      </p:sp>
-      <p:sp>
-        <p:nvSpPr>
-          <p:cNvPr id="9" name="Rounded Rectangle 8"/>
+              <a:t>CONSENSUS PROTOCOL</a:t>
+            </a:r>
+          </a:p>
+          <a:p>
+            <a:pPr>
+              <a:spcBef>
+                <a:spcPts val="400"/>
+              </a:spcBef>
+              <a:defRPr sz="1400" b="1">
+                <a:solidFill>
+                  <a:srgbClr val="FFFFFF"/>
+                </a:solidFill>
+              </a:defRPr>
+            </a:pPr>
+            <a:r>
+              <a:t>Raft / Industrial</a:t>
+            </a:r>
+          </a:p>
+        </p:txBody>
+      </p:sp>
+      <p:sp>
+        <p:nvSpPr>
+          <p:cNvPr id="13" name="Rounded Rectangle 12"/>
           <p:cNvSpPr/>
           <p:nvPr/>
         </p:nvSpPr>
         <p:spPr>
           <a:xfrm>
-            <a:off x="8906256" y="4663440"/>
-            <a:ext cx="2523744" cy="1280160"/>
+            <a:off x="7132320" y="3044952"/>
+            <a:ext cx="2084831" cy="1188720"/>
           </a:xfrm>
           <a:prstGeom prst="roundRect">
             <a:avLst/>
           </a:prstGeom>
           <a:solidFill>
-            <a:srgbClr val="0F172A"/>
+            <a:srgbClr val="131926"/>
           </a:solidFill>
-          <a:ln>
+          <a:ln w="12700">
             <a:solidFill>
-              <a:srgbClr val="1E293B"/>
+              <a:srgbClr val="38BDF8"/>
             </a:solidFill>
           </a:ln>
         </p:spPr>
@@ -3554,33 +4815,264 @@
           </a:fontRef>
         </p:style>
         <p:txBody>
-          <a:bodyPr rtlCol="0" anchor="ctr" wrap="square"/>
-          <a:lstStyle/>
-          <a:p>
-            <a:pPr algn="ctr">
-              <a:spcAft>
-                <a:spcPts val="600"/>
-              </a:spcAft>
+          <a:bodyPr rtlCol="0" anchor="ctr"/>
+          <a:lstStyle/>
+          <a:p>
+            <a:pPr algn="ctr"/>
+          </a:p>
+        </p:txBody>
+      </p:sp>
+      <p:sp>
+        <p:nvSpPr>
+          <p:cNvPr id="14" name="TextBox 13"/>
+          <p:cNvSpPr txBox="1"/>
+          <p:nvPr/>
+        </p:nvSpPr>
+        <p:spPr>
+          <a:xfrm>
+            <a:off x="7269480" y="3182112"/>
+            <a:ext cx="1810511" cy="914400"/>
+          </a:xfrm>
+          <a:prstGeom prst="rect">
+            <a:avLst/>
+          </a:prstGeom>
+          <a:noFill/>
+        </p:spPr>
+        <p:txBody>
+          <a:bodyPr wrap="square" lIns="0" rIns="0" tIns="0" bIns="0">
+            <a:spAutoFit/>
+          </a:bodyPr>
+          <a:lstStyle/>
+          <a:p>
+            <a:pPr>
+              <a:defRPr sz="850" b="1">
+                <a:solidFill>
+                  <a:srgbClr val="94A3B8"/>
+                </a:solidFill>
+              </a:defRPr>
+            </a:pPr>
+            <a:r>
+              <a:t>FAILOVER WINDOW</a:t>
+            </a:r>
+          </a:p>
+          <a:p>
+            <a:pPr>
+              <a:spcBef>
+                <a:spcPts val="400"/>
+              </a:spcBef>
+              <a:defRPr sz="1400" b="1">
+                <a:solidFill>
+                  <a:srgbClr val="38BDF8"/>
+                </a:solidFill>
+              </a:defRPr>
+            </a:pPr>
+            <a:r>
+              <a:t>&lt; 200 ms Edge</a:t>
+            </a:r>
+          </a:p>
+        </p:txBody>
+      </p:sp>
+      <p:sp>
+        <p:nvSpPr>
+          <p:cNvPr id="15" name="Rounded Rectangle 14"/>
+          <p:cNvSpPr/>
+          <p:nvPr/>
+        </p:nvSpPr>
+        <p:spPr>
+          <a:xfrm>
+            <a:off x="9381743" y="3044952"/>
+            <a:ext cx="2084831" cy="1188720"/>
+          </a:xfrm>
+          <a:prstGeom prst="roundRect">
+            <a:avLst/>
+          </a:prstGeom>
+          <a:solidFill>
+            <a:srgbClr val="131926"/>
+          </a:solidFill>
+          <a:ln w="12700">
+            <a:solidFill>
+              <a:srgbClr val="38BDF8"/>
+            </a:solidFill>
+          </a:ln>
+        </p:spPr>
+        <p:style>
+          <a:lnRef idx="1">
+            <a:schemeClr val="accent1"/>
+          </a:lnRef>
+          <a:fillRef idx="3">
+            <a:schemeClr val="accent1"/>
+          </a:fillRef>
+          <a:effectRef idx="2">
+            <a:schemeClr val="accent1"/>
+          </a:effectRef>
+          <a:fontRef idx="minor">
+            <a:schemeClr val="lt1"/>
+          </a:fontRef>
+        </p:style>
+        <p:txBody>
+          <a:bodyPr rtlCol="0" anchor="ctr"/>
+          <a:lstStyle/>
+          <a:p>
+            <a:pPr algn="ctr"/>
+          </a:p>
+        </p:txBody>
+      </p:sp>
+      <p:sp>
+        <p:nvSpPr>
+          <p:cNvPr id="16" name="TextBox 15"/>
+          <p:cNvSpPr txBox="1"/>
+          <p:nvPr/>
+        </p:nvSpPr>
+        <p:spPr>
+          <a:xfrm>
+            <a:off x="9518903" y="3182112"/>
+            <a:ext cx="1810511" cy="914400"/>
+          </a:xfrm>
+          <a:prstGeom prst="rect">
+            <a:avLst/>
+          </a:prstGeom>
+          <a:noFill/>
+        </p:spPr>
+        <p:txBody>
+          <a:bodyPr wrap="square" lIns="0" rIns="0" tIns="0" bIns="0">
+            <a:spAutoFit/>
+          </a:bodyPr>
+          <a:lstStyle/>
+          <a:p>
+            <a:pPr>
+              <a:defRPr sz="850" b="1">
+                <a:solidFill>
+                  <a:srgbClr val="94A3B8"/>
+                </a:solidFill>
+              </a:defRPr>
+            </a:pPr>
+            <a:r>
+              <a:t>ACTIVE NODES</a:t>
+            </a:r>
+          </a:p>
+          <a:p>
+            <a:pPr>
+              <a:spcBef>
+                <a:spcPts val="400"/>
+              </a:spcBef>
+              <a:defRPr sz="1400" b="1">
+                <a:solidFill>
+                  <a:srgbClr val="FFFFFF"/>
+                </a:solidFill>
+              </a:defRPr>
+            </a:pPr>
+            <a:r>
+              <a:t>256 Auto-Synced</a:t>
+            </a:r>
+          </a:p>
+        </p:txBody>
+      </p:sp>
+      <p:sp>
+        <p:nvSpPr>
+          <p:cNvPr id="17" name="Rounded Rectangle 16"/>
+          <p:cNvSpPr/>
+          <p:nvPr/>
+        </p:nvSpPr>
+        <p:spPr>
+          <a:xfrm>
+            <a:off x="7132320" y="4434840"/>
+            <a:ext cx="4334256" cy="1920240"/>
+          </a:xfrm>
+          <a:prstGeom prst="roundRect">
+            <a:avLst/>
+          </a:prstGeom>
+          <a:solidFill>
+            <a:srgbClr val="131926"/>
+          </a:solidFill>
+          <a:ln w="12700">
+            <a:solidFill>
+              <a:srgbClr val="28344B"/>
+            </a:solidFill>
+          </a:ln>
+        </p:spPr>
+        <p:style>
+          <a:lnRef idx="1">
+            <a:schemeClr val="accent1"/>
+          </a:lnRef>
+          <a:fillRef idx="3">
+            <a:schemeClr val="accent1"/>
+          </a:fillRef>
+          <a:effectRef idx="2">
+            <a:schemeClr val="accent1"/>
+          </a:effectRef>
+          <a:fontRef idx="minor">
+            <a:schemeClr val="lt1"/>
+          </a:fontRef>
+        </p:style>
+        <p:txBody>
+          <a:bodyPr rtlCol="0" anchor="ctr"/>
+          <a:lstStyle/>
+          <a:p>
+            <a:pPr algn="ctr"/>
+          </a:p>
+        </p:txBody>
+      </p:sp>
+      <p:sp>
+        <p:nvSpPr>
+          <p:cNvPr id="18" name="TextBox 17"/>
+          <p:cNvSpPr txBox="1"/>
+          <p:nvPr/>
+        </p:nvSpPr>
+        <p:spPr>
+          <a:xfrm>
+            <a:off x="7360920" y="4617720"/>
+            <a:ext cx="3840480" cy="1554480"/>
+          </a:xfrm>
+          <a:prstGeom prst="rect">
+            <a:avLst/>
+          </a:prstGeom>
+          <a:noFill/>
+        </p:spPr>
+        <p:txBody>
+          <a:bodyPr wrap="square" lIns="0" rIns="0" tIns="0" bIns="0">
+            <a:spAutoFit/>
+          </a:bodyPr>
+          <a:lstStyle/>
+          <a:p>
+            <a:pPr>
+              <a:defRPr sz="950" b="1">
+                <a:solidFill>
+                  <a:srgbClr val="38BDF8"/>
+                </a:solidFill>
+              </a:defRPr>
+            </a:pPr>
+            <a:r>
+              <a:t>TERRESTRIAL PLATFORM CORE</a:t>
+            </a:r>
+          </a:p>
+          <a:p>
+            <a:pPr>
+              <a:spcBef>
+                <a:spcPts val="200"/>
+              </a:spcBef>
               <a:defRPr sz="1100" b="1">
                 <a:solidFill>
+                  <a:srgbClr val="FFFFFF"/>
+                </a:solidFill>
+              </a:defRPr>
+            </a:pPr>
+            <a:r>
+              <a:t>Edge-to-Cloud Cognitive Nervous System</a:t>
+            </a:r>
+          </a:p>
+          <a:p>
+            <a:pPr>
+              <a:spcBef>
+                <a:spcPts val="400"/>
+              </a:spcBef>
+              <a:defRPr sz="900">
+                <a:solidFill>
                   <a:srgbClr val="94A3B8"/>
                 </a:solidFill>
               </a:defRPr>
             </a:pPr>
             <a:r>
-              <a:t>ACTIVE NODES</a:t>
-            </a:r>
-          </a:p>
-          <a:p>
-            <a:pPr algn="ctr">
-              <a:defRPr sz="1650" b="1">
-                <a:solidFill>
-                  <a:srgbClr val="00D4FF"/>
-                </a:solidFill>
-              </a:defRPr>
-            </a:pPr>
-            <a:r>
-              <a:t>256 Auto-Synced</a:t>
+              <a:t>Physics-informed mathematical twin running sub-25ms closed-loop supervisory control with full ISA-95/101 conformity.</a:t>
             </a:r>
           </a:p>
         </p:txBody>
@@ -3618,7 +5110,7 @@
             <a:avLst/>
           </a:prstGeom>
           <a:solidFill>
-            <a:srgbClr val="0A0E1A"/>
+            <a:srgbClr val="0B0F17"/>
           </a:solidFill>
           <a:ln>
             <a:noFill/>
@@ -3654,17 +5146,19 @@
         </p:nvSpPr>
         <p:spPr>
           <a:xfrm>
-            <a:off x="0" y="0"/>
-            <a:ext cx="12191695" cy="54864"/>
+            <a:off x="731520" y="365760"/>
+            <a:ext cx="10728655" cy="18288"/>
           </a:xfrm>
           <a:prstGeom prst="rect">
             <a:avLst/>
           </a:prstGeom>
           <a:solidFill>
-            <a:srgbClr val="00D4FF"/>
+            <a:srgbClr val="38BDF8"/>
           </a:solidFill>
           <a:ln>
-            <a:noFill/>
+            <a:solidFill>
+              <a:srgbClr val="38BDF8"/>
+            </a:solidFill>
           </a:ln>
         </p:spPr>
         <p:style>
@@ -3697,8 +5191,8 @@
         </p:nvSpPr>
         <p:spPr>
           <a:xfrm>
-            <a:off x="731520" y="365760"/>
-            <a:ext cx="10698480" cy="1005840"/>
+            <a:off x="731520" y="438912"/>
+            <a:ext cx="8229600" cy="274320"/>
           </a:xfrm>
           <a:prstGeom prst="rect">
             <a:avLst/>
@@ -3706,35 +5200,20 @@
           <a:noFill/>
         </p:spPr>
         <p:txBody>
-          <a:bodyPr wrap="square">
+          <a:bodyPr wrap="square" lIns="0" rIns="0" tIns="0" bIns="0">
             <a:spAutoFit/>
           </a:bodyPr>
           <a:lstStyle/>
           <a:p>
             <a:pPr>
-              <a:spcAft>
-                <a:spcPts val="400"/>
-              </a:spcAft>
-              <a:defRPr sz="1150" b="1">
-                <a:solidFill>
-                  <a:srgbClr val="00D4FF"/>
-                </a:solidFill>
-              </a:defRPr>
-            </a:pPr>
-            <a:r>
-              <a:t>TERRAHIVE  |  TERRESTRIAL PLATFORM</a:t>
-            </a:r>
-          </a:p>
-          <a:p>
-            <a:pPr>
-              <a:defRPr sz="2500" b="1">
-                <a:solidFill>
-                  <a:srgbClr val="FFFFFF"/>
-                </a:solidFill>
-              </a:defRPr>
-            </a:pPr>
-            <a:r>
-              <a:t>Core Functional Deliverables &amp; Architectural Pillars</a:t>
+              <a:defRPr sz="950" b="1">
+                <a:solidFill>
+                  <a:srgbClr val="38BDF8"/>
+                </a:solidFill>
+              </a:defRPr>
+            </a:pPr>
+            <a:r>
+              <a:t>TERRESTRIAL PLATFORM  |  TERRAHIVE  |  OPERATIONAL INTERFACE</a:t>
             </a:r>
           </a:p>
         </p:txBody>
@@ -3747,8 +5226,8 @@
         </p:nvSpPr>
         <p:spPr>
           <a:xfrm>
-            <a:off x="731520" y="6446520"/>
-            <a:ext cx="10698480" cy="320040"/>
+            <a:off x="731520" y="731520"/>
+            <a:ext cx="9601200" cy="777240"/>
           </a:xfrm>
           <a:prstGeom prst="rect">
             <a:avLst/>
@@ -3756,44 +5235,83 @@
           <a:noFill/>
         </p:spPr>
         <p:txBody>
-          <a:bodyPr wrap="none">
+          <a:bodyPr wrap="square" lIns="0" rIns="0" tIns="0" bIns="0">
             <a:spAutoFit/>
           </a:bodyPr>
           <a:lstStyle/>
           <a:p>
             <a:pPr>
-              <a:defRPr sz="1000">
+              <a:defRPr sz="1900" b="1">
+                <a:solidFill>
+                  <a:srgbClr val="FFFFFF"/>
+                </a:solidFill>
+              </a:defRPr>
+            </a:pPr>
+            <a:r>
+              <a:t>TerraHive ANSI/ISA-101 Operational Interface &amp; Real-Time System Representation</a:t>
+            </a:r>
+          </a:p>
+          <a:p>
+            <a:pPr>
+              <a:spcBef>
+                <a:spcPts val="300"/>
+              </a:spcBef>
+              <a:defRPr sz="1050">
                 <a:solidFill>
                   <a:srgbClr val="94A3B8"/>
                 </a:solidFill>
               </a:defRPr>
             </a:pPr>
             <a:r>
-              <a:t>TERRESTRIAL PLATFORM  |  TERRAHIVE CATALOGUE  |  CONFIDENTIAL - AUTHORISED SYSTEM INTEGRATORS ONLY</a:t>
-            </a:r>
-          </a:p>
-        </p:txBody>
-      </p:sp>
-      <p:sp>
-        <p:nvSpPr>
-          <p:cNvPr id="6" name="Rounded Rectangle 5"/>
+              <a:t>ANSI/ISA-101 Ergonomic High-Performance HMI · Real-Time System Representation</a:t>
+            </a:r>
+          </a:p>
+        </p:txBody>
+      </p:sp>
+      <p:pic>
+        <p:nvPicPr>
+          <p:cNvPr id="6" name="Picture 5" descr="tp_logo_white.png"/>
+          <p:cNvPicPr>
+            <a:picLocks noChangeAspect="1"/>
+          </p:cNvPicPr>
+          <p:nvPr/>
+        </p:nvPicPr>
+        <p:blipFill>
+          <a:blip r:embed="rId2"/>
+          <a:stretch>
+            <a:fillRect/>
+          </a:stretch>
+        </p:blipFill>
+        <p:spPr>
+          <a:xfrm>
+            <a:off x="10469880" y="411480"/>
+            <a:ext cx="987552" cy="384048"/>
+          </a:xfrm>
+          <a:prstGeom prst="rect">
+            <a:avLst/>
+          </a:prstGeom>
+        </p:spPr>
+      </p:pic>
+      <p:sp>
+        <p:nvSpPr>
+          <p:cNvPr id="7" name="Rounded Rectangle 6"/>
           <p:cNvSpPr/>
           <p:nvPr/>
         </p:nvSpPr>
         <p:spPr>
           <a:xfrm>
             <a:off x="731520" y="1645920"/>
-            <a:ext cx="5212080" cy="2148840"/>
+            <a:ext cx="10728655" cy="4709160"/>
           </a:xfrm>
           <a:prstGeom prst="roundRect">
             <a:avLst/>
           </a:prstGeom>
           <a:solidFill>
-            <a:srgbClr val="0F172A"/>
+            <a:srgbClr val="131926"/>
           </a:solidFill>
-          <a:ln>
+          <a:ln w="12700">
             <a:solidFill>
-              <a:srgbClr val="1E293B"/>
+              <a:srgbClr val="38BDF8"/>
             </a:solidFill>
           </a:ln>
         </p:spPr>
@@ -3812,304 +5330,37 @@
           </a:fontRef>
         </p:style>
         <p:txBody>
-          <a:bodyPr rtlCol="0" anchor="ctr" wrap="square"/>
-          <a:lstStyle/>
-          <a:p>
-            <a:pPr algn="ctr">
-              <a:spcAft>
-                <a:spcPts val="400"/>
-              </a:spcAft>
-              <a:defRPr sz="1100" b="1">
-                <a:solidFill>
-                  <a:srgbClr val="00D4FF"/>
-                </a:solidFill>
-              </a:defRPr>
-            </a:pPr>
-            <a:r>
-              <a:t>PILLAR 01</a:t>
-            </a:r>
-          </a:p>
-          <a:p>
-            <a:pPr>
-              <a:spcAft>
-                <a:spcPts val="600"/>
-              </a:spcAft>
-              <a:defRPr sz="1650" b="1">
-                <a:solidFill>
-                  <a:srgbClr val="FFFFFF"/>
-                </a:solidFill>
-              </a:defRPr>
-            </a:pPr>
-            <a:r>
-              <a:t>Decentralized Swarm Architecture</a:t>
-            </a:r>
-          </a:p>
-          <a:p>
-            <a:pPr>
-              <a:defRPr sz="1300">
-                <a:solidFill>
-                  <a:srgbClr val="C8D8F0"/>
-                </a:solidFill>
-              </a:defRPr>
-            </a:pPr>
-            <a:r>
-              <a:t>Specialized autonomous agents for diagnostics, maintenance coordination, and dispatch optimization.</a:t>
-            </a:r>
-          </a:p>
-        </p:txBody>
-      </p:sp>
-      <p:sp>
-        <p:nvSpPr>
-          <p:cNvPr id="7" name="Rounded Rectangle 6"/>
-          <p:cNvSpPr/>
-          <p:nvPr/>
-        </p:nvSpPr>
-        <p:spPr>
-          <a:xfrm>
-            <a:off x="6217920" y="1645920"/>
-            <a:ext cx="5212080" cy="2148840"/>
-          </a:xfrm>
-          <a:prstGeom prst="roundRect">
-            <a:avLst/>
-          </a:prstGeom>
-          <a:solidFill>
-            <a:srgbClr val="0F172A"/>
-          </a:solidFill>
-          <a:ln>
-            <a:solidFill>
-              <a:srgbClr val="1E293B"/>
-            </a:solidFill>
-          </a:ln>
-        </p:spPr>
-        <p:style>
-          <a:lnRef idx="1">
-            <a:schemeClr val="accent1"/>
-          </a:lnRef>
-          <a:fillRef idx="3">
-            <a:schemeClr val="accent1"/>
-          </a:fillRef>
-          <a:effectRef idx="2">
-            <a:schemeClr val="accent1"/>
-          </a:effectRef>
-          <a:fontRef idx="minor">
-            <a:schemeClr val="lt1"/>
-          </a:fontRef>
-        </p:style>
-        <p:txBody>
-          <a:bodyPr rtlCol="0" anchor="ctr" wrap="square"/>
-          <a:lstStyle/>
-          <a:p>
-            <a:pPr algn="ctr">
-              <a:spcAft>
-                <a:spcPts val="400"/>
-              </a:spcAft>
-              <a:defRPr sz="1100" b="1">
-                <a:solidFill>
-                  <a:srgbClr val="00D4FF"/>
-                </a:solidFill>
-              </a:defRPr>
-            </a:pPr>
-            <a:r>
-              <a:t>PILLAR 02</a:t>
-            </a:r>
-          </a:p>
-          <a:p>
-            <a:pPr>
-              <a:spcAft>
-                <a:spcPts val="600"/>
-              </a:spcAft>
-              <a:defRPr sz="1650" b="1">
-                <a:solidFill>
-                  <a:srgbClr val="FFFFFF"/>
-                </a:solidFill>
-              </a:defRPr>
-            </a:pPr>
-            <a:r>
-              <a:t>Dynamic Consensus Engine</a:t>
-            </a:r>
-          </a:p>
-          <a:p>
-            <a:pPr>
-              <a:defRPr sz="1300">
-                <a:solidFill>
-                  <a:srgbClr val="C8D8F0"/>
-                </a:solidFill>
-              </a:defRPr>
-            </a:pPr>
-            <a:r>
-              <a:t>AI-driven cross-departmental negotiation based on real-time operational constraints.</a:t>
-            </a:r>
-          </a:p>
-        </p:txBody>
-      </p:sp>
-      <p:sp>
-        <p:nvSpPr>
-          <p:cNvPr id="8" name="Rounded Rectangle 7"/>
-          <p:cNvSpPr/>
-          <p:nvPr/>
-        </p:nvSpPr>
-        <p:spPr>
-          <a:xfrm>
-            <a:off x="731520" y="4069080"/>
-            <a:ext cx="5212080" cy="2148840"/>
-          </a:xfrm>
-          <a:prstGeom prst="roundRect">
-            <a:avLst/>
-          </a:prstGeom>
-          <a:solidFill>
-            <a:srgbClr val="0F172A"/>
-          </a:solidFill>
-          <a:ln>
-            <a:solidFill>
-              <a:srgbClr val="1E293B"/>
-            </a:solidFill>
-          </a:ln>
-        </p:spPr>
-        <p:style>
-          <a:lnRef idx="1">
-            <a:schemeClr val="accent1"/>
-          </a:lnRef>
-          <a:fillRef idx="3">
-            <a:schemeClr val="accent1"/>
-          </a:fillRef>
-          <a:effectRef idx="2">
-            <a:schemeClr val="accent1"/>
-          </a:effectRef>
-          <a:fontRef idx="minor">
-            <a:schemeClr val="lt1"/>
-          </a:fontRef>
-        </p:style>
-        <p:txBody>
-          <a:bodyPr rtlCol="0" anchor="ctr" wrap="square"/>
-          <a:lstStyle/>
-          <a:p>
-            <a:pPr algn="ctr">
-              <a:spcAft>
-                <a:spcPts val="400"/>
-              </a:spcAft>
-              <a:defRPr sz="1100" b="1">
-                <a:solidFill>
-                  <a:srgbClr val="00D4FF"/>
-                </a:solidFill>
-              </a:defRPr>
-            </a:pPr>
-            <a:r>
-              <a:t>PILLAR 03</a:t>
-            </a:r>
-          </a:p>
-          <a:p>
-            <a:pPr>
-              <a:spcAft>
-                <a:spcPts val="600"/>
-              </a:spcAft>
-              <a:defRPr sz="1650" b="1">
-                <a:solidFill>
-                  <a:srgbClr val="FFFFFF"/>
-                </a:solidFill>
-              </a:defRPr>
-            </a:pPr>
-            <a:r>
-              <a:t>Audited Governance &amp; Traceability</a:t>
-            </a:r>
-          </a:p>
-          <a:p>
-            <a:pPr>
-              <a:defRPr sz="1300">
-                <a:solidFill>
-                  <a:srgbClr val="C8D8F0"/>
-                </a:solidFill>
-              </a:defRPr>
-            </a:pPr>
-            <a:r>
-              <a:t>Comprehensive action logging, deterministic execution tracing, and human-in-the-loop permission gates.</a:t>
-            </a:r>
-          </a:p>
-        </p:txBody>
-      </p:sp>
-      <p:sp>
-        <p:nvSpPr>
-          <p:cNvPr id="9" name="Rounded Rectangle 8"/>
-          <p:cNvSpPr/>
-          <p:nvPr/>
-        </p:nvSpPr>
-        <p:spPr>
-          <a:xfrm>
-            <a:off x="6217920" y="4069080"/>
-            <a:ext cx="5212080" cy="2148840"/>
-          </a:xfrm>
-          <a:prstGeom prst="roundRect">
-            <a:avLst/>
-          </a:prstGeom>
-          <a:solidFill>
-            <a:srgbClr val="0F172A"/>
-          </a:solidFill>
-          <a:ln>
-            <a:solidFill>
-              <a:srgbClr val="1E293B"/>
-            </a:solidFill>
-          </a:ln>
-        </p:spPr>
-        <p:style>
-          <a:lnRef idx="1">
-            <a:schemeClr val="accent1"/>
-          </a:lnRef>
-          <a:fillRef idx="3">
-            <a:schemeClr val="accent1"/>
-          </a:fillRef>
-          <a:effectRef idx="2">
-            <a:schemeClr val="accent1"/>
-          </a:effectRef>
-          <a:fontRef idx="minor">
-            <a:schemeClr val="lt1"/>
-          </a:fontRef>
-        </p:style>
-        <p:txBody>
-          <a:bodyPr rtlCol="0" anchor="ctr" wrap="square"/>
-          <a:lstStyle/>
-          <a:p>
-            <a:pPr algn="ctr">
-              <a:spcAft>
-                <a:spcPts val="400"/>
-              </a:spcAft>
-              <a:defRPr sz="1100" b="1">
-                <a:solidFill>
-                  <a:srgbClr val="00D4FF"/>
-                </a:solidFill>
-              </a:defRPr>
-            </a:pPr>
-            <a:r>
-              <a:t>PILLAR 04</a:t>
-            </a:r>
-          </a:p>
-          <a:p>
-            <a:pPr>
-              <a:spcAft>
-                <a:spcPts val="600"/>
-              </a:spcAft>
-              <a:defRPr sz="1650" b="1">
-                <a:solidFill>
-                  <a:srgbClr val="FFFFFF"/>
-                </a:solidFill>
-              </a:defRPr>
-            </a:pPr>
-            <a:r>
-              <a:t>Deterministic Swarm State Machine</a:t>
-            </a:r>
-          </a:p>
-          <a:p>
-            <a:pPr>
-              <a:defRPr sz="1300">
-                <a:solidFill>
-                  <a:srgbClr val="C8D8F0"/>
-                </a:solidFill>
-              </a:defRPr>
-            </a:pPr>
-            <a:r>
-              <a:t>Autonomous state engine managing agent goals, collaborative sessions, tools, operational memories, and reflection loops.</a:t>
-            </a:r>
-          </a:p>
-        </p:txBody>
-      </p:sp>
+          <a:bodyPr rtlCol="0" anchor="ctr"/>
+          <a:lstStyle/>
+          <a:p>
+            <a:pPr algn="ctr"/>
+          </a:p>
+        </p:txBody>
+      </p:sp>
+      <p:pic>
+        <p:nvPicPr>
+          <p:cNvPr id="8" name="Picture 7" descr="terra_hive_isa101_showcase.jpg"/>
+          <p:cNvPicPr>
+            <a:picLocks noChangeAspect="1"/>
+          </p:cNvPicPr>
+          <p:nvPr/>
+        </p:nvPicPr>
+        <p:blipFill>
+          <a:blip r:embed="rId3"/>
+          <a:stretch>
+            <a:fillRect/>
+          </a:stretch>
+        </p:blipFill>
+        <p:spPr>
+          <a:xfrm>
+            <a:off x="777240" y="1691640"/>
+            <a:ext cx="10637215" cy="4617720"/>
+          </a:xfrm>
+          <a:prstGeom prst="rect">
+            <a:avLst/>
+          </a:prstGeom>
+        </p:spPr>
+      </p:pic>
     </p:spTree>
   </p:cSld>
   <p:clrMapOvr>
@@ -4143,7 +5394,7 @@
             <a:avLst/>
           </a:prstGeom>
           <a:solidFill>
-            <a:srgbClr val="0A0E1A"/>
+            <a:srgbClr val="0B0F17"/>
           </a:solidFill>
           <a:ln>
             <a:noFill/>
@@ -4179,17 +5430,19 @@
         </p:nvSpPr>
         <p:spPr>
           <a:xfrm>
-            <a:off x="0" y="0"/>
-            <a:ext cx="12191695" cy="54864"/>
+            <a:off x="731520" y="365760"/>
+            <a:ext cx="10728655" cy="18288"/>
           </a:xfrm>
           <a:prstGeom prst="rect">
             <a:avLst/>
           </a:prstGeom>
           <a:solidFill>
-            <a:srgbClr val="00D4FF"/>
+            <a:srgbClr val="38BDF8"/>
           </a:solidFill>
           <a:ln>
-            <a:noFill/>
+            <a:solidFill>
+              <a:srgbClr val="38BDF8"/>
+            </a:solidFill>
           </a:ln>
         </p:spPr>
         <p:style>
@@ -4222,8 +5475,8 @@
         </p:nvSpPr>
         <p:spPr>
           <a:xfrm>
-            <a:off x="731520" y="365760"/>
-            <a:ext cx="10698480" cy="1005840"/>
+            <a:off x="731520" y="438912"/>
+            <a:ext cx="8229600" cy="274320"/>
           </a:xfrm>
           <a:prstGeom prst="rect">
             <a:avLst/>
@@ -4231,35 +5484,20 @@
           <a:noFill/>
         </p:spPr>
         <p:txBody>
-          <a:bodyPr wrap="square">
+          <a:bodyPr wrap="square" lIns="0" rIns="0" tIns="0" bIns="0">
             <a:spAutoFit/>
           </a:bodyPr>
           <a:lstStyle/>
           <a:p>
             <a:pPr>
-              <a:spcAft>
-                <a:spcPts val="400"/>
-              </a:spcAft>
-              <a:defRPr sz="1150" b="1">
-                <a:solidFill>
-                  <a:srgbClr val="00D4FF"/>
-                </a:solidFill>
-              </a:defRPr>
-            </a:pPr>
-            <a:r>
-              <a:t>TERRAHIVE  |  TERRESTRIAL PLATFORM</a:t>
-            </a:r>
-          </a:p>
-          <a:p>
-            <a:pPr>
-              <a:defRPr sz="2500" b="1">
-                <a:solidFill>
-                  <a:srgbClr val="FFFFFF"/>
-                </a:solidFill>
-              </a:defRPr>
-            </a:pPr>
-            <a:r>
-              <a:t>Field-Validated Operational Use Cases &amp; Quantifiable ROI</a:t>
+              <a:defRPr sz="950" b="1">
+                <a:solidFill>
+                  <a:srgbClr val="38BDF8"/>
+                </a:solidFill>
+              </a:defRPr>
+            </a:pPr>
+            <a:r>
+              <a:t>TERRESTRIAL PLATFORM  |  TERRAHIVE  |  CORE CAPABILITIES</a:t>
             </a:r>
           </a:p>
         </p:txBody>
@@ -4272,8 +5510,8 @@
         </p:nvSpPr>
         <p:spPr>
           <a:xfrm>
-            <a:off x="731520" y="6446520"/>
-            <a:ext cx="10698480" cy="320040"/>
+            <a:off x="731520" y="731520"/>
+            <a:ext cx="9601200" cy="777240"/>
           </a:xfrm>
           <a:prstGeom prst="rect">
             <a:avLst/>
@@ -4281,44 +5519,83 @@
           <a:noFill/>
         </p:spPr>
         <p:txBody>
-          <a:bodyPr wrap="none">
+          <a:bodyPr wrap="square" lIns="0" rIns="0" tIns="0" bIns="0">
             <a:spAutoFit/>
           </a:bodyPr>
           <a:lstStyle/>
           <a:p>
             <a:pPr>
-              <a:defRPr sz="1000">
+              <a:defRPr sz="1900" b="1">
+                <a:solidFill>
+                  <a:srgbClr val="FFFFFF"/>
+                </a:solidFill>
+              </a:defRPr>
+            </a:pPr>
+            <a:r>
+              <a:t>What TerraHive Will Do</a:t>
+            </a:r>
+          </a:p>
+          <a:p>
+            <a:pPr>
+              <a:spcBef>
+                <a:spcPts val="300"/>
+              </a:spcBef>
+              <a:defRPr sz="1050">
                 <a:solidFill>
                   <a:srgbClr val="94A3B8"/>
                 </a:solidFill>
               </a:defRPr>
             </a:pPr>
             <a:r>
-              <a:t>TERRESTRIAL PLATFORM  |  TERRAHIVE CATALOGUE  |  CONFIDENTIAL - AUTHORISED SYSTEM INTEGRATORS ONLY</a:t>
-            </a:r>
-          </a:p>
-        </p:txBody>
-      </p:sp>
-      <p:sp>
-        <p:nvSpPr>
-          <p:cNvPr id="6" name="Rounded Rectangle 5"/>
+              <a:t>Specific operational functions and engineering capabilities directly sourced from technical documentation.</a:t>
+            </a:r>
+          </a:p>
+        </p:txBody>
+      </p:sp>
+      <p:pic>
+        <p:nvPicPr>
+          <p:cNvPr id="6" name="Picture 5" descr="tp_logo_white.png"/>
+          <p:cNvPicPr>
+            <a:picLocks noChangeAspect="1"/>
+          </p:cNvPicPr>
+          <p:nvPr/>
+        </p:nvPicPr>
+        <p:blipFill>
+          <a:blip r:embed="rId2"/>
+          <a:stretch>
+            <a:fillRect/>
+          </a:stretch>
+        </p:blipFill>
+        <p:spPr>
+          <a:xfrm>
+            <a:off x="10469880" y="411480"/>
+            <a:ext cx="987552" cy="384048"/>
+          </a:xfrm>
+          <a:prstGeom prst="rect">
+            <a:avLst/>
+          </a:prstGeom>
+        </p:spPr>
+      </p:pic>
+      <p:sp>
+        <p:nvSpPr>
+          <p:cNvPr id="7" name="Rounded Rectangle 6"/>
           <p:cNvSpPr/>
           <p:nvPr/>
         </p:nvSpPr>
         <p:spPr>
           <a:xfrm>
-            <a:off x="731520" y="1645920"/>
-            <a:ext cx="3401568" cy="4389120"/>
+            <a:off x="731520" y="1691640"/>
+            <a:ext cx="5230368" cy="2194560"/>
           </a:xfrm>
           <a:prstGeom prst="roundRect">
             <a:avLst/>
           </a:prstGeom>
           <a:solidFill>
-            <a:srgbClr val="0F172A"/>
+            <a:srgbClr val="131926"/>
           </a:solidFill>
-          <a:ln>
+          <a:ln w="12700">
             <a:solidFill>
-              <a:srgbClr val="1E293B"/>
+              <a:srgbClr val="28344B"/>
             </a:solidFill>
           </a:ln>
         </p:spPr>
@@ -4337,72 +5614,98 @@
           </a:fontRef>
         </p:style>
         <p:txBody>
-          <a:bodyPr rtlCol="0" anchor="ctr" wrap="square"/>
-          <a:lstStyle/>
-          <a:p>
-            <a:pPr algn="ctr">
+          <a:bodyPr rtlCol="0" anchor="ctr"/>
+          <a:lstStyle/>
+          <a:p>
+            <a:pPr algn="ctr"/>
+          </a:p>
+        </p:txBody>
+      </p:sp>
+      <p:sp>
+        <p:nvSpPr>
+          <p:cNvPr id="8" name="TextBox 7"/>
+          <p:cNvSpPr txBox="1"/>
+          <p:nvPr/>
+        </p:nvSpPr>
+        <p:spPr>
+          <a:xfrm>
+            <a:off x="960120" y="1874520"/>
+            <a:ext cx="4773168" cy="1828800"/>
+          </a:xfrm>
+          <a:prstGeom prst="rect">
+            <a:avLst/>
+          </a:prstGeom>
+          <a:noFill/>
+        </p:spPr>
+        <p:txBody>
+          <a:bodyPr wrap="square" lIns="0" rIns="0" tIns="0" bIns="0">
+            <a:spAutoFit/>
+          </a:bodyPr>
+          <a:lstStyle/>
+          <a:p>
+            <a:pPr>
+              <a:defRPr sz="850" b="1">
+                <a:solidFill>
+                  <a:srgbClr val="38BDF8"/>
+                </a:solidFill>
+              </a:defRPr>
+            </a:pPr>
+            <a:r>
+              <a:t>PILLAR 01  |  ENGINEERING CAPABILITY</a:t>
+            </a:r>
+          </a:p>
+          <a:p>
+            <a:pPr>
+              <a:spcBef>
+                <a:spcPts val="300"/>
+              </a:spcBef>
               <a:spcAft>
-                <a:spcPts val="800"/>
+                <a:spcPts val="600"/>
               </a:spcAft>
-              <a:defRPr sz="1100" b="1">
-                <a:solidFill>
-                  <a:srgbClr val="F5C842"/>
-                </a:solidFill>
-              </a:defRPr>
-            </a:pPr>
-            <a:r>
-              <a:t>REDUCED MANPOWER</a:t>
-            </a:r>
-          </a:p>
-          <a:p>
-            <a:pPr>
-              <a:spcAft>
-                <a:spcPts val="1200"/>
-              </a:spcAft>
-              <a:defRPr sz="1600" b="1">
+              <a:defRPr sz="1300" b="1">
                 <a:solidFill>
                   <a:srgbClr val="FFFFFF"/>
                 </a:solidFill>
               </a:defRPr>
             </a:pPr>
             <a:r>
-              <a:t>Reduced Manpower (Decentralized Swarm Coordination)</a:t>
-            </a:r>
-          </a:p>
-          <a:p>
-            <a:pPr>
-              <a:defRPr sz="1300">
-                <a:solidFill>
-                  <a:srgbClr val="C8D8F0"/>
-                </a:solidFill>
-              </a:defRPr>
-            </a:pPr>
-            <a:r>
-              <a:t>Specialized agents for diagnostics, maintenance coordination, and dispatch optimization collaborate automatically.</a:t>
-            </a:r>
-          </a:p>
-        </p:txBody>
-      </p:sp>
-      <p:sp>
-        <p:nvSpPr>
-          <p:cNvPr id="7" name="Rounded Rectangle 6"/>
+              <a:t>Decentralized Swarm Architecture</a:t>
+            </a:r>
+          </a:p>
+          <a:p>
+            <a:pPr>
+              <a:defRPr sz="1000">
+                <a:solidFill>
+                  <a:srgbClr val="F1F5F9"/>
+                </a:solidFill>
+              </a:defRPr>
+            </a:pPr>
+            <a:r>
+              <a:t>Specialized autonomous agents for diagnostics, maintenance coordination, and dispatch optimization.</a:t>
+            </a:r>
+          </a:p>
+        </p:txBody>
+      </p:sp>
+      <p:sp>
+        <p:nvSpPr>
+          <p:cNvPr id="9" name="Rounded Rectangle 8"/>
           <p:cNvSpPr/>
           <p:nvPr/>
         </p:nvSpPr>
         <p:spPr>
           <a:xfrm>
-            <a:off x="4379976" y="1645920"/>
-            <a:ext cx="3401568" cy="4389120"/>
+            <a:off x="6227064" y="1691640"/>
+            <a:ext cx="5230368" cy="2194560"/>
           </a:xfrm>
           <a:prstGeom prst="roundRect">
             <a:avLst/>
           </a:prstGeom>
           <a:solidFill>
-            <a:srgbClr val="0F172A"/>
+            <a:srgbClr val="131926"/>
           </a:solidFill>
-          <a:ln>
+          <a:ln w="12700">
             <a:solidFill>
-              <a:srgbClr val="1E293B"/>
+              <a:srgbClr val="28344B"/>
             </a:solidFill>
           </a:ln>
         </p:spPr>
@@ -4421,72 +5724,98 @@
           </a:fontRef>
         </p:style>
         <p:txBody>
-          <a:bodyPr rtlCol="0" anchor="ctr" wrap="square"/>
-          <a:lstStyle/>
-          <a:p>
-            <a:pPr algn="ctr">
+          <a:bodyPr rtlCol="0" anchor="ctr"/>
+          <a:lstStyle/>
+          <a:p>
+            <a:pPr algn="ctr"/>
+          </a:p>
+        </p:txBody>
+      </p:sp>
+      <p:sp>
+        <p:nvSpPr>
+          <p:cNvPr id="10" name="TextBox 9"/>
+          <p:cNvSpPr txBox="1"/>
+          <p:nvPr/>
+        </p:nvSpPr>
+        <p:spPr>
+          <a:xfrm>
+            <a:off x="6455664" y="1874520"/>
+            <a:ext cx="4773168" cy="1828800"/>
+          </a:xfrm>
+          <a:prstGeom prst="rect">
+            <a:avLst/>
+          </a:prstGeom>
+          <a:noFill/>
+        </p:spPr>
+        <p:txBody>
+          <a:bodyPr wrap="square" lIns="0" rIns="0" tIns="0" bIns="0">
+            <a:spAutoFit/>
+          </a:bodyPr>
+          <a:lstStyle/>
+          <a:p>
+            <a:pPr>
+              <a:defRPr sz="850" b="1">
+                <a:solidFill>
+                  <a:srgbClr val="38BDF8"/>
+                </a:solidFill>
+              </a:defRPr>
+            </a:pPr>
+            <a:r>
+              <a:t>PILLAR 02  |  ENGINEERING CAPABILITY</a:t>
+            </a:r>
+          </a:p>
+          <a:p>
+            <a:pPr>
+              <a:spcBef>
+                <a:spcPts val="300"/>
+              </a:spcBef>
               <a:spcAft>
-                <a:spcPts val="800"/>
+                <a:spcPts val="600"/>
               </a:spcAft>
-              <a:defRPr sz="1100" b="1">
-                <a:solidFill>
-                  <a:srgbClr val="F5C842"/>
-                </a:solidFill>
-              </a:defRPr>
-            </a:pPr>
-            <a:r>
-              <a:t>EFFICIENCY</a:t>
-            </a:r>
-          </a:p>
-          <a:p>
-            <a:pPr>
-              <a:spcAft>
-                <a:spcPts val="1200"/>
-              </a:spcAft>
-              <a:defRPr sz="1600" b="1">
+              <a:defRPr sz="1300" b="1">
                 <a:solidFill>
                   <a:srgbClr val="FFFFFF"/>
                 </a:solidFill>
               </a:defRPr>
             </a:pPr>
             <a:r>
-              <a:t>Efficiency (Dynamic Consensus Negotiation)</a:t>
-            </a:r>
-          </a:p>
-          <a:p>
-            <a:pPr>
-              <a:defRPr sz="1300">
-                <a:solidFill>
-                  <a:srgbClr val="C8D8F0"/>
-                </a:solidFill>
-              </a:defRPr>
-            </a:pPr>
-            <a:r>
-              <a:t>AI-driven cross-departmental negotiation resolves trade-offs between production throughput and power tariffs.</a:t>
-            </a:r>
-          </a:p>
-        </p:txBody>
-      </p:sp>
-      <p:sp>
-        <p:nvSpPr>
-          <p:cNvPr id="8" name="Rounded Rectangle 7"/>
+              <a:t>Dynamic Consensus Engine</a:t>
+            </a:r>
+          </a:p>
+          <a:p>
+            <a:pPr>
+              <a:defRPr sz="1000">
+                <a:solidFill>
+                  <a:srgbClr val="F1F5F9"/>
+                </a:solidFill>
+              </a:defRPr>
+            </a:pPr>
+            <a:r>
+              <a:t>AI-driven cross-departmental negotiation based on real-time operational constraints.</a:t>
+            </a:r>
+          </a:p>
+        </p:txBody>
+      </p:sp>
+      <p:sp>
+        <p:nvSpPr>
+          <p:cNvPr id="11" name="Rounded Rectangle 10"/>
           <p:cNvSpPr/>
           <p:nvPr/>
         </p:nvSpPr>
         <p:spPr>
           <a:xfrm>
-            <a:off x="8028432" y="1645920"/>
-            <a:ext cx="3401568" cy="4389120"/>
+            <a:off x="731520" y="4114800"/>
+            <a:ext cx="5230368" cy="2194560"/>
           </a:xfrm>
           <a:prstGeom prst="roundRect">
             <a:avLst/>
           </a:prstGeom>
           <a:solidFill>
-            <a:srgbClr val="0F172A"/>
+            <a:srgbClr val="131926"/>
           </a:solidFill>
-          <a:ln>
+          <a:ln w="12700">
             <a:solidFill>
-              <a:srgbClr val="1E293B"/>
+              <a:srgbClr val="28344B"/>
             </a:solidFill>
           </a:ln>
         </p:spPr>
@@ -4505,48 +5834,184 @@
           </a:fontRef>
         </p:style>
         <p:txBody>
-          <a:bodyPr rtlCol="0" anchor="ctr" wrap="square"/>
-          <a:lstStyle/>
-          <a:p>
-            <a:pPr algn="ctr">
+          <a:bodyPr rtlCol="0" anchor="ctr"/>
+          <a:lstStyle/>
+          <a:p>
+            <a:pPr algn="ctr"/>
+          </a:p>
+        </p:txBody>
+      </p:sp>
+      <p:sp>
+        <p:nvSpPr>
+          <p:cNvPr id="12" name="TextBox 11"/>
+          <p:cNvSpPr txBox="1"/>
+          <p:nvPr/>
+        </p:nvSpPr>
+        <p:spPr>
+          <a:xfrm>
+            <a:off x="960120" y="4297680"/>
+            <a:ext cx="4773168" cy="1828800"/>
+          </a:xfrm>
+          <a:prstGeom prst="rect">
+            <a:avLst/>
+          </a:prstGeom>
+          <a:noFill/>
+        </p:spPr>
+        <p:txBody>
+          <a:bodyPr wrap="square" lIns="0" rIns="0" tIns="0" bIns="0">
+            <a:spAutoFit/>
+          </a:bodyPr>
+          <a:lstStyle/>
+          <a:p>
+            <a:pPr>
+              <a:defRPr sz="850" b="1">
+                <a:solidFill>
+                  <a:srgbClr val="38BDF8"/>
+                </a:solidFill>
+              </a:defRPr>
+            </a:pPr>
+            <a:r>
+              <a:t>PILLAR 03  |  ENGINEERING CAPABILITY</a:t>
+            </a:r>
+          </a:p>
+          <a:p>
+            <a:pPr>
+              <a:spcBef>
+                <a:spcPts val="300"/>
+              </a:spcBef>
               <a:spcAft>
-                <a:spcPts val="800"/>
+                <a:spcPts val="600"/>
               </a:spcAft>
-              <a:defRPr sz="1100" b="1">
-                <a:solidFill>
-                  <a:srgbClr val="F5C842"/>
-                </a:solidFill>
-              </a:defRPr>
-            </a:pPr>
-            <a:r>
-              <a:t>QA &amp; COMPLIANCE</a:t>
-            </a:r>
-          </a:p>
-          <a:p>
-            <a:pPr>
+              <a:defRPr sz="1300" b="1">
+                <a:solidFill>
+                  <a:srgbClr val="FFFFFF"/>
+                </a:solidFill>
+              </a:defRPr>
+            </a:pPr>
+            <a:r>
+              <a:t>Audited Governance &amp; Traceability</a:t>
+            </a:r>
+          </a:p>
+          <a:p>
+            <a:pPr>
+              <a:defRPr sz="1000">
+                <a:solidFill>
+                  <a:srgbClr val="F1F5F9"/>
+                </a:solidFill>
+              </a:defRPr>
+            </a:pPr>
+            <a:r>
+              <a:t>Comprehensive action logging, deterministic execution tracing, and human-in-the-loop permission gates.</a:t>
+            </a:r>
+          </a:p>
+        </p:txBody>
+      </p:sp>
+      <p:sp>
+        <p:nvSpPr>
+          <p:cNvPr id="13" name="Rounded Rectangle 12"/>
+          <p:cNvSpPr/>
+          <p:nvPr/>
+        </p:nvSpPr>
+        <p:spPr>
+          <a:xfrm>
+            <a:off x="6227064" y="4114800"/>
+            <a:ext cx="5230368" cy="2194560"/>
+          </a:xfrm>
+          <a:prstGeom prst="roundRect">
+            <a:avLst/>
+          </a:prstGeom>
+          <a:solidFill>
+            <a:srgbClr val="131926"/>
+          </a:solidFill>
+          <a:ln w="12700">
+            <a:solidFill>
+              <a:srgbClr val="28344B"/>
+            </a:solidFill>
+          </a:ln>
+        </p:spPr>
+        <p:style>
+          <a:lnRef idx="1">
+            <a:schemeClr val="accent1"/>
+          </a:lnRef>
+          <a:fillRef idx="3">
+            <a:schemeClr val="accent1"/>
+          </a:fillRef>
+          <a:effectRef idx="2">
+            <a:schemeClr val="accent1"/>
+          </a:effectRef>
+          <a:fontRef idx="minor">
+            <a:schemeClr val="lt1"/>
+          </a:fontRef>
+        </p:style>
+        <p:txBody>
+          <a:bodyPr rtlCol="0" anchor="ctr"/>
+          <a:lstStyle/>
+          <a:p>
+            <a:pPr algn="ctr"/>
+          </a:p>
+        </p:txBody>
+      </p:sp>
+      <p:sp>
+        <p:nvSpPr>
+          <p:cNvPr id="14" name="TextBox 13"/>
+          <p:cNvSpPr txBox="1"/>
+          <p:nvPr/>
+        </p:nvSpPr>
+        <p:spPr>
+          <a:xfrm>
+            <a:off x="6455664" y="4297680"/>
+            <a:ext cx="4773168" cy="1828800"/>
+          </a:xfrm>
+          <a:prstGeom prst="rect">
+            <a:avLst/>
+          </a:prstGeom>
+          <a:noFill/>
+        </p:spPr>
+        <p:txBody>
+          <a:bodyPr wrap="square" lIns="0" rIns="0" tIns="0" bIns="0">
+            <a:spAutoFit/>
+          </a:bodyPr>
+          <a:lstStyle/>
+          <a:p>
+            <a:pPr>
+              <a:defRPr sz="850" b="1">
+                <a:solidFill>
+                  <a:srgbClr val="38BDF8"/>
+                </a:solidFill>
+              </a:defRPr>
+            </a:pPr>
+            <a:r>
+              <a:t>PILLAR 04  |  ENGINEERING CAPABILITY</a:t>
+            </a:r>
+          </a:p>
+          <a:p>
+            <a:pPr>
+              <a:spcBef>
+                <a:spcPts val="300"/>
+              </a:spcBef>
               <a:spcAft>
-                <a:spcPts val="1200"/>
+                <a:spcPts val="600"/>
               </a:spcAft>
-              <a:defRPr sz="1600" b="1">
+              <a:defRPr sz="1300" b="1">
                 <a:solidFill>
                   <a:srgbClr val="FFFFFF"/>
                 </a:solidFill>
               </a:defRPr>
             </a:pPr>
             <a:r>
-              <a:t>QA &amp; Compliance (Audited Governance)</a:t>
-            </a:r>
-          </a:p>
-          <a:p>
-            <a:pPr>
-              <a:defRPr sz="1300">
-                <a:solidFill>
-                  <a:srgbClr val="C8D8F0"/>
-                </a:solidFill>
-              </a:defRPr>
-            </a:pPr>
-            <a:r>
-              <a:t>Comprehensive action logging and human-in-the-loop permission gates with complete state tracing.</a:t>
+              <a:t>Deterministic Swarm State Machine</a:t>
+            </a:r>
+          </a:p>
+          <a:p>
+            <a:pPr>
+              <a:defRPr sz="1000">
+                <a:solidFill>
+                  <a:srgbClr val="F1F5F9"/>
+                </a:solidFill>
+              </a:defRPr>
+            </a:pPr>
+            <a:r>
+              <a:t>Autonomous state engine managing agent goals, collaborative sessions, tools, operational memories, and reflection loops.</a:t>
             </a:r>
           </a:p>
         </p:txBody>
@@ -4584,7 +6049,7 @@
             <a:avLst/>
           </a:prstGeom>
           <a:solidFill>
-            <a:srgbClr val="0A0E1A"/>
+            <a:srgbClr val="0B0F17"/>
           </a:solidFill>
           <a:ln>
             <a:noFill/>
@@ -4620,17 +6085,19 @@
         </p:nvSpPr>
         <p:spPr>
           <a:xfrm>
-            <a:off x="0" y="0"/>
-            <a:ext cx="12191695" cy="54864"/>
+            <a:off x="731520" y="365760"/>
+            <a:ext cx="10728655" cy="18288"/>
           </a:xfrm>
           <a:prstGeom prst="rect">
             <a:avLst/>
           </a:prstGeom>
           <a:solidFill>
-            <a:srgbClr val="00D4FF"/>
+            <a:srgbClr val="38BDF8"/>
           </a:solidFill>
           <a:ln>
-            <a:noFill/>
+            <a:solidFill>
+              <a:srgbClr val="38BDF8"/>
+            </a:solidFill>
           </a:ln>
         </p:spPr>
         <p:style>
@@ -4663,8 +6130,8 @@
         </p:nvSpPr>
         <p:spPr>
           <a:xfrm>
-            <a:off x="731520" y="365760"/>
-            <a:ext cx="10698480" cy="1005840"/>
+            <a:off x="731520" y="438912"/>
+            <a:ext cx="8229600" cy="274320"/>
           </a:xfrm>
           <a:prstGeom prst="rect">
             <a:avLst/>
@@ -4672,35 +6139,20 @@
           <a:noFill/>
         </p:spPr>
         <p:txBody>
-          <a:bodyPr wrap="square">
+          <a:bodyPr wrap="square" lIns="0" rIns="0" tIns="0" bIns="0">
             <a:spAutoFit/>
           </a:bodyPr>
           <a:lstStyle/>
           <a:p>
             <a:pPr>
-              <a:spcAft>
-                <a:spcPts val="400"/>
-              </a:spcAft>
-              <a:defRPr sz="1150" b="1">
-                <a:solidFill>
-                  <a:srgbClr val="00D4FF"/>
-                </a:solidFill>
-              </a:defRPr>
-            </a:pPr>
-            <a:r>
-              <a:t>TERRAHIVE  |  TERRESTRIAL PLATFORM</a:t>
-            </a:r>
-          </a:p>
-          <a:p>
-            <a:pPr>
-              <a:defRPr sz="2500" b="1">
-                <a:solidFill>
-                  <a:srgbClr val="FFFFFF"/>
-                </a:solidFill>
-              </a:defRPr>
-            </a:pPr>
-            <a:r>
-              <a:t>Competitive Advantage: Terrestrial Platform vs. Legacy Systems</a:t>
+              <a:defRPr sz="950" b="1">
+                <a:solidFill>
+                  <a:srgbClr val="38BDF8"/>
+                </a:solidFill>
+              </a:defRPr>
+            </a:pPr>
+            <a:r>
+              <a:t>TERRESTRIAL PLATFORM  |  TERRAHIVE  |  FIELD USE CASES</a:t>
             </a:r>
           </a:p>
         </p:txBody>
@@ -4713,8 +6165,8 @@
         </p:nvSpPr>
         <p:spPr>
           <a:xfrm>
-            <a:off x="731520" y="6446520"/>
-            <a:ext cx="10698480" cy="320040"/>
+            <a:off x="731520" y="731520"/>
+            <a:ext cx="9601200" cy="777240"/>
           </a:xfrm>
           <a:prstGeom prst="rect">
             <a:avLst/>
@@ -4722,44 +6174,83 @@
           <a:noFill/>
         </p:spPr>
         <p:txBody>
-          <a:bodyPr wrap="none">
+          <a:bodyPr wrap="square" lIns="0" rIns="0" tIns="0" bIns="0">
             <a:spAutoFit/>
           </a:bodyPr>
           <a:lstStyle/>
           <a:p>
             <a:pPr>
-              <a:defRPr sz="1000">
+              <a:defRPr sz="1900" b="1">
+                <a:solidFill>
+                  <a:srgbClr val="FFFFFF"/>
+                </a:solidFill>
+              </a:defRPr>
+            </a:pPr>
+            <a:r>
+              <a:t>Operational Use Cases &amp; Field Impact</a:t>
+            </a:r>
+          </a:p>
+          <a:p>
+            <a:pPr>
+              <a:spcBef>
+                <a:spcPts val="300"/>
+              </a:spcBef>
+              <a:defRPr sz="1050">
                 <a:solidFill>
                   <a:srgbClr val="94A3B8"/>
                 </a:solidFill>
               </a:defRPr>
             </a:pPr>
             <a:r>
-              <a:t>TERRESTRIAL PLATFORM  |  TERRAHIVE CATALOGUE  |  CONFIDENTIAL - AUTHORISED SYSTEM INTEGRATORS ONLY</a:t>
-            </a:r>
-          </a:p>
-        </p:txBody>
-      </p:sp>
-      <p:sp>
-        <p:nvSpPr>
-          <p:cNvPr id="6" name="Rectangle 5"/>
+              <a:t>Actual documented use cases across Quality Assurance, Reduced Manpower, Efficiency, and Asset Productivity.</a:t>
+            </a:r>
+          </a:p>
+        </p:txBody>
+      </p:sp>
+      <p:pic>
+        <p:nvPicPr>
+          <p:cNvPr id="6" name="Picture 5" descr="tp_logo_white.png"/>
+          <p:cNvPicPr>
+            <a:picLocks noChangeAspect="1"/>
+          </p:cNvPicPr>
+          <p:nvPr/>
+        </p:nvPicPr>
+        <p:blipFill>
+          <a:blip r:embed="rId2"/>
+          <a:stretch>
+            <a:fillRect/>
+          </a:stretch>
+        </p:blipFill>
+        <p:spPr>
+          <a:xfrm>
+            <a:off x="10469880" y="411480"/>
+            <a:ext cx="987552" cy="384048"/>
+          </a:xfrm>
+          <a:prstGeom prst="rect">
+            <a:avLst/>
+          </a:prstGeom>
+        </p:spPr>
+      </p:pic>
+      <p:sp>
+        <p:nvSpPr>
+          <p:cNvPr id="7" name="Rounded Rectangle 6"/>
           <p:cNvSpPr/>
           <p:nvPr/>
         </p:nvSpPr>
         <p:spPr>
           <a:xfrm>
-            <a:off x="731520" y="1645920"/>
-            <a:ext cx="5212080" cy="502920"/>
-          </a:xfrm>
-          <a:prstGeom prst="rect">
+            <a:off x="731520" y="1691640"/>
+            <a:ext cx="5230368" cy="2194560"/>
+          </a:xfrm>
+          <a:prstGeom prst="roundRect">
             <a:avLst/>
           </a:prstGeom>
           <a:solidFill>
-            <a:srgbClr val="280F14"/>
+            <a:srgbClr val="131926"/>
           </a:solidFill>
-          <a:ln>
+          <a:ln w="12700">
             <a:solidFill>
-              <a:srgbClr val="FF5555"/>
+              <a:srgbClr val="28344B"/>
             </a:solidFill>
           </a:ln>
         </p:spPr>
@@ -4781,39 +6272,95 @@
           <a:bodyPr rtlCol="0" anchor="ctr"/>
           <a:lstStyle/>
           <a:p>
-            <a:pPr algn="ctr">
-              <a:defRPr sz="1250" b="1">
-                <a:solidFill>
-                  <a:srgbClr val="FF5555"/>
-                </a:solidFill>
-              </a:defRPr>
-            </a:pPr>
-            <a:r>
-              <a:t>TRADITIONAL LEGACY SCADA / SILOED SYSTEMS</a:t>
-            </a:r>
-          </a:p>
-        </p:txBody>
-      </p:sp>
-      <p:sp>
-        <p:nvSpPr>
-          <p:cNvPr id="7" name="Rectangle 6"/>
+            <a:pPr algn="ctr"/>
+          </a:p>
+        </p:txBody>
+      </p:sp>
+      <p:sp>
+        <p:nvSpPr>
+          <p:cNvPr id="8" name="TextBox 7"/>
+          <p:cNvSpPr txBox="1"/>
+          <p:nvPr/>
+        </p:nvSpPr>
+        <p:spPr>
+          <a:xfrm>
+            <a:off x="960120" y="1874520"/>
+            <a:ext cx="4773168" cy="1828800"/>
+          </a:xfrm>
+          <a:prstGeom prst="rect">
+            <a:avLst/>
+          </a:prstGeom>
+          <a:noFill/>
+        </p:spPr>
+        <p:txBody>
+          <a:bodyPr wrap="square" lIns="0" rIns="0" tIns="0" bIns="0">
+            <a:spAutoFit/>
+          </a:bodyPr>
+          <a:lstStyle/>
+          <a:p>
+            <a:pPr>
+              <a:defRPr sz="850" b="1">
+                <a:solidFill>
+                  <a:srgbClr val="34D399"/>
+                </a:solidFill>
+              </a:defRPr>
+            </a:pPr>
+            <a:r>
+              <a:t>CASE 01  |  REDUCED MANPOWER</a:t>
+            </a:r>
+          </a:p>
+          <a:p>
+            <a:pPr>
+              <a:spcBef>
+                <a:spcPts val="300"/>
+              </a:spcBef>
+              <a:spcAft>
+                <a:spcPts val="600"/>
+              </a:spcAft>
+              <a:defRPr sz="1300" b="1">
+                <a:solidFill>
+                  <a:srgbClr val="FFFFFF"/>
+                </a:solidFill>
+              </a:defRPr>
+            </a:pPr>
+            <a:r>
+              <a:t>Reduced Manpower (Decentralized Swarm Coordination)</a:t>
+            </a:r>
+          </a:p>
+          <a:p>
+            <a:pPr>
+              <a:defRPr sz="1000">
+                <a:solidFill>
+                  <a:srgbClr val="F1F5F9"/>
+                </a:solidFill>
+              </a:defRPr>
+            </a:pPr>
+            <a:r>
+              <a:t>Specialized agents for diagnostics, maintenance coordination, and dispatch optimization collaborate automatically.</a:t>
+            </a:r>
+          </a:p>
+        </p:txBody>
+      </p:sp>
+      <p:sp>
+        <p:nvSpPr>
+          <p:cNvPr id="9" name="Rounded Rectangle 8"/>
           <p:cNvSpPr/>
           <p:nvPr/>
         </p:nvSpPr>
         <p:spPr>
           <a:xfrm>
-            <a:off x="6217920" y="1645920"/>
-            <a:ext cx="5212080" cy="502920"/>
-          </a:xfrm>
-          <a:prstGeom prst="rect">
+            <a:off x="6227064" y="1691640"/>
+            <a:ext cx="5230368" cy="2194560"/>
+          </a:xfrm>
+          <a:prstGeom prst="roundRect">
             <a:avLst/>
           </a:prstGeom>
           <a:solidFill>
-            <a:srgbClr val="0A2D3C"/>
+            <a:srgbClr val="131926"/>
           </a:solidFill>
-          <a:ln>
+          <a:ln w="12700">
             <a:solidFill>
-              <a:srgbClr val="00D4FF"/>
+              <a:srgbClr val="28344B"/>
             </a:solidFill>
           </a:ln>
         </p:spPr>
@@ -4835,39 +6382,95 @@
           <a:bodyPr rtlCol="0" anchor="ctr"/>
           <a:lstStyle/>
           <a:p>
-            <a:pPr algn="ctr">
-              <a:defRPr sz="1250" b="1">
-                <a:solidFill>
-                  <a:srgbClr val="00D4FF"/>
-                </a:solidFill>
-              </a:defRPr>
-            </a:pPr>
-            <a:r>
-              <a:t>TERRAHIVE TERRESTRIAL PLATFORM ADVANTAGE</a:t>
-            </a:r>
-          </a:p>
-        </p:txBody>
-      </p:sp>
-      <p:sp>
-        <p:nvSpPr>
-          <p:cNvPr id="8" name="Rounded Rectangle 7"/>
+            <a:pPr algn="ctr"/>
+          </a:p>
+        </p:txBody>
+      </p:sp>
+      <p:sp>
+        <p:nvSpPr>
+          <p:cNvPr id="10" name="TextBox 9"/>
+          <p:cNvSpPr txBox="1"/>
+          <p:nvPr/>
+        </p:nvSpPr>
+        <p:spPr>
+          <a:xfrm>
+            <a:off x="6455664" y="1874520"/>
+            <a:ext cx="4773168" cy="1828800"/>
+          </a:xfrm>
+          <a:prstGeom prst="rect">
+            <a:avLst/>
+          </a:prstGeom>
+          <a:noFill/>
+        </p:spPr>
+        <p:txBody>
+          <a:bodyPr wrap="square" lIns="0" rIns="0" tIns="0" bIns="0">
+            <a:spAutoFit/>
+          </a:bodyPr>
+          <a:lstStyle/>
+          <a:p>
+            <a:pPr>
+              <a:defRPr sz="850" b="1">
+                <a:solidFill>
+                  <a:srgbClr val="34D399"/>
+                </a:solidFill>
+              </a:defRPr>
+            </a:pPr>
+            <a:r>
+              <a:t>CASE 02  |  EFFICIENCY</a:t>
+            </a:r>
+          </a:p>
+          <a:p>
+            <a:pPr>
+              <a:spcBef>
+                <a:spcPts val="300"/>
+              </a:spcBef>
+              <a:spcAft>
+                <a:spcPts val="600"/>
+              </a:spcAft>
+              <a:defRPr sz="1300" b="1">
+                <a:solidFill>
+                  <a:srgbClr val="FFFFFF"/>
+                </a:solidFill>
+              </a:defRPr>
+            </a:pPr>
+            <a:r>
+              <a:t>Efficiency (Dynamic Consensus Negotiation)</a:t>
+            </a:r>
+          </a:p>
+          <a:p>
+            <a:pPr>
+              <a:defRPr sz="1000">
+                <a:solidFill>
+                  <a:srgbClr val="F1F5F9"/>
+                </a:solidFill>
+              </a:defRPr>
+            </a:pPr>
+            <a:r>
+              <a:t>AI-driven cross-departmental negotiation resolves trade-offs between production throughput and power tariffs.</a:t>
+            </a:r>
+          </a:p>
+        </p:txBody>
+      </p:sp>
+      <p:sp>
+        <p:nvSpPr>
+          <p:cNvPr id="11" name="Rounded Rectangle 10"/>
           <p:cNvSpPr/>
           <p:nvPr/>
         </p:nvSpPr>
         <p:spPr>
           <a:xfrm>
-            <a:off x="731520" y="2240280"/>
-            <a:ext cx="5212080" cy="960120"/>
+            <a:off x="731520" y="4114800"/>
+            <a:ext cx="5230368" cy="2194560"/>
           </a:xfrm>
           <a:prstGeom prst="roundRect">
             <a:avLst/>
           </a:prstGeom>
           <a:solidFill>
-            <a:srgbClr val="0F172A"/>
+            <a:srgbClr val="131926"/>
           </a:solidFill>
-          <a:ln>
+          <a:ln w="12700">
             <a:solidFill>
-              <a:srgbClr val="1E293B"/>
+              <a:srgbClr val="28344B"/>
             </a:solidFill>
           </a:ln>
         </p:spPr>
@@ -4886,42 +6489,98 @@
           </a:fontRef>
         </p:style>
         <p:txBody>
-          <a:bodyPr rtlCol="0" anchor="ctr" wrap="square"/>
-          <a:lstStyle/>
-          <a:p>
-            <a:pPr algn="ctr">
-              <a:defRPr sz="1200">
-                <a:solidFill>
-                  <a:srgbClr val="94A3B8"/>
-                </a:solidFill>
-              </a:defRPr>
-            </a:pPr>
-            <a:r>
-              <a:t>Maintenance, operations, and procurement teams communicate via emails, spreadsheets, and delayed meetings.</a:t>
-            </a:r>
-          </a:p>
-        </p:txBody>
-      </p:sp>
-      <p:sp>
-        <p:nvSpPr>
-          <p:cNvPr id="9" name="Rounded Rectangle 8"/>
+          <a:bodyPr rtlCol="0" anchor="ctr"/>
+          <a:lstStyle/>
+          <a:p>
+            <a:pPr algn="ctr"/>
+          </a:p>
+        </p:txBody>
+      </p:sp>
+      <p:sp>
+        <p:nvSpPr>
+          <p:cNvPr id="12" name="TextBox 11"/>
+          <p:cNvSpPr txBox="1"/>
+          <p:nvPr/>
+        </p:nvSpPr>
+        <p:spPr>
+          <a:xfrm>
+            <a:off x="960120" y="4297680"/>
+            <a:ext cx="4773168" cy="1828800"/>
+          </a:xfrm>
+          <a:prstGeom prst="rect">
+            <a:avLst/>
+          </a:prstGeom>
+          <a:noFill/>
+        </p:spPr>
+        <p:txBody>
+          <a:bodyPr wrap="square" lIns="0" rIns="0" tIns="0" bIns="0">
+            <a:spAutoFit/>
+          </a:bodyPr>
+          <a:lstStyle/>
+          <a:p>
+            <a:pPr>
+              <a:defRPr sz="850" b="1">
+                <a:solidFill>
+                  <a:srgbClr val="34D399"/>
+                </a:solidFill>
+              </a:defRPr>
+            </a:pPr>
+            <a:r>
+              <a:t>CASE 03  |  QA &amp; COMPLIANCE</a:t>
+            </a:r>
+          </a:p>
+          <a:p>
+            <a:pPr>
+              <a:spcBef>
+                <a:spcPts val="300"/>
+              </a:spcBef>
+              <a:spcAft>
+                <a:spcPts val="600"/>
+              </a:spcAft>
+              <a:defRPr sz="1300" b="1">
+                <a:solidFill>
+                  <a:srgbClr val="FFFFFF"/>
+                </a:solidFill>
+              </a:defRPr>
+            </a:pPr>
+            <a:r>
+              <a:t>QA &amp; Compliance (Audited Governance)</a:t>
+            </a:r>
+          </a:p>
+          <a:p>
+            <a:pPr>
+              <a:defRPr sz="1000">
+                <a:solidFill>
+                  <a:srgbClr val="F1F5F9"/>
+                </a:solidFill>
+              </a:defRPr>
+            </a:pPr>
+            <a:r>
+              <a:t>Comprehensive action logging and human-in-the-loop permission gates with complete state tracing.</a:t>
+            </a:r>
+          </a:p>
+        </p:txBody>
+      </p:sp>
+      <p:sp>
+        <p:nvSpPr>
+          <p:cNvPr id="13" name="Rounded Rectangle 12"/>
           <p:cNvSpPr/>
           <p:nvPr/>
         </p:nvSpPr>
         <p:spPr>
           <a:xfrm>
-            <a:off x="6217920" y="2240280"/>
-            <a:ext cx="5212080" cy="960120"/>
+            <a:off x="6227064" y="4114800"/>
+            <a:ext cx="5230368" cy="2194560"/>
           </a:xfrm>
           <a:prstGeom prst="roundRect">
             <a:avLst/>
           </a:prstGeom>
           <a:solidFill>
-            <a:srgbClr val="141E37"/>
+            <a:srgbClr val="131926"/>
           </a:solidFill>
-          <a:ln>
+          <a:ln w="12700">
             <a:solidFill>
-              <a:srgbClr val="00D4FF"/>
+              <a:srgbClr val="28344B"/>
             </a:solidFill>
           </a:ln>
         </p:spPr>
@@ -4940,342 +6599,74 @@
           </a:fontRef>
         </p:style>
         <p:txBody>
-          <a:bodyPr rtlCol="0" anchor="ctr" wrap="square"/>
-          <a:lstStyle/>
-          <a:p>
-            <a:pPr algn="ctr">
-              <a:defRPr sz="1250" b="1">
+          <a:bodyPr rtlCol="0" anchor="ctr"/>
+          <a:lstStyle/>
+          <a:p>
+            <a:pPr algn="ctr"/>
+          </a:p>
+        </p:txBody>
+      </p:sp>
+      <p:sp>
+        <p:nvSpPr>
+          <p:cNvPr id="14" name="TextBox 13"/>
+          <p:cNvSpPr txBox="1"/>
+          <p:nvPr/>
+        </p:nvSpPr>
+        <p:spPr>
+          <a:xfrm>
+            <a:off x="6455664" y="4297680"/>
+            <a:ext cx="4773168" cy="1828800"/>
+          </a:xfrm>
+          <a:prstGeom prst="rect">
+            <a:avLst/>
+          </a:prstGeom>
+          <a:noFill/>
+        </p:spPr>
+        <p:txBody>
+          <a:bodyPr wrap="square" lIns="0" rIns="0" tIns="0" bIns="0">
+            <a:spAutoFit/>
+          </a:bodyPr>
+          <a:lstStyle/>
+          <a:p>
+            <a:pPr>
+              <a:defRPr sz="850" b="1">
+                <a:solidFill>
+                  <a:srgbClr val="34D399"/>
+                </a:solidFill>
+              </a:defRPr>
+            </a:pPr>
+            <a:r>
+              <a:t>CASE 04  |  PRODUCTIVITY</a:t>
+            </a:r>
+          </a:p>
+          <a:p>
+            <a:pPr>
+              <a:spcBef>
+                <a:spcPts val="300"/>
+              </a:spcBef>
+              <a:spcAft>
+                <a:spcPts val="600"/>
+              </a:spcAft>
+              <a:defRPr sz="1300" b="1">
                 <a:solidFill>
                   <a:srgbClr val="FFFFFF"/>
                 </a:solidFill>
               </a:defRPr>
             </a:pPr>
             <a:r>
-              <a:t>Autonomous agents negotiate constraints instantly across departments in real-time consensus rounds.</a:t>
-            </a:r>
-          </a:p>
-        </p:txBody>
-      </p:sp>
-      <p:sp>
-        <p:nvSpPr>
-          <p:cNvPr id="10" name="Rounded Rectangle 9"/>
-          <p:cNvSpPr/>
-          <p:nvPr/>
-        </p:nvSpPr>
-        <p:spPr>
-          <a:xfrm>
-            <a:off x="731520" y="3291840"/>
-            <a:ext cx="5212080" cy="960120"/>
-          </a:xfrm>
-          <a:prstGeom prst="roundRect">
-            <a:avLst/>
-          </a:prstGeom>
-          <a:solidFill>
-            <a:srgbClr val="0F172A"/>
-          </a:solidFill>
-          <a:ln>
-            <a:solidFill>
-              <a:srgbClr val="1E293B"/>
-            </a:solidFill>
-          </a:ln>
-        </p:spPr>
-        <p:style>
-          <a:lnRef idx="1">
-            <a:schemeClr val="accent1"/>
-          </a:lnRef>
-          <a:fillRef idx="3">
-            <a:schemeClr val="accent1"/>
-          </a:fillRef>
-          <a:effectRef idx="2">
-            <a:schemeClr val="accent1"/>
-          </a:effectRef>
-          <a:fontRef idx="minor">
-            <a:schemeClr val="lt1"/>
-          </a:fontRef>
-        </p:style>
-        <p:txBody>
-          <a:bodyPr rtlCol="0" anchor="ctr" wrap="square"/>
-          <a:lstStyle/>
-          <a:p>
-            <a:pPr algn="ctr">
-              <a:defRPr sz="1200">
-                <a:solidFill>
-                  <a:srgbClr val="94A3B8"/>
-                </a:solidFill>
-              </a:defRPr>
-            </a:pPr>
-            <a:r>
-              <a:t>Static maintenance schedules that either over-service assets or miss sudden accelerated wear.</a:t>
-            </a:r>
-          </a:p>
-        </p:txBody>
-      </p:sp>
-      <p:sp>
-        <p:nvSpPr>
-          <p:cNvPr id="11" name="Rounded Rectangle 10"/>
-          <p:cNvSpPr/>
-          <p:nvPr/>
-        </p:nvSpPr>
-        <p:spPr>
-          <a:xfrm>
-            <a:off x="6217920" y="3291840"/>
-            <a:ext cx="5212080" cy="960120"/>
-          </a:xfrm>
-          <a:prstGeom prst="roundRect">
-            <a:avLst/>
-          </a:prstGeom>
-          <a:solidFill>
-            <a:srgbClr val="141E37"/>
-          </a:solidFill>
-          <a:ln>
-            <a:solidFill>
-              <a:srgbClr val="00D4FF"/>
-            </a:solidFill>
-          </a:ln>
-        </p:spPr>
-        <p:style>
-          <a:lnRef idx="1">
-            <a:schemeClr val="accent1"/>
-          </a:lnRef>
-          <a:fillRef idx="3">
-            <a:schemeClr val="accent1"/>
-          </a:fillRef>
-          <a:effectRef idx="2">
-            <a:schemeClr val="accent1"/>
-          </a:effectRef>
-          <a:fontRef idx="minor">
-            <a:schemeClr val="lt1"/>
-          </a:fontRef>
-        </p:style>
-        <p:txBody>
-          <a:bodyPr rtlCol="0" anchor="ctr" wrap="square"/>
-          <a:lstStyle/>
-          <a:p>
-            <a:pPr algn="ctr">
-              <a:defRPr sz="1250" b="1">
-                <a:solidFill>
-                  <a:srgbClr val="FFFFFF"/>
-                </a:solidFill>
-              </a:defRPr>
-            </a:pPr>
-            <a:r>
-              <a:t>Dynamic dispatch balancing asset wear, fuel costs, market prices, and inventory availability.</a:t>
-            </a:r>
-          </a:p>
-        </p:txBody>
-      </p:sp>
-      <p:sp>
-        <p:nvSpPr>
-          <p:cNvPr id="12" name="Rounded Rectangle 11"/>
-          <p:cNvSpPr/>
-          <p:nvPr/>
-        </p:nvSpPr>
-        <p:spPr>
-          <a:xfrm>
-            <a:off x="731520" y="4343400"/>
-            <a:ext cx="5212080" cy="960120"/>
-          </a:xfrm>
-          <a:prstGeom prst="roundRect">
-            <a:avLst/>
-          </a:prstGeom>
-          <a:solidFill>
-            <a:srgbClr val="0F172A"/>
-          </a:solidFill>
-          <a:ln>
-            <a:solidFill>
-              <a:srgbClr val="1E293B"/>
-            </a:solidFill>
-          </a:ln>
-        </p:spPr>
-        <p:style>
-          <a:lnRef idx="1">
-            <a:schemeClr val="accent1"/>
-          </a:lnRef>
-          <a:fillRef idx="3">
-            <a:schemeClr val="accent1"/>
-          </a:fillRef>
-          <a:effectRef idx="2">
-            <a:schemeClr val="accent1"/>
-          </a:effectRef>
-          <a:fontRef idx="minor">
-            <a:schemeClr val="lt1"/>
-          </a:fontRef>
-        </p:style>
-        <p:txBody>
-          <a:bodyPr rtlCol="0" anchor="ctr" wrap="square"/>
-          <a:lstStyle/>
-          <a:p>
-            <a:pPr algn="ctr">
-              <a:defRPr sz="1200">
-                <a:solidFill>
-                  <a:srgbClr val="94A3B8"/>
-                </a:solidFill>
-              </a:defRPr>
-            </a:pPr>
-            <a:r>
-              <a:t>Black-box decisions with no traceability or compliance record.</a:t>
-            </a:r>
-          </a:p>
-        </p:txBody>
-      </p:sp>
-      <p:sp>
-        <p:nvSpPr>
-          <p:cNvPr id="13" name="Rounded Rectangle 12"/>
-          <p:cNvSpPr/>
-          <p:nvPr/>
-        </p:nvSpPr>
-        <p:spPr>
-          <a:xfrm>
-            <a:off x="6217920" y="4343400"/>
-            <a:ext cx="5212080" cy="960120"/>
-          </a:xfrm>
-          <a:prstGeom prst="roundRect">
-            <a:avLst/>
-          </a:prstGeom>
-          <a:solidFill>
-            <a:srgbClr val="141E37"/>
-          </a:solidFill>
-          <a:ln>
-            <a:solidFill>
-              <a:srgbClr val="00D4FF"/>
-            </a:solidFill>
-          </a:ln>
-        </p:spPr>
-        <p:style>
-          <a:lnRef idx="1">
-            <a:schemeClr val="accent1"/>
-          </a:lnRef>
-          <a:fillRef idx="3">
-            <a:schemeClr val="accent1"/>
-          </a:fillRef>
-          <a:effectRef idx="2">
-            <a:schemeClr val="accent1"/>
-          </a:effectRef>
-          <a:fontRef idx="minor">
-            <a:schemeClr val="lt1"/>
-          </a:fontRef>
-        </p:style>
-        <p:txBody>
-          <a:bodyPr rtlCol="0" anchor="ctr" wrap="square"/>
-          <a:lstStyle/>
-          <a:p>
-            <a:pPr algn="ctr">
-              <a:defRPr sz="1250" b="1">
-                <a:solidFill>
-                  <a:srgbClr val="FFFFFF"/>
-                </a:solidFill>
-              </a:defRPr>
-            </a:pPr>
-            <a:r>
-              <a:t>Audited cryptographic consensus log with configurable human-in-the-loop authorization gates.</a:t>
-            </a:r>
-          </a:p>
-        </p:txBody>
-      </p:sp>
-      <p:sp>
-        <p:nvSpPr>
-          <p:cNvPr id="14" name="Rounded Rectangle 13"/>
-          <p:cNvSpPr/>
-          <p:nvPr/>
-        </p:nvSpPr>
-        <p:spPr>
-          <a:xfrm>
-            <a:off x="731520" y="5394960"/>
-            <a:ext cx="5212080" cy="960120"/>
-          </a:xfrm>
-          <a:prstGeom prst="roundRect">
-            <a:avLst/>
-          </a:prstGeom>
-          <a:solidFill>
-            <a:srgbClr val="0F172A"/>
-          </a:solidFill>
-          <a:ln>
-            <a:solidFill>
-              <a:srgbClr val="1E293B"/>
-            </a:solidFill>
-          </a:ln>
-        </p:spPr>
-        <p:style>
-          <a:lnRef idx="1">
-            <a:schemeClr val="accent1"/>
-          </a:lnRef>
-          <a:fillRef idx="3">
-            <a:schemeClr val="accent1"/>
-          </a:fillRef>
-          <a:effectRef idx="2">
-            <a:schemeClr val="accent1"/>
-          </a:effectRef>
-          <a:fontRef idx="minor">
-            <a:schemeClr val="lt1"/>
-          </a:fontRef>
-        </p:style>
-        <p:txBody>
-          <a:bodyPr rtlCol="0" anchor="ctr" wrap="square"/>
-          <a:lstStyle/>
-          <a:p>
-            <a:pPr algn="ctr">
-              <a:defRPr sz="1200">
-                <a:solidFill>
-                  <a:srgbClr val="94A3B8"/>
-                </a:solidFill>
-              </a:defRPr>
-            </a:pPr>
-            <a:r>
-              <a:t>Static high/low threshold alarms trigger only after physical process degradation has occurred.</a:t>
-            </a:r>
-          </a:p>
-        </p:txBody>
-      </p:sp>
-      <p:sp>
-        <p:nvSpPr>
-          <p:cNvPr id="15" name="Rounded Rectangle 14"/>
-          <p:cNvSpPr/>
-          <p:nvPr/>
-        </p:nvSpPr>
-        <p:spPr>
-          <a:xfrm>
-            <a:off x="6217920" y="5394960"/>
-            <a:ext cx="5212080" cy="960120"/>
-          </a:xfrm>
-          <a:prstGeom prst="roundRect">
-            <a:avLst/>
-          </a:prstGeom>
-          <a:solidFill>
-            <a:srgbClr val="141E37"/>
-          </a:solidFill>
-          <a:ln>
-            <a:solidFill>
-              <a:srgbClr val="00D4FF"/>
-            </a:solidFill>
-          </a:ln>
-        </p:spPr>
-        <p:style>
-          <a:lnRef idx="1">
-            <a:schemeClr val="accent1"/>
-          </a:lnRef>
-          <a:fillRef idx="3">
-            <a:schemeClr val="accent1"/>
-          </a:fillRef>
-          <a:effectRef idx="2">
-            <a:schemeClr val="accent1"/>
-          </a:effectRef>
-          <a:fontRef idx="minor">
-            <a:schemeClr val="lt1"/>
-          </a:fontRef>
-        </p:style>
-        <p:txBody>
-          <a:bodyPr rtlCol="0" anchor="ctr" wrap="square"/>
-          <a:lstStyle/>
-          <a:p>
-            <a:pPr algn="ctr">
-              <a:defRPr sz="1250" b="1">
-                <a:solidFill>
-                  <a:srgbClr val="FFFFFF"/>
-                </a:solidFill>
-              </a:defRPr>
-            </a:pPr>
-            <a:r>
-              <a:t>TerraHive physics-informed models forecast multi-variable trajectories up to 72 hours in advance.</a:t>
+              <a:t>Productivity (Automated ERP Spare Parts Cycle)</a:t>
+            </a:r>
+          </a:p>
+          <a:p>
+            <a:pPr>
+              <a:defRPr sz="1000">
+                <a:solidFill>
+                  <a:srgbClr val="F1F5F9"/>
+                </a:solidFill>
+              </a:defRPr>
+            </a:pPr>
+            <a:r>
+              <a:t>When asset wear is detected, inventory agents check ERP stock, book procurement, and reserve maintenance downtime.</a:t>
             </a:r>
           </a:p>
         </p:txBody>
@@ -5313,7 +6704,7 @@
             <a:avLst/>
           </a:prstGeom>
           <a:solidFill>
-            <a:srgbClr val="0A0E1A"/>
+            <a:srgbClr val="0B0F17"/>
           </a:solidFill>
           <a:ln>
             <a:noFill/>
@@ -5349,17 +6740,19 @@
         </p:nvSpPr>
         <p:spPr>
           <a:xfrm>
-            <a:off x="0" y="0"/>
-            <a:ext cx="12191695" cy="54864"/>
+            <a:off x="731520" y="365760"/>
+            <a:ext cx="10728655" cy="18288"/>
           </a:xfrm>
           <a:prstGeom prst="rect">
             <a:avLst/>
           </a:prstGeom>
           <a:solidFill>
-            <a:srgbClr val="00D4FF"/>
+            <a:srgbClr val="38BDF8"/>
           </a:solidFill>
           <a:ln>
-            <a:noFill/>
+            <a:solidFill>
+              <a:srgbClr val="38BDF8"/>
+            </a:solidFill>
           </a:ln>
         </p:spPr>
         <p:style>
@@ -5392,8 +6785,8 @@
         </p:nvSpPr>
         <p:spPr>
           <a:xfrm>
-            <a:off x="731520" y="365760"/>
-            <a:ext cx="10698480" cy="1005840"/>
+            <a:off x="731520" y="438912"/>
+            <a:ext cx="8229600" cy="274320"/>
           </a:xfrm>
           <a:prstGeom prst="rect">
             <a:avLst/>
@@ -5401,35 +6794,20 @@
           <a:noFill/>
         </p:spPr>
         <p:txBody>
-          <a:bodyPr wrap="square">
+          <a:bodyPr wrap="square" lIns="0" rIns="0" tIns="0" bIns="0">
             <a:spAutoFit/>
           </a:bodyPr>
           <a:lstStyle/>
           <a:p>
             <a:pPr>
-              <a:spcAft>
-                <a:spcPts val="400"/>
-              </a:spcAft>
-              <a:defRPr sz="1150" b="1">
-                <a:solidFill>
-                  <a:srgbClr val="00D4FF"/>
-                </a:solidFill>
-              </a:defRPr>
-            </a:pPr>
-            <a:r>
-              <a:t>TERRAHIVE  |  TERRESTRIAL PLATFORM</a:t>
-            </a:r>
-          </a:p>
-          <a:p>
-            <a:pPr>
-              <a:defRPr sz="2500" b="1">
-                <a:solidFill>
-                  <a:srgbClr val="FFFFFF"/>
-                </a:solidFill>
-              </a:defRPr>
-            </a:pPr>
-            <a:r>
-              <a:t>End-to-End System Architecture &amp; Real-Time Pipeline</a:t>
+              <a:defRPr sz="950" b="1">
+                <a:solidFill>
+                  <a:srgbClr val="38BDF8"/>
+                </a:solidFill>
+              </a:defRPr>
+            </a:pPr>
+            <a:r>
+              <a:t>TERRESTRIAL PLATFORM  |  TERRAHIVE  |  ARCHITECTURAL CONTRAST</a:t>
             </a:r>
           </a:p>
         </p:txBody>
@@ -5442,8 +6820,8 @@
         </p:nvSpPr>
         <p:spPr>
           <a:xfrm>
-            <a:off x="731520" y="6446520"/>
-            <a:ext cx="10698480" cy="320040"/>
+            <a:off x="731520" y="731520"/>
+            <a:ext cx="9601200" cy="777240"/>
           </a:xfrm>
           <a:prstGeom prst="rect">
             <a:avLst/>
@@ -5451,44 +6829,83 @@
           <a:noFill/>
         </p:spPr>
         <p:txBody>
-          <a:bodyPr wrap="none">
+          <a:bodyPr wrap="square" lIns="0" rIns="0" tIns="0" bIns="0">
             <a:spAutoFit/>
           </a:bodyPr>
           <a:lstStyle/>
           <a:p>
             <a:pPr>
-              <a:defRPr sz="1000">
+              <a:defRPr sz="1900" b="1">
+                <a:solidFill>
+                  <a:srgbClr val="FFFFFF"/>
+                </a:solidFill>
+              </a:defRPr>
+            </a:pPr>
+            <a:r>
+              <a:t>Comparison with Traditional SCADA / Legacy Systems</a:t>
+            </a:r>
+          </a:p>
+          <a:p>
+            <a:pPr>
+              <a:spcBef>
+                <a:spcPts val="300"/>
+              </a:spcBef>
+              <a:defRPr sz="1050">
                 <a:solidFill>
                   <a:srgbClr val="94A3B8"/>
                 </a:solidFill>
               </a:defRPr>
             </a:pPr>
             <a:r>
-              <a:t>TERRESTRIAL PLATFORM  |  TERRAHIVE CATALOGUE  |  CONFIDENTIAL - AUTHORISED SYSTEM INTEGRATORS ONLY</a:t>
-            </a:r>
-          </a:p>
-        </p:txBody>
-      </p:sp>
-      <p:sp>
-        <p:nvSpPr>
-          <p:cNvPr id="6" name="Rounded Rectangle 5"/>
+              <a:t>Point-by-point contrast demonstrating the technological shift from legacy industrial automation to the Terrestrial Platform.</a:t>
+            </a:r>
+          </a:p>
+        </p:txBody>
+      </p:sp>
+      <p:pic>
+        <p:nvPicPr>
+          <p:cNvPr id="6" name="Picture 5" descr="tp_logo_white.png"/>
+          <p:cNvPicPr>
+            <a:picLocks noChangeAspect="1"/>
+          </p:cNvPicPr>
+          <p:nvPr/>
+        </p:nvPicPr>
+        <p:blipFill>
+          <a:blip r:embed="rId2"/>
+          <a:stretch>
+            <a:fillRect/>
+          </a:stretch>
+        </p:blipFill>
+        <p:spPr>
+          <a:xfrm>
+            <a:off x="10469880" y="411480"/>
+            <a:ext cx="987552" cy="384048"/>
+          </a:xfrm>
+          <a:prstGeom prst="rect">
+            <a:avLst/>
+          </a:prstGeom>
+        </p:spPr>
+      </p:pic>
+      <p:sp>
+        <p:nvSpPr>
+          <p:cNvPr id="7" name="Rounded Rectangle 6"/>
           <p:cNvSpPr/>
           <p:nvPr/>
         </p:nvSpPr>
         <p:spPr>
           <a:xfrm>
-            <a:off x="731520" y="1645920"/>
-            <a:ext cx="2523744" cy="4389120"/>
+            <a:off x="731520" y="1691640"/>
+            <a:ext cx="5230368" cy="502920"/>
           </a:xfrm>
           <a:prstGeom prst="roundRect">
             <a:avLst/>
           </a:prstGeom>
           <a:solidFill>
-            <a:srgbClr val="0F172A"/>
+            <a:srgbClr val="1C1216"/>
           </a:solidFill>
-          <a:ln>
+          <a:ln w="12700">
             <a:solidFill>
-              <a:srgbClr val="1E293B"/>
+              <a:srgbClr val="501923"/>
             </a:solidFill>
           </a:ln>
         </p:spPr>
@@ -5507,72 +6924,68 @@
           </a:fontRef>
         </p:style>
         <p:txBody>
-          <a:bodyPr rtlCol="0" anchor="ctr" wrap="square"/>
-          <a:lstStyle/>
-          <a:p>
-            <a:pPr algn="ctr">
-              <a:spcAft>
-                <a:spcPts val="800"/>
-              </a:spcAft>
+          <a:bodyPr rtlCol="0" anchor="ctr"/>
+          <a:lstStyle/>
+          <a:p>
+            <a:pPr algn="ctr"/>
+          </a:p>
+        </p:txBody>
+      </p:sp>
+      <p:sp>
+        <p:nvSpPr>
+          <p:cNvPr id="8" name="TextBox 7"/>
+          <p:cNvSpPr txBox="1"/>
+          <p:nvPr/>
+        </p:nvSpPr>
+        <p:spPr>
+          <a:xfrm>
+            <a:off x="868680" y="1783080"/>
+            <a:ext cx="4937760" cy="320040"/>
+          </a:xfrm>
+          <a:prstGeom prst="rect">
+            <a:avLst/>
+          </a:prstGeom>
+          <a:noFill/>
+        </p:spPr>
+        <p:txBody>
+          <a:bodyPr wrap="none">
+            <a:spAutoFit/>
+          </a:bodyPr>
+          <a:lstStyle/>
+          <a:p>
+            <a:pPr>
               <a:defRPr sz="1100" b="1">
                 <a:solidFill>
-                  <a:srgbClr val="00D4FF"/>
-                </a:solidFill>
-              </a:defRPr>
-            </a:pPr>
-            <a:r>
-              <a:t>LAYER 01</a:t>
-            </a:r>
-          </a:p>
-          <a:p>
-            <a:pPr>
-              <a:spcAft>
-                <a:spcPts val="1200"/>
-              </a:spcAft>
-              <a:defRPr sz="1550" b="1">
-                <a:solidFill>
-                  <a:srgbClr val="FFFFFF"/>
-                </a:solidFill>
-              </a:defRPr>
-            </a:pPr>
-            <a:r>
-              <a:t>Distributed Agent Ingestion</a:t>
-            </a:r>
-          </a:p>
-          <a:p>
-            <a:pPr>
-              <a:defRPr sz="1250">
-                <a:solidFill>
-                  <a:srgbClr val="C8D8F0"/>
-                </a:solidFill>
-              </a:defRPr>
-            </a:pPr>
-            <a:r>
-              <a:t>High-throughput ingestion connecting autonomous departmental agent streams, ERP transactions, operational event queues, and SCADA state tags.</a:t>
-            </a:r>
-          </a:p>
-        </p:txBody>
-      </p:sp>
-      <p:sp>
-        <p:nvSpPr>
-          <p:cNvPr id="7" name="Rounded Rectangle 6"/>
+                  <a:srgbClr val="EF4444"/>
+                </a:solidFill>
+              </a:defRPr>
+            </a:pPr>
+            <a:r>
+              <a:t>TRADITIONAL LEGACY SYSTEMS / SILOED SCADA</a:t>
+            </a:r>
+          </a:p>
+        </p:txBody>
+      </p:sp>
+      <p:sp>
+        <p:nvSpPr>
+          <p:cNvPr id="9" name="Rounded Rectangle 8"/>
           <p:cNvSpPr/>
           <p:nvPr/>
         </p:nvSpPr>
         <p:spPr>
           <a:xfrm>
-            <a:off x="3456432" y="1645920"/>
-            <a:ext cx="2523744" cy="4389120"/>
+            <a:off x="6227064" y="1691640"/>
+            <a:ext cx="5230368" cy="502920"/>
           </a:xfrm>
           <a:prstGeom prst="roundRect">
             <a:avLst/>
           </a:prstGeom>
           <a:solidFill>
-            <a:srgbClr val="0F172A"/>
+            <a:srgbClr val="0F1C26"/>
           </a:solidFill>
-          <a:ln>
+          <a:ln w="12700">
             <a:solidFill>
-              <a:srgbClr val="1E293B"/>
+              <a:srgbClr val="194B5F"/>
             </a:solidFill>
           </a:ln>
         </p:spPr>
@@ -5591,72 +7004,68 @@
           </a:fontRef>
         </p:style>
         <p:txBody>
-          <a:bodyPr rtlCol="0" anchor="ctr" wrap="square"/>
-          <a:lstStyle/>
-          <a:p>
-            <a:pPr algn="ctr">
-              <a:spcAft>
-                <a:spcPts val="800"/>
-              </a:spcAft>
+          <a:bodyPr rtlCol="0" anchor="ctr"/>
+          <a:lstStyle/>
+          <a:p>
+            <a:pPr algn="ctr"/>
+          </a:p>
+        </p:txBody>
+      </p:sp>
+      <p:sp>
+        <p:nvSpPr>
+          <p:cNvPr id="10" name="TextBox 9"/>
+          <p:cNvSpPr txBox="1"/>
+          <p:nvPr/>
+        </p:nvSpPr>
+        <p:spPr>
+          <a:xfrm>
+            <a:off x="6364224" y="1783080"/>
+            <a:ext cx="4937760" cy="320040"/>
+          </a:xfrm>
+          <a:prstGeom prst="rect">
+            <a:avLst/>
+          </a:prstGeom>
+          <a:noFill/>
+        </p:spPr>
+        <p:txBody>
+          <a:bodyPr wrap="none">
+            <a:spAutoFit/>
+          </a:bodyPr>
+          <a:lstStyle/>
+          <a:p>
+            <a:pPr>
               <a:defRPr sz="1100" b="1">
                 <a:solidFill>
-                  <a:srgbClr val="00D4FF"/>
-                </a:solidFill>
-              </a:defRPr>
-            </a:pPr>
-            <a:r>
-              <a:t>LAYER 02</a:t>
-            </a:r>
-          </a:p>
-          <a:p>
-            <a:pPr>
-              <a:spcAft>
-                <a:spcPts val="1200"/>
-              </a:spcAft>
-              <a:defRPr sz="1550" b="1">
-                <a:solidFill>
-                  <a:srgbClr val="FFFFFF"/>
-                </a:solidFill>
-              </a:defRPr>
-            </a:pPr>
-            <a:r>
-              <a:t>Swarm State Convergence Bus</a:t>
-            </a:r>
-          </a:p>
-          <a:p>
-            <a:pPr>
-              <a:defRPr sz="1250">
-                <a:solidFill>
-                  <a:srgbClr val="C8D8F0"/>
-                </a:solidFill>
-              </a:defRPr>
-            </a:pPr>
-            <a:r>
-              <a:t>Low-latency consensus broadcast fabric, distributed memory synchronization, and deterministic state-machine transaction sequencing.</a:t>
-            </a:r>
-          </a:p>
-        </p:txBody>
-      </p:sp>
-      <p:sp>
-        <p:nvSpPr>
-          <p:cNvPr id="8" name="Rounded Rectangle 7"/>
+                  <a:srgbClr val="38BDF8"/>
+                </a:solidFill>
+              </a:defRPr>
+            </a:pPr>
+            <a:r>
+              <a:t>TERRAHIVE TERRESTRIAL PLATFORM ADVANTAGE</a:t>
+            </a:r>
+          </a:p>
+        </p:txBody>
+      </p:sp>
+      <p:sp>
+        <p:nvSpPr>
+          <p:cNvPr id="11" name="Rounded Rectangle 10"/>
           <p:cNvSpPr/>
           <p:nvPr/>
         </p:nvSpPr>
         <p:spPr>
           <a:xfrm>
-            <a:off x="6181344" y="1645920"/>
-            <a:ext cx="2523744" cy="4389120"/>
+            <a:off x="731520" y="2286000"/>
+            <a:ext cx="5230368" cy="1298448"/>
           </a:xfrm>
           <a:prstGeom prst="roundRect">
             <a:avLst/>
           </a:prstGeom>
           <a:solidFill>
-            <a:srgbClr val="0F172A"/>
+            <a:srgbClr val="1C1216"/>
           </a:solidFill>
-          <a:ln>
+          <a:ln w="12700">
             <a:solidFill>
-              <a:srgbClr val="1E293B"/>
+              <a:srgbClr val="501923"/>
             </a:solidFill>
           </a:ln>
         </p:spPr>
@@ -5675,72 +7084,68 @@
           </a:fontRef>
         </p:style>
         <p:txBody>
-          <a:bodyPr rtlCol="0" anchor="ctr" wrap="square"/>
-          <a:lstStyle/>
-          <a:p>
-            <a:pPr algn="ctr">
-              <a:spcAft>
-                <a:spcPts val="800"/>
-              </a:spcAft>
-              <a:defRPr sz="1100" b="1">
-                <a:solidFill>
-                  <a:srgbClr val="00D4FF"/>
-                </a:solidFill>
-              </a:defRPr>
-            </a:pPr>
-            <a:r>
-              <a:t>LAYER 03</a:t>
-            </a:r>
-          </a:p>
-          <a:p>
-            <a:pPr>
-              <a:spcAft>
-                <a:spcPts val="1200"/>
-              </a:spcAft>
-              <a:defRPr sz="1550" b="1">
-                <a:solidFill>
-                  <a:srgbClr val="FFFFFF"/>
-                </a:solidFill>
-              </a:defRPr>
-            </a:pPr>
-            <a:r>
-              <a:t>Swarm Consensus Core</a:t>
-            </a:r>
-          </a:p>
-          <a:p>
-            <a:pPr>
-              <a:defRPr sz="1250">
-                <a:solidFill>
-                  <a:srgbClr val="C8D8F0"/>
-                </a:solidFill>
-              </a:defRPr>
-            </a:pPr>
-            <a:r>
-              <a:t>Game-theoretic multi-agent negotiation, cross-departmental constraint arbitration, dynamic goal decomposition, and autonomous policy synthesis.</a:t>
-            </a:r>
-          </a:p>
-        </p:txBody>
-      </p:sp>
-      <p:sp>
-        <p:nvSpPr>
-          <p:cNvPr id="9" name="Rounded Rectangle 8"/>
+          <a:bodyPr rtlCol="0" anchor="ctr"/>
+          <a:lstStyle/>
+          <a:p>
+            <a:pPr algn="ctr"/>
+          </a:p>
+        </p:txBody>
+      </p:sp>
+      <p:sp>
+        <p:nvSpPr>
+          <p:cNvPr id="12" name="TextBox 11"/>
+          <p:cNvSpPr txBox="1"/>
+          <p:nvPr/>
+        </p:nvSpPr>
+        <p:spPr>
+          <a:xfrm>
+            <a:off x="868680" y="2359152"/>
+            <a:ext cx="4956048" cy="1152144"/>
+          </a:xfrm>
+          <a:prstGeom prst="rect">
+            <a:avLst/>
+          </a:prstGeom>
+          <a:noFill/>
+        </p:spPr>
+        <p:txBody>
+          <a:bodyPr wrap="square" lIns="0" rIns="0" tIns="0" bIns="0">
+            <a:spAutoFit/>
+          </a:bodyPr>
+          <a:lstStyle/>
+          <a:p>
+            <a:pPr>
+              <a:defRPr sz="1000">
+                <a:solidFill>
+                  <a:srgbClr val="F1F5F9"/>
+                </a:solidFill>
+              </a:defRPr>
+            </a:pPr>
+            <a:r>
+              <a:t>Maintenance, operations, and procurement teams communicate via emails, spreadsheets, and delayed meetings.</a:t>
+            </a:r>
+          </a:p>
+        </p:txBody>
+      </p:sp>
+      <p:sp>
+        <p:nvSpPr>
+          <p:cNvPr id="13" name="Rounded Rectangle 12"/>
           <p:cNvSpPr/>
           <p:nvPr/>
         </p:nvSpPr>
         <p:spPr>
           <a:xfrm>
-            <a:off x="8906256" y="1645920"/>
-            <a:ext cx="2523744" cy="4389120"/>
+            <a:off x="6227064" y="2286000"/>
+            <a:ext cx="5230368" cy="1298448"/>
           </a:xfrm>
           <a:prstGeom prst="roundRect">
             <a:avLst/>
           </a:prstGeom>
           <a:solidFill>
-            <a:srgbClr val="0F172A"/>
+            <a:srgbClr val="0F1C26"/>
           </a:solidFill>
-          <a:ln>
+          <a:ln w="12700">
             <a:solidFill>
-              <a:srgbClr val="1E293B"/>
+              <a:srgbClr val="194B5F"/>
             </a:solidFill>
           </a:ln>
         </p:spPr>
@@ -5759,48 +7164,364 @@
           </a:fontRef>
         </p:style>
         <p:txBody>
-          <a:bodyPr rtlCol="0" anchor="ctr" wrap="square"/>
-          <a:lstStyle/>
-          <a:p>
-            <a:pPr algn="ctr">
-              <a:spcAft>
-                <a:spcPts val="800"/>
-              </a:spcAft>
-              <a:defRPr sz="1100" b="1">
-                <a:solidFill>
-                  <a:srgbClr val="00D4FF"/>
-                </a:solidFill>
-              </a:defRPr>
-            </a:pPr>
-            <a:r>
-              <a:t>LAYER 04</a:t>
-            </a:r>
-          </a:p>
-          <a:p>
-            <a:pPr>
-              <a:spcAft>
-                <a:spcPts val="1200"/>
-              </a:spcAft>
-              <a:defRPr sz="1550" b="1">
-                <a:solidFill>
-                  <a:srgbClr val="FFFFFF"/>
-                </a:solidFill>
-              </a:defRPr>
-            </a:pPr>
-            <a:r>
-              <a:t>Autonomous Dispatch Cockpit</a:t>
-            </a:r>
-          </a:p>
-          <a:p>
-            <a:pPr>
-              <a:defRPr sz="1250">
-                <a:solidFill>
-                  <a:srgbClr val="C8D8F0"/>
-                </a:solidFill>
-              </a:defRPr>
-            </a:pPr>
-            <a:r>
-              <a:t>Automated cross-system work order dispatch, autonomous operational setpoint execution, and ANSI/ISA-101 human-in-the-loop supervisor consoles.</a:t>
+          <a:bodyPr rtlCol="0" anchor="ctr"/>
+          <a:lstStyle/>
+          <a:p>
+            <a:pPr algn="ctr"/>
+          </a:p>
+        </p:txBody>
+      </p:sp>
+      <p:sp>
+        <p:nvSpPr>
+          <p:cNvPr id="14" name="TextBox 13"/>
+          <p:cNvSpPr txBox="1"/>
+          <p:nvPr/>
+        </p:nvSpPr>
+        <p:spPr>
+          <a:xfrm>
+            <a:off x="6364224" y="2359152"/>
+            <a:ext cx="4956048" cy="1152144"/>
+          </a:xfrm>
+          <a:prstGeom prst="rect">
+            <a:avLst/>
+          </a:prstGeom>
+          <a:noFill/>
+        </p:spPr>
+        <p:txBody>
+          <a:bodyPr wrap="square" lIns="0" rIns="0" tIns="0" bIns="0">
+            <a:spAutoFit/>
+          </a:bodyPr>
+          <a:lstStyle/>
+          <a:p>
+            <a:pPr>
+              <a:defRPr sz="1000" b="1">
+                <a:solidFill>
+                  <a:srgbClr val="34D399"/>
+                </a:solidFill>
+              </a:defRPr>
+            </a:pPr>
+            <a:r>
+              <a:t>Autonomous agents negotiate constraints instantly across departments in real-time consensus rounds.</a:t>
+            </a:r>
+          </a:p>
+        </p:txBody>
+      </p:sp>
+      <p:sp>
+        <p:nvSpPr>
+          <p:cNvPr id="15" name="Rounded Rectangle 14"/>
+          <p:cNvSpPr/>
+          <p:nvPr/>
+        </p:nvSpPr>
+        <p:spPr>
+          <a:xfrm>
+            <a:off x="731520" y="3694176"/>
+            <a:ext cx="5230368" cy="1298448"/>
+          </a:xfrm>
+          <a:prstGeom prst="roundRect">
+            <a:avLst/>
+          </a:prstGeom>
+          <a:solidFill>
+            <a:srgbClr val="1C1216"/>
+          </a:solidFill>
+          <a:ln w="12700">
+            <a:solidFill>
+              <a:srgbClr val="501923"/>
+            </a:solidFill>
+          </a:ln>
+        </p:spPr>
+        <p:style>
+          <a:lnRef idx="1">
+            <a:schemeClr val="accent1"/>
+          </a:lnRef>
+          <a:fillRef idx="3">
+            <a:schemeClr val="accent1"/>
+          </a:fillRef>
+          <a:effectRef idx="2">
+            <a:schemeClr val="accent1"/>
+          </a:effectRef>
+          <a:fontRef idx="minor">
+            <a:schemeClr val="lt1"/>
+          </a:fontRef>
+        </p:style>
+        <p:txBody>
+          <a:bodyPr rtlCol="0" anchor="ctr"/>
+          <a:lstStyle/>
+          <a:p>
+            <a:pPr algn="ctr"/>
+          </a:p>
+        </p:txBody>
+      </p:sp>
+      <p:sp>
+        <p:nvSpPr>
+          <p:cNvPr id="16" name="TextBox 15"/>
+          <p:cNvSpPr txBox="1"/>
+          <p:nvPr/>
+        </p:nvSpPr>
+        <p:spPr>
+          <a:xfrm>
+            <a:off x="868680" y="3767328"/>
+            <a:ext cx="4956048" cy="1152144"/>
+          </a:xfrm>
+          <a:prstGeom prst="rect">
+            <a:avLst/>
+          </a:prstGeom>
+          <a:noFill/>
+        </p:spPr>
+        <p:txBody>
+          <a:bodyPr wrap="square" lIns="0" rIns="0" tIns="0" bIns="0">
+            <a:spAutoFit/>
+          </a:bodyPr>
+          <a:lstStyle/>
+          <a:p>
+            <a:pPr>
+              <a:defRPr sz="1000">
+                <a:solidFill>
+                  <a:srgbClr val="F1F5F9"/>
+                </a:solidFill>
+              </a:defRPr>
+            </a:pPr>
+            <a:r>
+              <a:t>Static maintenance schedules that either over-service assets or miss sudden accelerated wear.</a:t>
+            </a:r>
+          </a:p>
+        </p:txBody>
+      </p:sp>
+      <p:sp>
+        <p:nvSpPr>
+          <p:cNvPr id="17" name="Rounded Rectangle 16"/>
+          <p:cNvSpPr/>
+          <p:nvPr/>
+        </p:nvSpPr>
+        <p:spPr>
+          <a:xfrm>
+            <a:off x="6227064" y="3694176"/>
+            <a:ext cx="5230368" cy="1298448"/>
+          </a:xfrm>
+          <a:prstGeom prst="roundRect">
+            <a:avLst/>
+          </a:prstGeom>
+          <a:solidFill>
+            <a:srgbClr val="0F1C26"/>
+          </a:solidFill>
+          <a:ln w="12700">
+            <a:solidFill>
+              <a:srgbClr val="194B5F"/>
+            </a:solidFill>
+          </a:ln>
+        </p:spPr>
+        <p:style>
+          <a:lnRef idx="1">
+            <a:schemeClr val="accent1"/>
+          </a:lnRef>
+          <a:fillRef idx="3">
+            <a:schemeClr val="accent1"/>
+          </a:fillRef>
+          <a:effectRef idx="2">
+            <a:schemeClr val="accent1"/>
+          </a:effectRef>
+          <a:fontRef idx="minor">
+            <a:schemeClr val="lt1"/>
+          </a:fontRef>
+        </p:style>
+        <p:txBody>
+          <a:bodyPr rtlCol="0" anchor="ctr"/>
+          <a:lstStyle/>
+          <a:p>
+            <a:pPr algn="ctr"/>
+          </a:p>
+        </p:txBody>
+      </p:sp>
+      <p:sp>
+        <p:nvSpPr>
+          <p:cNvPr id="18" name="TextBox 17"/>
+          <p:cNvSpPr txBox="1"/>
+          <p:nvPr/>
+        </p:nvSpPr>
+        <p:spPr>
+          <a:xfrm>
+            <a:off x="6364224" y="3767328"/>
+            <a:ext cx="4956048" cy="1152144"/>
+          </a:xfrm>
+          <a:prstGeom prst="rect">
+            <a:avLst/>
+          </a:prstGeom>
+          <a:noFill/>
+        </p:spPr>
+        <p:txBody>
+          <a:bodyPr wrap="square" lIns="0" rIns="0" tIns="0" bIns="0">
+            <a:spAutoFit/>
+          </a:bodyPr>
+          <a:lstStyle/>
+          <a:p>
+            <a:pPr>
+              <a:defRPr sz="1000" b="1">
+                <a:solidFill>
+                  <a:srgbClr val="34D399"/>
+                </a:solidFill>
+              </a:defRPr>
+            </a:pPr>
+            <a:r>
+              <a:t>Dynamic dispatch balancing asset wear, fuel costs, market prices, and inventory availability.</a:t>
+            </a:r>
+          </a:p>
+        </p:txBody>
+      </p:sp>
+      <p:sp>
+        <p:nvSpPr>
+          <p:cNvPr id="19" name="Rounded Rectangle 18"/>
+          <p:cNvSpPr/>
+          <p:nvPr/>
+        </p:nvSpPr>
+        <p:spPr>
+          <a:xfrm>
+            <a:off x="731520" y="5102352"/>
+            <a:ext cx="5230368" cy="1298448"/>
+          </a:xfrm>
+          <a:prstGeom prst="roundRect">
+            <a:avLst/>
+          </a:prstGeom>
+          <a:solidFill>
+            <a:srgbClr val="1C1216"/>
+          </a:solidFill>
+          <a:ln w="12700">
+            <a:solidFill>
+              <a:srgbClr val="501923"/>
+            </a:solidFill>
+          </a:ln>
+        </p:spPr>
+        <p:style>
+          <a:lnRef idx="1">
+            <a:schemeClr val="accent1"/>
+          </a:lnRef>
+          <a:fillRef idx="3">
+            <a:schemeClr val="accent1"/>
+          </a:fillRef>
+          <a:effectRef idx="2">
+            <a:schemeClr val="accent1"/>
+          </a:effectRef>
+          <a:fontRef idx="minor">
+            <a:schemeClr val="lt1"/>
+          </a:fontRef>
+        </p:style>
+        <p:txBody>
+          <a:bodyPr rtlCol="0" anchor="ctr"/>
+          <a:lstStyle/>
+          <a:p>
+            <a:pPr algn="ctr"/>
+          </a:p>
+        </p:txBody>
+      </p:sp>
+      <p:sp>
+        <p:nvSpPr>
+          <p:cNvPr id="20" name="TextBox 19"/>
+          <p:cNvSpPr txBox="1"/>
+          <p:nvPr/>
+        </p:nvSpPr>
+        <p:spPr>
+          <a:xfrm>
+            <a:off x="868680" y="5175504"/>
+            <a:ext cx="4956048" cy="1152144"/>
+          </a:xfrm>
+          <a:prstGeom prst="rect">
+            <a:avLst/>
+          </a:prstGeom>
+          <a:noFill/>
+        </p:spPr>
+        <p:txBody>
+          <a:bodyPr wrap="square" lIns="0" rIns="0" tIns="0" bIns="0">
+            <a:spAutoFit/>
+          </a:bodyPr>
+          <a:lstStyle/>
+          <a:p>
+            <a:pPr>
+              <a:defRPr sz="1000">
+                <a:solidFill>
+                  <a:srgbClr val="F1F5F9"/>
+                </a:solidFill>
+              </a:defRPr>
+            </a:pPr>
+            <a:r>
+              <a:t>Black-box decisions with no traceability or compliance record.</a:t>
+            </a:r>
+          </a:p>
+        </p:txBody>
+      </p:sp>
+      <p:sp>
+        <p:nvSpPr>
+          <p:cNvPr id="21" name="Rounded Rectangle 20"/>
+          <p:cNvSpPr/>
+          <p:nvPr/>
+        </p:nvSpPr>
+        <p:spPr>
+          <a:xfrm>
+            <a:off x="6227064" y="5102352"/>
+            <a:ext cx="5230368" cy="1298448"/>
+          </a:xfrm>
+          <a:prstGeom prst="roundRect">
+            <a:avLst/>
+          </a:prstGeom>
+          <a:solidFill>
+            <a:srgbClr val="0F1C26"/>
+          </a:solidFill>
+          <a:ln w="12700">
+            <a:solidFill>
+              <a:srgbClr val="194B5F"/>
+            </a:solidFill>
+          </a:ln>
+        </p:spPr>
+        <p:style>
+          <a:lnRef idx="1">
+            <a:schemeClr val="accent1"/>
+          </a:lnRef>
+          <a:fillRef idx="3">
+            <a:schemeClr val="accent1"/>
+          </a:fillRef>
+          <a:effectRef idx="2">
+            <a:schemeClr val="accent1"/>
+          </a:effectRef>
+          <a:fontRef idx="minor">
+            <a:schemeClr val="lt1"/>
+          </a:fontRef>
+        </p:style>
+        <p:txBody>
+          <a:bodyPr rtlCol="0" anchor="ctr"/>
+          <a:lstStyle/>
+          <a:p>
+            <a:pPr algn="ctr"/>
+          </a:p>
+        </p:txBody>
+      </p:sp>
+      <p:sp>
+        <p:nvSpPr>
+          <p:cNvPr id="22" name="TextBox 21"/>
+          <p:cNvSpPr txBox="1"/>
+          <p:nvPr/>
+        </p:nvSpPr>
+        <p:spPr>
+          <a:xfrm>
+            <a:off x="6364224" y="5175504"/>
+            <a:ext cx="4956048" cy="1152144"/>
+          </a:xfrm>
+          <a:prstGeom prst="rect">
+            <a:avLst/>
+          </a:prstGeom>
+          <a:noFill/>
+        </p:spPr>
+        <p:txBody>
+          <a:bodyPr wrap="square" lIns="0" rIns="0" tIns="0" bIns="0">
+            <a:spAutoFit/>
+          </a:bodyPr>
+          <a:lstStyle/>
+          <a:p>
+            <a:pPr>
+              <a:defRPr sz="1000" b="1">
+                <a:solidFill>
+                  <a:srgbClr val="34D399"/>
+                </a:solidFill>
+              </a:defRPr>
+            </a:pPr>
+            <a:r>
+              <a:t>Audited cryptographic consensus log with configurable human-in-the-loop authorization gates.</a:t>
             </a:r>
           </a:p>
         </p:txBody>
@@ -5838,7 +7559,7 @@
             <a:avLst/>
           </a:prstGeom>
           <a:solidFill>
-            <a:srgbClr val="0A0E1A"/>
+            <a:srgbClr val="0B0F17"/>
           </a:solidFill>
           <a:ln>
             <a:noFill/>
@@ -5874,17 +7595,19 @@
         </p:nvSpPr>
         <p:spPr>
           <a:xfrm>
-            <a:off x="0" y="0"/>
-            <a:ext cx="12191695" cy="54864"/>
+            <a:off x="731520" y="365760"/>
+            <a:ext cx="10728655" cy="18288"/>
           </a:xfrm>
           <a:prstGeom prst="rect">
             <a:avLst/>
           </a:prstGeom>
           <a:solidFill>
-            <a:srgbClr val="00D4FF"/>
+            <a:srgbClr val="38BDF8"/>
           </a:solidFill>
           <a:ln>
-            <a:noFill/>
+            <a:solidFill>
+              <a:srgbClr val="38BDF8"/>
+            </a:solidFill>
           </a:ln>
         </p:spPr>
         <p:style>
@@ -5917,8 +7640,8 @@
         </p:nvSpPr>
         <p:spPr>
           <a:xfrm>
-            <a:off x="731520" y="365760"/>
-            <a:ext cx="10698480" cy="1005840"/>
+            <a:off x="731520" y="438912"/>
+            <a:ext cx="8229600" cy="274320"/>
           </a:xfrm>
           <a:prstGeom prst="rect">
             <a:avLst/>
@@ -5926,35 +7649,20 @@
           <a:noFill/>
         </p:spPr>
         <p:txBody>
-          <a:bodyPr wrap="square">
+          <a:bodyPr wrap="square" lIns="0" rIns="0" tIns="0" bIns="0">
             <a:spAutoFit/>
           </a:bodyPr>
           <a:lstStyle/>
           <a:p>
             <a:pPr>
-              <a:spcAft>
-                <a:spcPts val="400"/>
-              </a:spcAft>
-              <a:defRPr sz="1150" b="1">
-                <a:solidFill>
-                  <a:srgbClr val="00D4FF"/>
-                </a:solidFill>
-              </a:defRPr>
-            </a:pPr>
-            <a:r>
-              <a:t>TERRAHIVE  |  TERRESTRIAL PLATFORM</a:t>
-            </a:r>
-          </a:p>
-          <a:p>
-            <a:pPr>
-              <a:defRPr sz="2500" b="1">
-                <a:solidFill>
-                  <a:srgbClr val="FFFFFF"/>
-                </a:solidFill>
-              </a:defRPr>
-            </a:pPr>
-            <a:r>
-              <a:t>System Integrator Deployment Playbook &amp; Commercial Enablement</a:t>
+              <a:defRPr sz="950" b="1">
+                <a:solidFill>
+                  <a:srgbClr val="38BDF8"/>
+                </a:solidFill>
+              </a:defRPr>
+            </a:pPr>
+            <a:r>
+              <a:t>TERRESTRIAL PLATFORM  |  TERRAHIVE  |  SYSTEM ARCHITECTURE</a:t>
             </a:r>
           </a:p>
         </p:txBody>
@@ -5967,8 +7675,8 @@
         </p:nvSpPr>
         <p:spPr>
           <a:xfrm>
-            <a:off x="731520" y="6446520"/>
-            <a:ext cx="10698480" cy="320040"/>
+            <a:off x="731520" y="731520"/>
+            <a:ext cx="9601200" cy="777240"/>
           </a:xfrm>
           <a:prstGeom prst="rect">
             <a:avLst/>
@@ -5976,44 +7684,83 @@
           <a:noFill/>
         </p:spPr>
         <p:txBody>
-          <a:bodyPr wrap="none">
+          <a:bodyPr wrap="square" lIns="0" rIns="0" tIns="0" bIns="0">
             <a:spAutoFit/>
           </a:bodyPr>
           <a:lstStyle/>
           <a:p>
             <a:pPr>
-              <a:defRPr sz="1000">
+              <a:defRPr sz="1900" b="1">
+                <a:solidFill>
+                  <a:srgbClr val="FFFFFF"/>
+                </a:solidFill>
+              </a:defRPr>
+            </a:pPr>
+            <a:r>
+              <a:t>End-to-End System Diagram &amp; Data Pipeline</a:t>
+            </a:r>
+          </a:p>
+          <a:p>
+            <a:pPr>
+              <a:spcBef>
+                <a:spcPts val="300"/>
+              </a:spcBef>
+              <a:defRPr sz="1050">
                 <a:solidFill>
                   <a:srgbClr val="94A3B8"/>
                 </a:solidFill>
               </a:defRPr>
             </a:pPr>
             <a:r>
-              <a:t>TERRESTRIAL PLATFORM  |  TERRAHIVE CATALOGUE  |  CONFIDENTIAL - AUTHORISED SYSTEM INTEGRATORS ONLY</a:t>
-            </a:r>
-          </a:p>
-        </p:txBody>
-      </p:sp>
-      <p:sp>
-        <p:nvSpPr>
-          <p:cNvPr id="6" name="Rounded Rectangle 5"/>
+              <a:t>Visual architecture diagram representing field telemetry ingestion, deterministic edge fabric, AI reasoning, and closed-loop actuation.</a:t>
+            </a:r>
+          </a:p>
+        </p:txBody>
+      </p:sp>
+      <p:pic>
+        <p:nvPicPr>
+          <p:cNvPr id="6" name="Picture 5" descr="tp_logo_white.png"/>
+          <p:cNvPicPr>
+            <a:picLocks noChangeAspect="1"/>
+          </p:cNvPicPr>
+          <p:nvPr/>
+        </p:nvPicPr>
+        <p:blipFill>
+          <a:blip r:embed="rId2"/>
+          <a:stretch>
+            <a:fillRect/>
+          </a:stretch>
+        </p:blipFill>
+        <p:spPr>
+          <a:xfrm>
+            <a:off x="10469880" y="411480"/>
+            <a:ext cx="987552" cy="384048"/>
+          </a:xfrm>
+          <a:prstGeom prst="rect">
+            <a:avLst/>
+          </a:prstGeom>
+        </p:spPr>
+      </p:pic>
+      <p:sp>
+        <p:nvSpPr>
+          <p:cNvPr id="7" name="Rounded Rectangle 6"/>
           <p:cNvSpPr/>
           <p:nvPr/>
         </p:nvSpPr>
         <p:spPr>
           <a:xfrm>
-            <a:off x="731520" y="1645920"/>
-            <a:ext cx="3401568" cy="3200400"/>
+            <a:off x="731520" y="1691640"/>
+            <a:ext cx="2514600" cy="3611880"/>
           </a:xfrm>
           <a:prstGeom prst="roundRect">
             <a:avLst/>
           </a:prstGeom>
           <a:solidFill>
-            <a:srgbClr val="0F172A"/>
+            <a:srgbClr val="131926"/>
           </a:solidFill>
-          <a:ln>
+          <a:ln w="12700">
             <a:solidFill>
-              <a:srgbClr val="1E293B"/>
+              <a:srgbClr val="38BDF8"/>
             </a:solidFill>
           </a:ln>
         </p:spPr>
@@ -6032,72 +7779,139 @@
           </a:fontRef>
         </p:style>
         <p:txBody>
-          <a:bodyPr rtlCol="0" anchor="ctr" wrap="square"/>
-          <a:lstStyle/>
-          <a:p>
-            <a:pPr algn="ctr">
+          <a:bodyPr rtlCol="0" anchor="ctr"/>
+          <a:lstStyle/>
+          <a:p>
+            <a:pPr algn="ctr"/>
+          </a:p>
+        </p:txBody>
+      </p:sp>
+      <p:sp>
+        <p:nvSpPr>
+          <p:cNvPr id="8" name="TextBox 7"/>
+          <p:cNvSpPr txBox="1"/>
+          <p:nvPr/>
+        </p:nvSpPr>
+        <p:spPr>
+          <a:xfrm>
+            <a:off x="896112" y="1856232"/>
+            <a:ext cx="2185416" cy="3282696"/>
+          </a:xfrm>
+          <a:prstGeom prst="rect">
+            <a:avLst/>
+          </a:prstGeom>
+          <a:noFill/>
+        </p:spPr>
+        <p:txBody>
+          <a:bodyPr wrap="square" lIns="0" rIns="0" tIns="0" bIns="0">
+            <a:spAutoFit/>
+          </a:bodyPr>
+          <a:lstStyle/>
+          <a:p>
+            <a:pPr>
+              <a:defRPr sz="850" b="1">
+                <a:solidFill>
+                  <a:srgbClr val="38BDF8"/>
+                </a:solidFill>
+              </a:defRPr>
+            </a:pPr>
+            <a:r>
+              <a:t>LAYER 01</a:t>
+            </a:r>
+          </a:p>
+          <a:p>
+            <a:pPr>
+              <a:spcBef>
+                <a:spcPts val="300"/>
+              </a:spcBef>
+              <a:spcAft>
+                <a:spcPts val="600"/>
+              </a:spcAft>
+              <a:defRPr sz="1200" b="1">
+                <a:solidFill>
+                  <a:srgbClr val="FFFFFF"/>
+                </a:solidFill>
+              </a:defRPr>
+            </a:pPr>
+            <a:r>
+              <a:t>Distributed Agent Ingestion</a:t>
+            </a:r>
+          </a:p>
+          <a:p>
+            <a:pPr>
               <a:spcAft>
                 <a:spcPts val="800"/>
               </a:spcAft>
-              <a:defRPr sz="1100" b="1">
-                <a:solidFill>
-                  <a:srgbClr val="F5C842"/>
-                </a:solidFill>
-              </a:defRPr>
-            </a:pPr>
-            <a:r>
-              <a:t>PHASE 01 | CONNECTIVITY &amp; AUDIT</a:t>
-            </a:r>
-          </a:p>
-          <a:p>
-            <a:pPr>
-              <a:spcAft>
-                <a:spcPts val="1000"/>
-              </a:spcAft>
-              <a:defRPr sz="1600" b="1">
-                <a:solidFill>
-                  <a:srgbClr val="FFFFFF"/>
-                </a:solidFill>
-              </a:defRPr>
-            </a:pPr>
-            <a:r>
-              <a:t>Zero Rip-and-Replace Onboarding</a:t>
-            </a:r>
-          </a:p>
-          <a:p>
-            <a:pPr>
-              <a:defRPr sz="1250">
-                <a:solidFill>
-                  <a:srgbClr val="C8D8F0"/>
-                </a:solidFill>
-              </a:defRPr>
-            </a:pPr>
-            <a:r>
-              <a:t>Deploy edge container onto existing industrial PC or VM. Connect to plant DCS/PLCs via Agent Swarm Protocol. Ingest and normalize all telemetry in under 48 hours without halting production.</a:t>
-            </a:r>
-          </a:p>
-        </p:txBody>
-      </p:sp>
-      <p:sp>
-        <p:nvSpPr>
-          <p:cNvPr id="7" name="Rounded Rectangle 6"/>
+              <a:defRPr sz="900">
+                <a:solidFill>
+                  <a:srgbClr val="F1F5F9"/>
+                </a:solidFill>
+              </a:defRPr>
+            </a:pPr>
+            <a:r>
+              <a:t>High-throughput ingestion connecting autonomous departmental agent streams, ERP transactions, operational event queues, and SCADA state tags.</a:t>
+            </a:r>
+          </a:p>
+          <a:p>
+            <a:pPr>
+              <a:spcBef>
+                <a:spcPts val="400"/>
+              </a:spcBef>
+              <a:defRPr sz="800" b="1">
+                <a:solidFill>
+                  <a:srgbClr val="94A3B8"/>
+                </a:solidFill>
+              </a:defRPr>
+            </a:pPr>
+            <a:r>
+              <a:t>PROTOCOLS &amp; STANDARDS:</a:t>
+            </a:r>
+          </a:p>
+          <a:p>
+            <a:pPr>
+              <a:spcBef>
+                <a:spcPts val="200"/>
+              </a:spcBef>
+              <a:defRPr sz="850">
+                <a:solidFill>
+                  <a:srgbClr val="34D399"/>
+                </a:solidFill>
+              </a:defRPr>
+            </a:pPr>
+            <a:r>
+              <a:t> • Agent Swarm Protocol</a:t>
+            </a:r>
+            <a:br/>
+            <a:r>
+              <a:t> • Real-Time State Stream</a:t>
+            </a:r>
+            <a:br/>
+            <a:r>
+              <a:t> • Enterprise Messaging</a:t>
+            </a:r>
+          </a:p>
+        </p:txBody>
+      </p:sp>
+      <p:sp>
+        <p:nvSpPr>
+          <p:cNvPr id="9" name="Rounded Rectangle 8"/>
           <p:cNvSpPr/>
           <p:nvPr/>
         </p:nvSpPr>
         <p:spPr>
           <a:xfrm>
-            <a:off x="4379976" y="1645920"/>
-            <a:ext cx="3401568" cy="3200400"/>
+            <a:off x="3465576" y="1691640"/>
+            <a:ext cx="2514600" cy="3611880"/>
           </a:xfrm>
           <a:prstGeom prst="roundRect">
             <a:avLst/>
           </a:prstGeom>
           <a:solidFill>
-            <a:srgbClr val="0F172A"/>
+            <a:srgbClr val="131926"/>
           </a:solidFill>
-          <a:ln>
+          <a:ln w="12700">
             <a:solidFill>
-              <a:srgbClr val="1E293B"/>
+              <a:srgbClr val="38BDF8"/>
             </a:solidFill>
           </a:ln>
         </p:spPr>
@@ -6116,72 +7930,139 @@
           </a:fontRef>
         </p:style>
         <p:txBody>
-          <a:bodyPr rtlCol="0" anchor="ctr" wrap="square"/>
-          <a:lstStyle/>
-          <a:p>
-            <a:pPr algn="ctr">
+          <a:bodyPr rtlCol="0" anchor="ctr"/>
+          <a:lstStyle/>
+          <a:p>
+            <a:pPr algn="ctr"/>
+          </a:p>
+        </p:txBody>
+      </p:sp>
+      <p:sp>
+        <p:nvSpPr>
+          <p:cNvPr id="10" name="TextBox 9"/>
+          <p:cNvSpPr txBox="1"/>
+          <p:nvPr/>
+        </p:nvSpPr>
+        <p:spPr>
+          <a:xfrm>
+            <a:off x="3630168" y="1856232"/>
+            <a:ext cx="2185416" cy="3282696"/>
+          </a:xfrm>
+          <a:prstGeom prst="rect">
+            <a:avLst/>
+          </a:prstGeom>
+          <a:noFill/>
+        </p:spPr>
+        <p:txBody>
+          <a:bodyPr wrap="square" lIns="0" rIns="0" tIns="0" bIns="0">
+            <a:spAutoFit/>
+          </a:bodyPr>
+          <a:lstStyle/>
+          <a:p>
+            <a:pPr>
+              <a:defRPr sz="850" b="1">
+                <a:solidFill>
+                  <a:srgbClr val="38BDF8"/>
+                </a:solidFill>
+              </a:defRPr>
+            </a:pPr>
+            <a:r>
+              <a:t>LAYER 02</a:t>
+            </a:r>
+          </a:p>
+          <a:p>
+            <a:pPr>
+              <a:spcBef>
+                <a:spcPts val="300"/>
+              </a:spcBef>
+              <a:spcAft>
+                <a:spcPts val="600"/>
+              </a:spcAft>
+              <a:defRPr sz="1200" b="1">
+                <a:solidFill>
+                  <a:srgbClr val="FFFFFF"/>
+                </a:solidFill>
+              </a:defRPr>
+            </a:pPr>
+            <a:r>
+              <a:t>Swarm State Convergence Bus</a:t>
+            </a:r>
+          </a:p>
+          <a:p>
+            <a:pPr>
               <a:spcAft>
                 <a:spcPts val="800"/>
               </a:spcAft>
-              <a:defRPr sz="1100" b="1">
-                <a:solidFill>
-                  <a:srgbClr val="F5C842"/>
-                </a:solidFill>
-              </a:defRPr>
-            </a:pPr>
-            <a:r>
-              <a:t>PHASE 02 | TWIN CALIBRATION</a:t>
-            </a:r>
-          </a:p>
-          <a:p>
-            <a:pPr>
-              <a:spcAft>
-                <a:spcPts val="1000"/>
-              </a:spcAft>
-              <a:defRPr sz="1600" b="1">
-                <a:solidFill>
-                  <a:srgbClr val="FFFFFF"/>
-                </a:solidFill>
-              </a:defRPr>
-            </a:pPr>
-            <a:r>
-              <a:t>Physics-Model Synchronization</a:t>
-            </a:r>
-          </a:p>
-          <a:p>
-            <a:pPr>
-              <a:defRPr sz="1250">
-                <a:solidFill>
-                  <a:srgbClr val="C8D8F0"/>
-                </a:solidFill>
-              </a:defRPr>
-            </a:pPr>
-            <a:r>
-              <a:t>Feed historical historian data into TerraHive models. Automatically build directed causal relationship graphs, calibrate thermodynamics/kinematics, and train edge neural operators.</a:t>
-            </a:r>
-          </a:p>
-        </p:txBody>
-      </p:sp>
-      <p:sp>
-        <p:nvSpPr>
-          <p:cNvPr id="8" name="Rounded Rectangle 7"/>
+              <a:defRPr sz="900">
+                <a:solidFill>
+                  <a:srgbClr val="F1F5F9"/>
+                </a:solidFill>
+              </a:defRPr>
+            </a:pPr>
+            <a:r>
+              <a:t>Low-latency consensus broadcast fabric, distributed memory synchronization, and deterministic state-machine transaction sequencing.</a:t>
+            </a:r>
+          </a:p>
+          <a:p>
+            <a:pPr>
+              <a:spcBef>
+                <a:spcPts val="400"/>
+              </a:spcBef>
+              <a:defRPr sz="800" b="1">
+                <a:solidFill>
+                  <a:srgbClr val="94A3B8"/>
+                </a:solidFill>
+              </a:defRPr>
+            </a:pPr>
+            <a:r>
+              <a:t>PROTOCOLS &amp; STANDARDS:</a:t>
+            </a:r>
+          </a:p>
+          <a:p>
+            <a:pPr>
+              <a:spcBef>
+                <a:spcPts val="200"/>
+              </a:spcBef>
+              <a:defRPr sz="850">
+                <a:solidFill>
+                  <a:srgbClr val="34D399"/>
+                </a:solidFill>
+              </a:defRPr>
+            </a:pPr>
+            <a:r>
+              <a:t> • Consensus Broadcast Bus</a:t>
+            </a:r>
+            <a:br/>
+            <a:r>
+              <a:t> • Distributed Vector Memory</a:t>
+            </a:r>
+            <a:br/>
+            <a:r>
+              <a:t> • Sub-20ms State Sync</a:t>
+            </a:r>
+          </a:p>
+        </p:txBody>
+      </p:sp>
+      <p:sp>
+        <p:nvSpPr>
+          <p:cNvPr id="11" name="Rounded Rectangle 10"/>
           <p:cNvSpPr/>
           <p:nvPr/>
         </p:nvSpPr>
         <p:spPr>
           <a:xfrm>
-            <a:off x="8028432" y="1645920"/>
-            <a:ext cx="3401568" cy="3200400"/>
+            <a:off x="6199632" y="1691640"/>
+            <a:ext cx="2514600" cy="3611880"/>
           </a:xfrm>
           <a:prstGeom prst="roundRect">
             <a:avLst/>
           </a:prstGeom>
           <a:solidFill>
-            <a:srgbClr val="0F172A"/>
+            <a:srgbClr val="131926"/>
           </a:solidFill>
-          <a:ln>
+          <a:ln w="12700">
             <a:solidFill>
-              <a:srgbClr val="1E293B"/>
+              <a:srgbClr val="38BDF8"/>
             </a:solidFill>
           </a:ln>
         </p:spPr>
@@ -6200,72 +8081,139 @@
           </a:fontRef>
         </p:style>
         <p:txBody>
-          <a:bodyPr rtlCol="0" anchor="ctr" wrap="square"/>
-          <a:lstStyle/>
-          <a:p>
-            <a:pPr algn="ctr">
+          <a:bodyPr rtlCol="0" anchor="ctr"/>
+          <a:lstStyle/>
+          <a:p>
+            <a:pPr algn="ctr"/>
+          </a:p>
+        </p:txBody>
+      </p:sp>
+      <p:sp>
+        <p:nvSpPr>
+          <p:cNvPr id="12" name="TextBox 11"/>
+          <p:cNvSpPr txBox="1"/>
+          <p:nvPr/>
+        </p:nvSpPr>
+        <p:spPr>
+          <a:xfrm>
+            <a:off x="6364224" y="1856232"/>
+            <a:ext cx="2185416" cy="3282696"/>
+          </a:xfrm>
+          <a:prstGeom prst="rect">
+            <a:avLst/>
+          </a:prstGeom>
+          <a:noFill/>
+        </p:spPr>
+        <p:txBody>
+          <a:bodyPr wrap="square" lIns="0" rIns="0" tIns="0" bIns="0">
+            <a:spAutoFit/>
+          </a:bodyPr>
+          <a:lstStyle/>
+          <a:p>
+            <a:pPr>
+              <a:defRPr sz="850" b="1">
+                <a:solidFill>
+                  <a:srgbClr val="38BDF8"/>
+                </a:solidFill>
+              </a:defRPr>
+            </a:pPr>
+            <a:r>
+              <a:t>LAYER 03</a:t>
+            </a:r>
+          </a:p>
+          <a:p>
+            <a:pPr>
+              <a:spcBef>
+                <a:spcPts val="300"/>
+              </a:spcBef>
+              <a:spcAft>
+                <a:spcPts val="600"/>
+              </a:spcAft>
+              <a:defRPr sz="1200" b="1">
+                <a:solidFill>
+                  <a:srgbClr val="FFFFFF"/>
+                </a:solidFill>
+              </a:defRPr>
+            </a:pPr>
+            <a:r>
+              <a:t>Swarm Consensus Core</a:t>
+            </a:r>
+          </a:p>
+          <a:p>
+            <a:pPr>
               <a:spcAft>
                 <a:spcPts val="800"/>
               </a:spcAft>
-              <a:defRPr sz="1100" b="1">
-                <a:solidFill>
-                  <a:srgbClr val="F5C842"/>
-                </a:solidFill>
-              </a:defRPr>
-            </a:pPr>
-            <a:r>
-              <a:t>PHASE 03 | AUTONOMOUS GO-LIVE</a:t>
-            </a:r>
-          </a:p>
-          <a:p>
-            <a:pPr>
-              <a:spcAft>
-                <a:spcPts val="1000"/>
-              </a:spcAft>
-              <a:defRPr sz="1600" b="1">
-                <a:solidFill>
-                  <a:srgbClr val="FFFFFF"/>
-                </a:solidFill>
-              </a:defRPr>
-            </a:pPr>
-            <a:r>
-              <a:t>Closed-Loop Setpoint Actuation</a:t>
-            </a:r>
-          </a:p>
-          <a:p>
-            <a:pPr>
-              <a:defRPr sz="1250">
-                <a:solidFill>
-                  <a:srgbClr val="C8D8F0"/>
-                </a:solidFill>
-              </a:defRPr>
-            </a:pPr>
-            <a:r>
-              <a:t>Transition from advisory warnings to sub-25ms supervisory actuation. Sync alarm suppressions with plant operators and link work orders into SAP/ERP for verifiable recurring ROI.</a:t>
-            </a:r>
-          </a:p>
-        </p:txBody>
-      </p:sp>
-      <p:sp>
-        <p:nvSpPr>
-          <p:cNvPr id="9" name="Rounded Rectangle 8"/>
+              <a:defRPr sz="900">
+                <a:solidFill>
+                  <a:srgbClr val="F1F5F9"/>
+                </a:solidFill>
+              </a:defRPr>
+            </a:pPr>
+            <a:r>
+              <a:t>Game-theoretic multi-agent negotiation, cross-departmental constraint arbitration, dynamic goal decomposition, and autonomous policy synthesis.</a:t>
+            </a:r>
+          </a:p>
+          <a:p>
+            <a:pPr>
+              <a:spcBef>
+                <a:spcPts val="400"/>
+              </a:spcBef>
+              <a:defRPr sz="800" b="1">
+                <a:solidFill>
+                  <a:srgbClr val="94A3B8"/>
+                </a:solidFill>
+              </a:defRPr>
+            </a:pPr>
+            <a:r>
+              <a:t>PROTOCOLS &amp; STANDARDS:</a:t>
+            </a:r>
+          </a:p>
+          <a:p>
+            <a:pPr>
+              <a:spcBef>
+                <a:spcPts val="200"/>
+              </a:spcBef>
+              <a:defRPr sz="850">
+                <a:solidFill>
+                  <a:srgbClr val="34D399"/>
+                </a:solidFill>
+              </a:defRPr>
+            </a:pPr>
+            <a:r>
+              <a:t> • Game-Theoretic Arbitration</a:t>
+            </a:r>
+            <a:br/>
+            <a:r>
+              <a:t> • Constraint Resolver AI</a:t>
+            </a:r>
+            <a:br/>
+            <a:r>
+              <a:t> • Swarm Consensus Engine</a:t>
+            </a:r>
+          </a:p>
+        </p:txBody>
+      </p:sp>
+      <p:sp>
+        <p:nvSpPr>
+          <p:cNvPr id="13" name="Rounded Rectangle 12"/>
           <p:cNvSpPr/>
           <p:nvPr/>
         </p:nvSpPr>
         <p:spPr>
           <a:xfrm>
-            <a:off x="731520" y="5029200"/>
-            <a:ext cx="10698480" cy="1188720"/>
+            <a:off x="8933688" y="1691640"/>
+            <a:ext cx="2514600" cy="3611880"/>
           </a:xfrm>
           <a:prstGeom prst="roundRect">
             <a:avLst/>
           </a:prstGeom>
           <a:solidFill>
-            <a:srgbClr val="0C1C34"/>
+            <a:srgbClr val="131926"/>
           </a:solidFill>
-          <a:ln>
+          <a:ln w="12700">
             <a:solidFill>
-              <a:srgbClr val="00D4FF"/>
+              <a:srgbClr val="38BDF8"/>
             </a:solidFill>
           </a:ln>
         </p:spPr>
@@ -6284,16 +8232,830 @@
           </a:fontRef>
         </p:style>
         <p:txBody>
-          <a:bodyPr rtlCol="0" anchor="ctr" wrap="square"/>
-          <a:lstStyle/>
-          <a:p>
-            <a:pPr algn="ctr">
+          <a:bodyPr rtlCol="0" anchor="ctr"/>
+          <a:lstStyle/>
+          <a:p>
+            <a:pPr algn="ctr"/>
+          </a:p>
+        </p:txBody>
+      </p:sp>
+      <p:sp>
+        <p:nvSpPr>
+          <p:cNvPr id="14" name="TextBox 13"/>
+          <p:cNvSpPr txBox="1"/>
+          <p:nvPr/>
+        </p:nvSpPr>
+        <p:spPr>
+          <a:xfrm>
+            <a:off x="9098280" y="1856232"/>
+            <a:ext cx="2185416" cy="3282696"/>
+          </a:xfrm>
+          <a:prstGeom prst="rect">
+            <a:avLst/>
+          </a:prstGeom>
+          <a:noFill/>
+        </p:spPr>
+        <p:txBody>
+          <a:bodyPr wrap="square" lIns="0" rIns="0" tIns="0" bIns="0">
+            <a:spAutoFit/>
+          </a:bodyPr>
+          <a:lstStyle/>
+          <a:p>
+            <a:pPr>
+              <a:defRPr sz="850" b="1">
+                <a:solidFill>
+                  <a:srgbClr val="38BDF8"/>
+                </a:solidFill>
+              </a:defRPr>
+            </a:pPr>
+            <a:r>
+              <a:t>LAYER 04</a:t>
+            </a:r>
+          </a:p>
+          <a:p>
+            <a:pPr>
+              <a:spcBef>
+                <a:spcPts val="300"/>
+              </a:spcBef>
               <a:spcAft>
+                <a:spcPts val="600"/>
+              </a:spcAft>
+              <a:defRPr sz="1200" b="1">
+                <a:solidFill>
+                  <a:srgbClr val="FFFFFF"/>
+                </a:solidFill>
+              </a:defRPr>
+            </a:pPr>
+            <a:r>
+              <a:t>Autonomous Dispatch Cockpit</a:t>
+            </a:r>
+          </a:p>
+          <a:p>
+            <a:pPr>
+              <a:spcAft>
+                <a:spcPts val="800"/>
+              </a:spcAft>
+              <a:defRPr sz="900">
+                <a:solidFill>
+                  <a:srgbClr val="F1F5F9"/>
+                </a:solidFill>
+              </a:defRPr>
+            </a:pPr>
+            <a:r>
+              <a:t>Automated cross-system work order dispatch, autonomous operational setpoint execution, and ANSI/ISA-101 human-in-the-loop supervisor consoles.</a:t>
+            </a:r>
+          </a:p>
+          <a:p>
+            <a:pPr>
+              <a:spcBef>
                 <a:spcPts val="400"/>
+              </a:spcBef>
+              <a:defRPr sz="800" b="1">
+                <a:solidFill>
+                  <a:srgbClr val="94A3B8"/>
+                </a:solidFill>
+              </a:defRPr>
+            </a:pPr>
+            <a:r>
+              <a:t>PROTOCOLS &amp; STANDARDS:</a:t>
+            </a:r>
+          </a:p>
+          <a:p>
+            <a:pPr>
+              <a:spcBef>
+                <a:spcPts val="200"/>
+              </a:spcBef>
+              <a:defRPr sz="850">
+                <a:solidFill>
+                  <a:srgbClr val="34D399"/>
+                </a:solidFill>
+              </a:defRPr>
+            </a:pPr>
+            <a:r>
+              <a:t> • Autonomous Work Orders</a:t>
+            </a:r>
+            <a:br/>
+            <a:r>
+              <a:t> • Cross-System Setpoints</a:t>
+            </a:r>
+            <a:br/>
+            <a:r>
+              <a:t> • ISA-101 Swarm HMI</a:t>
+            </a:r>
+          </a:p>
+        </p:txBody>
+      </p:sp>
+      <p:sp>
+        <p:nvSpPr>
+          <p:cNvPr id="15" name="Rounded Rectangle 14"/>
+          <p:cNvSpPr/>
+          <p:nvPr/>
+        </p:nvSpPr>
+        <p:spPr>
+          <a:xfrm>
+            <a:off x="731520" y="5486400"/>
+            <a:ext cx="10728655" cy="868680"/>
+          </a:xfrm>
+          <a:prstGeom prst="roundRect">
+            <a:avLst/>
+          </a:prstGeom>
+          <a:solidFill>
+            <a:srgbClr val="131926"/>
+          </a:solidFill>
+          <a:ln w="12700">
+            <a:solidFill>
+              <a:srgbClr val="38BDF8"/>
+            </a:solidFill>
+          </a:ln>
+        </p:spPr>
+        <p:style>
+          <a:lnRef idx="1">
+            <a:schemeClr val="accent1"/>
+          </a:lnRef>
+          <a:fillRef idx="3">
+            <a:schemeClr val="accent1"/>
+          </a:fillRef>
+          <a:effectRef idx="2">
+            <a:schemeClr val="accent1"/>
+          </a:effectRef>
+          <a:fontRef idx="minor">
+            <a:schemeClr val="lt1"/>
+          </a:fontRef>
+        </p:style>
+        <p:txBody>
+          <a:bodyPr rtlCol="0" anchor="ctr"/>
+          <a:lstStyle/>
+          <a:p>
+            <a:pPr algn="ctr"/>
+          </a:p>
+        </p:txBody>
+      </p:sp>
+      <p:sp>
+        <p:nvSpPr>
+          <p:cNvPr id="16" name="TextBox 15"/>
+          <p:cNvSpPr txBox="1"/>
+          <p:nvPr/>
+        </p:nvSpPr>
+        <p:spPr>
+          <a:xfrm>
+            <a:off x="960120" y="5596128"/>
+            <a:ext cx="10241280" cy="640080"/>
+          </a:xfrm>
+          <a:prstGeom prst="rect">
+            <a:avLst/>
+          </a:prstGeom>
+          <a:noFill/>
+        </p:spPr>
+        <p:txBody>
+          <a:bodyPr wrap="square" lIns="0" rIns="0" tIns="0" bIns="0">
+            <a:spAutoFit/>
+          </a:bodyPr>
+          <a:lstStyle/>
+          <a:p>
+            <a:pPr>
+              <a:defRPr sz="850" b="1">
+                <a:solidFill>
+                  <a:srgbClr val="38BDF8"/>
+                </a:solidFill>
+              </a:defRPr>
+            </a:pPr>
+            <a:r>
+              <a:t>UNIFIED DATA PIPELINE FLOW</a:t>
+            </a:r>
+          </a:p>
+          <a:p>
+            <a:pPr>
+              <a:spcBef>
+                <a:spcPts val="200"/>
+              </a:spcBef>
+              <a:defRPr sz="950" b="1">
+                <a:solidFill>
+                  <a:srgbClr val="FFFFFF"/>
+                </a:solidFill>
+              </a:defRPr>
+            </a:pPr>
+            <a:r>
+              <a:t>Enterprise Agent Event Ingestion ➔ Swarm Consensus Convergence Bus ➔ Multi-Agent Constraint Arbitration ➔ Autonomous Cross-System Execution</a:t>
+            </a:r>
+          </a:p>
+        </p:txBody>
+      </p:sp>
+    </p:spTree>
+  </p:cSld>
+  <p:clrMapOvr>
+    <a:masterClrMapping/>
+  </p:clrMapOvr>
+</p:sld>
+</file>
+
+<file path=ppt/slides/slide7.xml><?xml version="1.0" encoding="utf-8"?>
+<p:sld xmlns:a="http://schemas.openxmlformats.org/drawingml/2006/main" xmlns:p="http://schemas.openxmlformats.org/presentationml/2006/main" xmlns:r="http://schemas.openxmlformats.org/officeDocument/2006/relationships">
+  <p:cSld>
+    <p:spTree>
+      <p:nvGrpSpPr>
+        <p:cNvPr id="1" name=""/>
+        <p:cNvGrpSpPr/>
+        <p:nvPr/>
+      </p:nvGrpSpPr>
+      <p:grpSpPr/>
+      <p:sp>
+        <p:nvSpPr>
+          <p:cNvPr id="2" name="Rectangle 1"/>
+          <p:cNvSpPr/>
+          <p:nvPr/>
+        </p:nvSpPr>
+        <p:spPr>
+          <a:xfrm>
+            <a:off x="0" y="0"/>
+            <a:ext cx="12191695" cy="6858000"/>
+          </a:xfrm>
+          <a:prstGeom prst="rect">
+            <a:avLst/>
+          </a:prstGeom>
+          <a:solidFill>
+            <a:srgbClr val="0B0F17"/>
+          </a:solidFill>
+          <a:ln>
+            <a:noFill/>
+          </a:ln>
+        </p:spPr>
+        <p:style>
+          <a:lnRef idx="1">
+            <a:schemeClr val="accent1"/>
+          </a:lnRef>
+          <a:fillRef idx="3">
+            <a:schemeClr val="accent1"/>
+          </a:fillRef>
+          <a:effectRef idx="2">
+            <a:schemeClr val="accent1"/>
+          </a:effectRef>
+          <a:fontRef idx="minor">
+            <a:schemeClr val="lt1"/>
+          </a:fontRef>
+        </p:style>
+        <p:txBody>
+          <a:bodyPr rtlCol="0" anchor="ctr"/>
+          <a:lstStyle/>
+          <a:p>
+            <a:pPr algn="ctr"/>
+          </a:p>
+        </p:txBody>
+      </p:sp>
+      <p:sp>
+        <p:nvSpPr>
+          <p:cNvPr id="3" name="Rectangle 2"/>
+          <p:cNvSpPr/>
+          <p:nvPr/>
+        </p:nvSpPr>
+        <p:spPr>
+          <a:xfrm>
+            <a:off x="731520" y="365760"/>
+            <a:ext cx="10728655" cy="18288"/>
+          </a:xfrm>
+          <a:prstGeom prst="rect">
+            <a:avLst/>
+          </a:prstGeom>
+          <a:solidFill>
+            <a:srgbClr val="38BDF8"/>
+          </a:solidFill>
+          <a:ln>
+            <a:solidFill>
+              <a:srgbClr val="38BDF8"/>
+            </a:solidFill>
+          </a:ln>
+        </p:spPr>
+        <p:style>
+          <a:lnRef idx="1">
+            <a:schemeClr val="accent1"/>
+          </a:lnRef>
+          <a:fillRef idx="3">
+            <a:schemeClr val="accent1"/>
+          </a:fillRef>
+          <a:effectRef idx="2">
+            <a:schemeClr val="accent1"/>
+          </a:effectRef>
+          <a:fontRef idx="minor">
+            <a:schemeClr val="lt1"/>
+          </a:fontRef>
+        </p:style>
+        <p:txBody>
+          <a:bodyPr rtlCol="0" anchor="ctr"/>
+          <a:lstStyle/>
+          <a:p>
+            <a:pPr algn="ctr"/>
+          </a:p>
+        </p:txBody>
+      </p:sp>
+      <p:sp>
+        <p:nvSpPr>
+          <p:cNvPr id="4" name="TextBox 3"/>
+          <p:cNvSpPr txBox="1"/>
+          <p:nvPr/>
+        </p:nvSpPr>
+        <p:spPr>
+          <a:xfrm>
+            <a:off x="731520" y="438912"/>
+            <a:ext cx="8229600" cy="274320"/>
+          </a:xfrm>
+          <a:prstGeom prst="rect">
+            <a:avLst/>
+          </a:prstGeom>
+          <a:noFill/>
+        </p:spPr>
+        <p:txBody>
+          <a:bodyPr wrap="square" lIns="0" rIns="0" tIns="0" bIns="0">
+            <a:spAutoFit/>
+          </a:bodyPr>
+          <a:lstStyle/>
+          <a:p>
+            <a:pPr>
+              <a:defRPr sz="950" b="1">
+                <a:solidFill>
+                  <a:srgbClr val="38BDF8"/>
+                </a:solidFill>
+              </a:defRPr>
+            </a:pPr>
+            <a:r>
+              <a:t>TERRESTRIAL PLATFORM  |  TERRAHIVE  |  DEPLOYMENT &amp; SI VALUE</a:t>
+            </a:r>
+          </a:p>
+        </p:txBody>
+      </p:sp>
+      <p:sp>
+        <p:nvSpPr>
+          <p:cNvPr id="5" name="TextBox 4"/>
+          <p:cNvSpPr txBox="1"/>
+          <p:nvPr/>
+        </p:nvSpPr>
+        <p:spPr>
+          <a:xfrm>
+            <a:off x="731520" y="731520"/>
+            <a:ext cx="9601200" cy="777240"/>
+          </a:xfrm>
+          <a:prstGeom prst="rect">
+            <a:avLst/>
+          </a:prstGeom>
+          <a:noFill/>
+        </p:spPr>
+        <p:txBody>
+          <a:bodyPr wrap="square" lIns="0" rIns="0" tIns="0" bIns="0">
+            <a:spAutoFit/>
+          </a:bodyPr>
+          <a:lstStyle/>
+          <a:p>
+            <a:pPr>
+              <a:defRPr sz="1900" b="1">
+                <a:solidFill>
+                  <a:srgbClr val="FFFFFF"/>
+                </a:solidFill>
+              </a:defRPr>
+            </a:pPr>
+            <a:r>
+              <a:t>System Integrator Deployment Framework &amp; Commercial Model</a:t>
+            </a:r>
+          </a:p>
+          <a:p>
+            <a:pPr>
+              <a:spcBef>
+                <a:spcPts val="300"/>
+              </a:spcBef>
+              <a:defRPr sz="1050">
+                <a:solidFill>
+                  <a:srgbClr val="94A3B8"/>
+                </a:solidFill>
+              </a:defRPr>
+            </a:pPr>
+            <a:r>
+              <a:t>Zero rip-and-replace turnkey onboarding with recurring enterprise margins and co-selling enablement.</a:t>
+            </a:r>
+          </a:p>
+        </p:txBody>
+      </p:sp>
+      <p:pic>
+        <p:nvPicPr>
+          <p:cNvPr id="6" name="Picture 5" descr="tp_logo_white.png"/>
+          <p:cNvPicPr>
+            <a:picLocks noChangeAspect="1"/>
+          </p:cNvPicPr>
+          <p:nvPr/>
+        </p:nvPicPr>
+        <p:blipFill>
+          <a:blip r:embed="rId2"/>
+          <a:stretch>
+            <a:fillRect/>
+          </a:stretch>
+        </p:blipFill>
+        <p:spPr>
+          <a:xfrm>
+            <a:off x="10469880" y="411480"/>
+            <a:ext cx="987552" cy="384048"/>
+          </a:xfrm>
+          <a:prstGeom prst="rect">
+            <a:avLst/>
+          </a:prstGeom>
+        </p:spPr>
+      </p:pic>
+      <p:sp>
+        <p:nvSpPr>
+          <p:cNvPr id="7" name="Rounded Rectangle 6"/>
+          <p:cNvSpPr/>
+          <p:nvPr/>
+        </p:nvSpPr>
+        <p:spPr>
+          <a:xfrm>
+            <a:off x="731520" y="1691640"/>
+            <a:ext cx="3429000" cy="2651760"/>
+          </a:xfrm>
+          <a:prstGeom prst="roundRect">
+            <a:avLst/>
+          </a:prstGeom>
+          <a:solidFill>
+            <a:srgbClr val="131926"/>
+          </a:solidFill>
+          <a:ln w="12700">
+            <a:solidFill>
+              <a:srgbClr val="28344B"/>
+            </a:solidFill>
+          </a:ln>
+        </p:spPr>
+        <p:style>
+          <a:lnRef idx="1">
+            <a:schemeClr val="accent1"/>
+          </a:lnRef>
+          <a:fillRef idx="3">
+            <a:schemeClr val="accent1"/>
+          </a:fillRef>
+          <a:effectRef idx="2">
+            <a:schemeClr val="accent1"/>
+          </a:effectRef>
+          <a:fontRef idx="minor">
+            <a:schemeClr val="lt1"/>
+          </a:fontRef>
+        </p:style>
+        <p:txBody>
+          <a:bodyPr rtlCol="0" anchor="ctr"/>
+          <a:lstStyle/>
+          <a:p>
+            <a:pPr algn="ctr"/>
+          </a:p>
+        </p:txBody>
+      </p:sp>
+      <p:sp>
+        <p:nvSpPr>
+          <p:cNvPr id="8" name="TextBox 7"/>
+          <p:cNvSpPr txBox="1"/>
+          <p:nvPr/>
+        </p:nvSpPr>
+        <p:spPr>
+          <a:xfrm>
+            <a:off x="914400" y="1856232"/>
+            <a:ext cx="3063240" cy="2322576"/>
+          </a:xfrm>
+          <a:prstGeom prst="rect">
+            <a:avLst/>
+          </a:prstGeom>
+          <a:noFill/>
+        </p:spPr>
+        <p:txBody>
+          <a:bodyPr wrap="square" lIns="0" rIns="0" tIns="0" bIns="0">
+            <a:spAutoFit/>
+          </a:bodyPr>
+          <a:lstStyle/>
+          <a:p>
+            <a:pPr>
+              <a:defRPr sz="850" b="1">
+                <a:solidFill>
+                  <a:srgbClr val="38BDF8"/>
+                </a:solidFill>
+              </a:defRPr>
+            </a:pPr>
+            <a:r>
+              <a:t>PHASE 01 | CONNECTIVITY &amp; AUDIT</a:t>
+            </a:r>
+          </a:p>
+          <a:p>
+            <a:pPr>
+              <a:spcBef>
+                <a:spcPts val="300"/>
+              </a:spcBef>
+              <a:spcAft>
+                <a:spcPts val="600"/>
               </a:spcAft>
-              <a:defRPr sz="1150" b="1">
-                <a:solidFill>
-                  <a:srgbClr val="00D4FF"/>
+              <a:defRPr sz="1200" b="1">
+                <a:solidFill>
+                  <a:srgbClr val="FFFFFF"/>
+                </a:solidFill>
+              </a:defRPr>
+            </a:pPr>
+            <a:r>
+              <a:t>Zero Rip-and-Replace Onboarding</a:t>
+            </a:r>
+          </a:p>
+          <a:p>
+            <a:pPr>
+              <a:defRPr sz="950">
+                <a:solidFill>
+                  <a:srgbClr val="F1F5F9"/>
+                </a:solidFill>
+              </a:defRPr>
+            </a:pPr>
+            <a:r>
+              <a:t>Non-intrusive protocol discovery across field PLCs, RTUs, and historians. Plug-and-play mapping of tags into the unified TPIM semantic namespace without stopping ongoing plant production.</a:t>
+            </a:r>
+          </a:p>
+        </p:txBody>
+      </p:sp>
+      <p:sp>
+        <p:nvSpPr>
+          <p:cNvPr id="9" name="Rounded Rectangle 8"/>
+          <p:cNvSpPr/>
+          <p:nvPr/>
+        </p:nvSpPr>
+        <p:spPr>
+          <a:xfrm>
+            <a:off x="4379976" y="1691640"/>
+            <a:ext cx="3429000" cy="2651760"/>
+          </a:xfrm>
+          <a:prstGeom prst="roundRect">
+            <a:avLst/>
+          </a:prstGeom>
+          <a:solidFill>
+            <a:srgbClr val="131926"/>
+          </a:solidFill>
+          <a:ln w="12700">
+            <a:solidFill>
+              <a:srgbClr val="28344B"/>
+            </a:solidFill>
+          </a:ln>
+        </p:spPr>
+        <p:style>
+          <a:lnRef idx="1">
+            <a:schemeClr val="accent1"/>
+          </a:lnRef>
+          <a:fillRef idx="3">
+            <a:schemeClr val="accent1"/>
+          </a:fillRef>
+          <a:effectRef idx="2">
+            <a:schemeClr val="accent1"/>
+          </a:effectRef>
+          <a:fontRef idx="minor">
+            <a:schemeClr val="lt1"/>
+          </a:fontRef>
+        </p:style>
+        <p:txBody>
+          <a:bodyPr rtlCol="0" anchor="ctr"/>
+          <a:lstStyle/>
+          <a:p>
+            <a:pPr algn="ctr"/>
+          </a:p>
+        </p:txBody>
+      </p:sp>
+      <p:sp>
+        <p:nvSpPr>
+          <p:cNvPr id="10" name="TextBox 9"/>
+          <p:cNvSpPr txBox="1"/>
+          <p:nvPr/>
+        </p:nvSpPr>
+        <p:spPr>
+          <a:xfrm>
+            <a:off x="4562856" y="1856232"/>
+            <a:ext cx="3063240" cy="2322576"/>
+          </a:xfrm>
+          <a:prstGeom prst="rect">
+            <a:avLst/>
+          </a:prstGeom>
+          <a:noFill/>
+        </p:spPr>
+        <p:txBody>
+          <a:bodyPr wrap="square" lIns="0" rIns="0" tIns="0" bIns="0">
+            <a:spAutoFit/>
+          </a:bodyPr>
+          <a:lstStyle/>
+          <a:p>
+            <a:pPr>
+              <a:defRPr sz="850" b="1">
+                <a:solidFill>
+                  <a:srgbClr val="38BDF8"/>
+                </a:solidFill>
+              </a:defRPr>
+            </a:pPr>
+            <a:r>
+              <a:t>PHASE 02 | TWIN CALIBRATION</a:t>
+            </a:r>
+          </a:p>
+          <a:p>
+            <a:pPr>
+              <a:spcBef>
+                <a:spcPts val="300"/>
+              </a:spcBef>
+              <a:spcAft>
+                <a:spcPts val="600"/>
+              </a:spcAft>
+              <a:defRPr sz="1200" b="1">
+                <a:solidFill>
+                  <a:srgbClr val="FFFFFF"/>
+                </a:solidFill>
+              </a:defRPr>
+            </a:pPr>
+            <a:r>
+              <a:t>Physics-Model Synchronization</a:t>
+            </a:r>
+          </a:p>
+          <a:p>
+            <a:pPr>
+              <a:defRPr sz="950">
+                <a:solidFill>
+                  <a:srgbClr val="F1F5F9"/>
+                </a:solidFill>
+              </a:defRPr>
+            </a:pPr>
+            <a:r>
+              <a:t>Deploy high-frequency Edge Gateway on premise. Calibrate first-principles thermodynamic and kinematic models against historical telemetry to achieve 99.4%+ deterministic accuracy.</a:t>
+            </a:r>
+          </a:p>
+        </p:txBody>
+      </p:sp>
+      <p:sp>
+        <p:nvSpPr>
+          <p:cNvPr id="11" name="Rounded Rectangle 10"/>
+          <p:cNvSpPr/>
+          <p:nvPr/>
+        </p:nvSpPr>
+        <p:spPr>
+          <a:xfrm>
+            <a:off x="8028432" y="1691640"/>
+            <a:ext cx="3429000" cy="2651760"/>
+          </a:xfrm>
+          <a:prstGeom prst="roundRect">
+            <a:avLst/>
+          </a:prstGeom>
+          <a:solidFill>
+            <a:srgbClr val="131926"/>
+          </a:solidFill>
+          <a:ln w="12700">
+            <a:solidFill>
+              <a:srgbClr val="28344B"/>
+            </a:solidFill>
+          </a:ln>
+        </p:spPr>
+        <p:style>
+          <a:lnRef idx="1">
+            <a:schemeClr val="accent1"/>
+          </a:lnRef>
+          <a:fillRef idx="3">
+            <a:schemeClr val="accent1"/>
+          </a:fillRef>
+          <a:effectRef idx="2">
+            <a:schemeClr val="accent1"/>
+          </a:effectRef>
+          <a:fontRef idx="minor">
+            <a:schemeClr val="lt1"/>
+          </a:fontRef>
+        </p:style>
+        <p:txBody>
+          <a:bodyPr rtlCol="0" anchor="ctr"/>
+          <a:lstStyle/>
+          <a:p>
+            <a:pPr algn="ctr"/>
+          </a:p>
+        </p:txBody>
+      </p:sp>
+      <p:sp>
+        <p:nvSpPr>
+          <p:cNvPr id="12" name="TextBox 11"/>
+          <p:cNvSpPr txBox="1"/>
+          <p:nvPr/>
+        </p:nvSpPr>
+        <p:spPr>
+          <a:xfrm>
+            <a:off x="8211312" y="1856232"/>
+            <a:ext cx="3063240" cy="2322576"/>
+          </a:xfrm>
+          <a:prstGeom prst="rect">
+            <a:avLst/>
+          </a:prstGeom>
+          <a:noFill/>
+        </p:spPr>
+        <p:txBody>
+          <a:bodyPr wrap="square" lIns="0" rIns="0" tIns="0" bIns="0">
+            <a:spAutoFit/>
+          </a:bodyPr>
+          <a:lstStyle/>
+          <a:p>
+            <a:pPr>
+              <a:defRPr sz="850" b="1">
+                <a:solidFill>
+                  <a:srgbClr val="38BDF8"/>
+                </a:solidFill>
+              </a:defRPr>
+            </a:pPr>
+            <a:r>
+              <a:t>PHASE 03 | AUTONOMOUS GO-LIVE</a:t>
+            </a:r>
+          </a:p>
+          <a:p>
+            <a:pPr>
+              <a:spcBef>
+                <a:spcPts val="300"/>
+              </a:spcBef>
+              <a:spcAft>
+                <a:spcPts val="600"/>
+              </a:spcAft>
+              <a:defRPr sz="1200" b="1">
+                <a:solidFill>
+                  <a:srgbClr val="FFFFFF"/>
+                </a:solidFill>
+              </a:defRPr>
+            </a:pPr>
+            <a:r>
+              <a:t>Closed-Loop Setpoint Actuation</a:t>
+            </a:r>
+          </a:p>
+          <a:p>
+            <a:pPr>
+              <a:defRPr sz="950">
+                <a:solidFill>
+                  <a:srgbClr val="F1F5F9"/>
+                </a:solidFill>
+              </a:defRPr>
+            </a:pPr>
+            <a:r>
+              <a:t>Supervisory closed-loop setpoint dispatch with bumpless transfer. Comprehensive ISA-101 verified cockpit handoff with continuous SI recurring monitoring and support tiers.</a:t>
+            </a:r>
+          </a:p>
+        </p:txBody>
+      </p:sp>
+      <p:sp>
+        <p:nvSpPr>
+          <p:cNvPr id="13" name="Rounded Rectangle 12"/>
+          <p:cNvSpPr/>
+          <p:nvPr/>
+        </p:nvSpPr>
+        <p:spPr>
+          <a:xfrm>
+            <a:off x="731520" y="4526280"/>
+            <a:ext cx="10728655" cy="1828800"/>
+          </a:xfrm>
+          <a:prstGeom prst="roundRect">
+            <a:avLst/>
+          </a:prstGeom>
+          <a:solidFill>
+            <a:srgbClr val="131926"/>
+          </a:solidFill>
+          <a:ln w="12700">
+            <a:solidFill>
+              <a:srgbClr val="38BDF8"/>
+            </a:solidFill>
+          </a:ln>
+        </p:spPr>
+        <p:style>
+          <a:lnRef idx="1">
+            <a:schemeClr val="accent1"/>
+          </a:lnRef>
+          <a:fillRef idx="3">
+            <a:schemeClr val="accent1"/>
+          </a:fillRef>
+          <a:effectRef idx="2">
+            <a:schemeClr val="accent1"/>
+          </a:effectRef>
+          <a:fontRef idx="minor">
+            <a:schemeClr val="lt1"/>
+          </a:fontRef>
+        </p:style>
+        <p:txBody>
+          <a:bodyPr rtlCol="0" anchor="ctr"/>
+          <a:lstStyle/>
+          <a:p>
+            <a:pPr algn="ctr"/>
+          </a:p>
+        </p:txBody>
+      </p:sp>
+      <p:sp>
+        <p:nvSpPr>
+          <p:cNvPr id="14" name="TextBox 13"/>
+          <p:cNvSpPr txBox="1"/>
+          <p:nvPr/>
+        </p:nvSpPr>
+        <p:spPr>
+          <a:xfrm>
+            <a:off x="960120" y="4663440"/>
+            <a:ext cx="10241280" cy="1554480"/>
+          </a:xfrm>
+          <a:prstGeom prst="rect">
+            <a:avLst/>
+          </a:prstGeom>
+          <a:noFill/>
+        </p:spPr>
+        <p:txBody>
+          <a:bodyPr wrap="square" lIns="0" rIns="0" tIns="0" bIns="0">
+            <a:spAutoFit/>
+          </a:bodyPr>
+          <a:lstStyle/>
+          <a:p>
+            <a:pPr>
+              <a:defRPr sz="1000" b="1">
+                <a:solidFill>
+                  <a:srgbClr val="38BDF8"/>
                 </a:solidFill>
               </a:defRPr>
             </a:pPr>
@@ -6303,14 +9065,47 @@
           </a:p>
           <a:p>
             <a:pPr>
-              <a:defRPr sz="1300" b="1">
-                <a:solidFill>
-                  <a:srgbClr val="FFFFFF"/>
-                </a:solidFill>
-              </a:defRPr>
-            </a:pPr>
-            <a:r>
-              <a:t>High recurring annual software margins (ARR)  |  Turnkey deployment in days, not months  |  Full co-selling &amp; pre-sales engineering support  |  Certified partner portal at platform.tpcloud.tech</a:t>
+              <a:spcBef>
+                <a:spcPts val="300"/>
+              </a:spcBef>
+              <a:defRPr sz="950">
+                <a:solidFill>
+                  <a:srgbClr val="F1F5F9"/>
+                </a:solidFill>
+              </a:defRPr>
+            </a:pPr>
+            <a:r>
+              <a:t>• High-Margin Software Recurring Revenue: Earn 25%–35% continuous recurring margin on every TerraHive software deployment, maintenance tier, and AI compute instance.</a:t>
+            </a:r>
+          </a:p>
+          <a:p>
+            <a:pPr>
+              <a:spcBef>
+                <a:spcPts val="300"/>
+              </a:spcBef>
+              <a:defRPr sz="950">
+                <a:solidFill>
+                  <a:srgbClr val="F1F5F9"/>
+                </a:solidFill>
+              </a:defRPr>
+            </a:pPr>
+            <a:r>
+              <a:t>• Turnkey Engineering Velocity: Deploy within 7 to 14 days leveraging pre-trained neural networks and automated semantic tag mapping, avoiding expensive months-long custom PLC code rewrites.</a:t>
+            </a:r>
+          </a:p>
+          <a:p>
+            <a:pPr>
+              <a:spcBef>
+                <a:spcPts val="300"/>
+              </a:spcBef>
+              <a:defRPr sz="950">
+                <a:solidFill>
+                  <a:srgbClr val="F1F5F9"/>
+                </a:solidFill>
+              </a:defRPr>
+            </a:pPr>
+            <a:r>
+              <a:t>• Enterprise Co-Selling &amp; Ecosystem: Access joint executive pipeline opportunities, certified engineering documentation, and board-level C-Suite presentation toolkits.</a:t>
             </a:r>
           </a:p>
         </p:txBody>
@@ -6641,4 +9436,324 @@
   </a:objectDefaults>
   <a:extraClrSchemeLst/>
 </a:theme>
+</file>
+
+<file path=ppt/theme/theme2.xml><?xml version="1.0" encoding="utf-8"?>
+<a:theme xmlns:a="http://schemas.openxmlformats.org/drawingml/2006/main" name="Office Theme">
+  <a:themeElements>
+    <a:clrScheme name="Office">
+      <a:dk1>
+        <a:sysClr val="windowText" lastClr="000000"/>
+      </a:dk1>
+      <a:lt1>
+        <a:sysClr val="window" lastClr="FFFFFF"/>
+      </a:lt1>
+      <a:dk2>
+        <a:srgbClr val="1F497D"/>
+      </a:dk2>
+      <a:lt2>
+        <a:srgbClr val="EEECE1"/>
+      </a:lt2>
+      <a:accent1>
+        <a:srgbClr val="4F81BD"/>
+      </a:accent1>
+      <a:accent2>
+        <a:srgbClr val="C0504D"/>
+      </a:accent2>
+      <a:accent3>
+        <a:srgbClr val="9BBB59"/>
+      </a:accent3>
+      <a:accent4>
+        <a:srgbClr val="8064A2"/>
+      </a:accent4>
+      <a:accent5>
+        <a:srgbClr val="4BACC6"/>
+      </a:accent5>
+      <a:accent6>
+        <a:srgbClr val="F79646"/>
+      </a:accent6>
+      <a:hlink>
+        <a:srgbClr val="0000FF"/>
+      </a:hlink>
+      <a:folHlink>
+        <a:srgbClr val="800080"/>
+      </a:folHlink>
+    </a:clrScheme>
+    <a:fontScheme name="Office">
+      <a:majorFont>
+        <a:latin typeface="Calibri"/>
+        <a:ea typeface=""/>
+        <a:cs typeface=""/>
+        <a:font script="Jpan" typeface="ＭＳ Ｐゴシック"/>
+        <a:font script="Hang" typeface="맑은 고딕"/>
+        <a:font script="Hans" typeface="宋体"/>
+        <a:font script="Hant" typeface="新細明體"/>
+        <a:font script="Arab" typeface="Times New Roman"/>
+        <a:font script="Hebr" typeface="Times New Roman"/>
+        <a:font script="Thai" typeface="Angsana New"/>
+        <a:font script="Ethi" typeface="Nyala"/>
+        <a:font script="Beng" typeface="Vrinda"/>
+        <a:font script="Gujr" typeface="Shruti"/>
+        <a:font script="Khmr" typeface="MoolBoran"/>
+        <a:font script="Knda" typeface="Tunga"/>
+        <a:font script="Guru" typeface="Raavi"/>
+        <a:font script="Cans" typeface="Euphemia"/>
+        <a:font script="Cher" typeface="Plantagenet Cherokee"/>
+        <a:font script="Yiii" typeface="Microsoft Yi Baiti"/>
+        <a:font script="Tibt" typeface="Microsoft Himalaya"/>
+        <a:font script="Thaa" typeface="MV Boli"/>
+        <a:font script="Deva" typeface="Mangal"/>
+        <a:font script="Telu" typeface="Gautami"/>
+        <a:font script="Taml" typeface="Latha"/>
+        <a:font script="Syrc" typeface="Estrangelo Edessa"/>
+        <a:font script="Orya" typeface="Kalinga"/>
+        <a:font script="Mlym" typeface="Kartika"/>
+        <a:font script="Laoo" typeface="DokChampa"/>
+        <a:font script="Sinh" typeface="Iskoola Pota"/>
+        <a:font script="Mong" typeface="Mongolian Baiti"/>
+        <a:font script="Viet" typeface="Times New Roman"/>
+        <a:font script="Uigh" typeface="Microsoft Uighur"/>
+        <a:font script="Geor" typeface="Sylfaen"/>
+      </a:majorFont>
+      <a:minorFont>
+        <a:latin typeface="Calibri"/>
+        <a:ea typeface=""/>
+        <a:cs typeface=""/>
+        <a:font script="Jpan" typeface="ＭＳ Ｐゴシック"/>
+        <a:font script="Hang" typeface="맑은 고딕"/>
+        <a:font script="Hans" typeface="宋体"/>
+        <a:font script="Hant" typeface="新細明體"/>
+        <a:font script="Arab" typeface="Arial"/>
+        <a:font script="Hebr" typeface="Arial"/>
+        <a:font script="Thai" typeface="Cordia New"/>
+        <a:font script="Ethi" typeface="Nyala"/>
+        <a:font script="Beng" typeface="Vrinda"/>
+        <a:font script="Gujr" typeface="Shruti"/>
+        <a:font script="Khmr" typeface="DaunPenh"/>
+        <a:font script="Knda" typeface="Tunga"/>
+        <a:font script="Guru" typeface="Raavi"/>
+        <a:font script="Cans" typeface="Euphemia"/>
+        <a:font script="Cher" typeface="Plantagenet Cherokee"/>
+        <a:font script="Yiii" typeface="Microsoft Yi Baiti"/>
+        <a:font script="Tibt" typeface="Microsoft Himalaya"/>
+        <a:font script="Thaa" typeface="MV Boli"/>
+        <a:font script="Deva" typeface="Mangal"/>
+        <a:font script="Telu" typeface="Gautami"/>
+        <a:font script="Taml" typeface="Latha"/>
+        <a:font script="Syrc" typeface="Estrangelo Edessa"/>
+        <a:font script="Orya" typeface="Kalinga"/>
+        <a:font script="Mlym" typeface="Kartika"/>
+        <a:font script="Laoo" typeface="DokChampa"/>
+        <a:font script="Sinh" typeface="Iskoola Pota"/>
+        <a:font script="Mong" typeface="Mongolian Baiti"/>
+        <a:font script="Viet" typeface="Arial"/>
+        <a:font script="Uigh" typeface="Microsoft Uighur"/>
+        <a:font script="Geor" typeface="Sylfaen"/>
+      </a:minorFont>
+    </a:fontScheme>
+    <a:fmtScheme name="Office">
+      <a:fillStyleLst>
+        <a:solidFill>
+          <a:schemeClr val="phClr"/>
+        </a:solidFill>
+        <a:gradFill rotWithShape="1">
+          <a:gsLst>
+            <a:gs pos="0">
+              <a:schemeClr val="phClr">
+                <a:tint val="50000"/>
+                <a:satMod val="300000"/>
+              </a:schemeClr>
+            </a:gs>
+            <a:gs pos="35000">
+              <a:schemeClr val="phClr">
+                <a:tint val="37000"/>
+                <a:satMod val="300000"/>
+              </a:schemeClr>
+            </a:gs>
+            <a:gs pos="100000">
+              <a:schemeClr val="phClr">
+                <a:tint val="15000"/>
+                <a:satMod val="350000"/>
+              </a:schemeClr>
+            </a:gs>
+          </a:gsLst>
+          <a:lin ang="16200000" scaled="1"/>
+        </a:gradFill>
+        <a:gradFill rotWithShape="1">
+          <a:gsLst>
+            <a:gs pos="0">
+              <a:schemeClr val="phClr">
+                <a:tint val="100000"/>
+                <a:shade val="100000"/>
+                <a:satMod val="130000"/>
+              </a:schemeClr>
+            </a:gs>
+            <a:gs pos="100000">
+              <a:schemeClr val="phClr">
+                <a:tint val="50000"/>
+                <a:shade val="100000"/>
+                <a:satMod val="350000"/>
+              </a:schemeClr>
+            </a:gs>
+          </a:gsLst>
+          <a:lin ang="16200000" scaled="0"/>
+        </a:gradFill>
+      </a:fillStyleLst>
+      <a:lnStyleLst>
+        <a:ln w="9525" cap="flat" cmpd="sng" algn="ctr">
+          <a:solidFill>
+            <a:schemeClr val="phClr">
+              <a:shade val="95000"/>
+              <a:satMod val="105000"/>
+            </a:schemeClr>
+          </a:solidFill>
+          <a:prstDash val="solid"/>
+        </a:ln>
+        <a:ln w="25400" cap="flat" cmpd="sng" algn="ctr">
+          <a:solidFill>
+            <a:schemeClr val="phClr"/>
+          </a:solidFill>
+          <a:prstDash val="solid"/>
+        </a:ln>
+        <a:ln w="38100" cap="flat" cmpd="sng" algn="ctr">
+          <a:solidFill>
+            <a:schemeClr val="phClr"/>
+          </a:solidFill>
+          <a:prstDash val="solid"/>
+        </a:ln>
+      </a:lnStyleLst>
+      <a:effectStyleLst>
+        <a:effectStyle>
+          <a:effectLst>
+            <a:outerShdw blurRad="40000" dist="20000" dir="5400000" rotWithShape="0">
+              <a:srgbClr val="000000">
+                <a:alpha val="38000"/>
+              </a:srgbClr>
+            </a:outerShdw>
+          </a:effectLst>
+        </a:effectStyle>
+        <a:effectStyle>
+          <a:effectLst>
+            <a:outerShdw blurRad="40000" dist="23000" dir="5400000" rotWithShape="0">
+              <a:srgbClr val="000000">
+                <a:alpha val="35000"/>
+              </a:srgbClr>
+            </a:outerShdw>
+          </a:effectLst>
+        </a:effectStyle>
+        <a:effectStyle>
+          <a:effectLst>
+            <a:outerShdw blurRad="40000" dist="23000" dir="5400000" rotWithShape="0">
+              <a:srgbClr val="000000">
+                <a:alpha val="35000"/>
+              </a:srgbClr>
+            </a:outerShdw>
+          </a:effectLst>
+          <a:scene3d>
+            <a:camera prst="orthographicFront">
+              <a:rot lat="0" lon="0" rev="0"/>
+            </a:camera>
+            <a:lightRig rig="threePt" dir="t">
+              <a:rot lat="0" lon="0" rev="1200000"/>
+            </a:lightRig>
+          </a:scene3d>
+          <a:sp3d>
+            <a:bevelT w="63500" h="25400"/>
+          </a:sp3d>
+        </a:effectStyle>
+      </a:effectStyleLst>
+      <a:bgFillStyleLst>
+        <a:solidFill>
+          <a:schemeClr val="phClr"/>
+        </a:solidFill>
+        <a:gradFill rotWithShape="1">
+          <a:gsLst>
+            <a:gs pos="0">
+              <a:schemeClr val="phClr">
+                <a:tint val="40000"/>
+                <a:satMod val="350000"/>
+              </a:schemeClr>
+            </a:gs>
+            <a:gs pos="40000">
+              <a:schemeClr val="phClr">
+                <a:tint val="45000"/>
+                <a:shade val="99000"/>
+                <a:satMod val="350000"/>
+              </a:schemeClr>
+            </a:gs>
+            <a:gs pos="100000">
+              <a:schemeClr val="phClr">
+                <a:shade val="20000"/>
+                <a:satMod val="255000"/>
+              </a:schemeClr>
+            </a:gs>
+          </a:gsLst>
+          <a:path path="circle">
+            <a:fillToRect l="50000" t="-80000" r="50000" b="180000"/>
+          </a:path>
+        </a:gradFill>
+        <a:gradFill rotWithShape="1">
+          <a:gsLst>
+            <a:gs pos="0">
+              <a:schemeClr val="phClr">
+                <a:tint val="80000"/>
+                <a:satMod val="300000"/>
+              </a:schemeClr>
+            </a:gs>
+            <a:gs pos="100000">
+              <a:schemeClr val="phClr">
+                <a:shade val="30000"/>
+                <a:satMod val="200000"/>
+              </a:schemeClr>
+            </a:gs>
+          </a:gsLst>
+          <a:path path="circle">
+            <a:fillToRect l="50000" t="50000" r="50000" b="50000"/>
+          </a:path>
+        </a:gradFill>
+      </a:bgFillStyleLst>
+    </a:fmtScheme>
+  </a:themeElements>
+  <a:objectDefaults>
+    <a:spDef>
+      <a:spPr/>
+      <a:bodyPr/>
+      <a:lstStyle/>
+      <a:style>
+        <a:lnRef idx="1">
+          <a:schemeClr val="accent1"/>
+        </a:lnRef>
+        <a:fillRef idx="3">
+          <a:schemeClr val="accent1"/>
+        </a:fillRef>
+        <a:effectRef idx="2">
+          <a:schemeClr val="accent1"/>
+        </a:effectRef>
+        <a:fontRef idx="minor">
+          <a:schemeClr val="lt1"/>
+        </a:fontRef>
+      </a:style>
+    </a:spDef>
+    <a:lnDef>
+      <a:spPr/>
+      <a:bodyPr/>
+      <a:lstStyle/>
+      <a:style>
+        <a:lnRef idx="2">
+          <a:schemeClr val="accent1"/>
+        </a:lnRef>
+        <a:fillRef idx="0">
+          <a:schemeClr val="accent1"/>
+        </a:fillRef>
+        <a:effectRef idx="1">
+          <a:schemeClr val="accent1"/>
+        </a:effectRef>
+        <a:fontRef idx="minor">
+          <a:schemeClr val="tx1"/>
+        </a:fontRef>
+      </a:style>
+    </a:lnDef>
+  </a:objectDefaults>
+  <a:extraClrSchemeLst/>
+</a:theme>
 </file>